--- a/03-Python程序设计-项目实战/V2授课PPT/W02-第4次课-交付你的第一个工程模板.pptx
+++ b/03-Python程序设计-项目实战/V2授课PPT/W02-第4次课-交付你的第一个工程模板.pptx
@@ -4618,7 +4618,7 @@
                 </a:solidFill>
                 <a:latin typeface="微软雅黑"/>
               </a:rPr>
-              <a:t>进组第一件事不是写代码。方总监下令：全组统一工程底座，'以后所有代码都长在这个模板上。'——工单P1.2：交付标准工程模板（venv+Git+目录规范），模板即资产。</a:t>
+              <a:t>进组第一件事不是写代码。方总监下令：全组统一工程底座，'以后所有代码都长在这个模板上。'——工单P1.2：交付标准工程模板（conda环境+Git+目录规范），模板即资产。</a:t>
             </a:r>
           </a:p>
         </p:txBody>

--- a/03-Python程序设计-项目实战/V2授课PPT/W02-第4次课-交付你的第一个工程模板.pptx
+++ b/03-Python程序设计-项目实战/V2授课PPT/W02-第4次课-交付你的第一个工程模板.pptx
@@ -8,6 +8,9 @@
     <p:sldId id="256" r:id="rId7"/>
     <p:sldId id="280" r:id="rId32"/>
     <p:sldId id="307" r:id="rId59"/>
+    <p:sldId id="363" r:id="rId15"/>
+    <p:sldId id="364" r:id="rId16"/>
+    <p:sldId id="365" r:id="rId17"/>
     <p:sldId id="334" r:id="rId86"/>
     <p:sldId id="336" r:id="rId88"/>
     <p:sldId id="361" r:id="rId113"/>
@@ -4309,6 +4312,560 @@
 </p:sld>
 </file>
 
+<file path=ppt/slides/slide10.xml><?xml version="1.0" encoding="utf-8"?>
+<p:sld xmlns:a="http://schemas.openxmlformats.org/drawingml/2006/main" xmlns:p="http://schemas.openxmlformats.org/presentationml/2006/main" xmlns:r="http://schemas.openxmlformats.org/officeDocument/2006/relationships">
+  <p:cSld>
+    <p:spTree>
+      <p:nvGrpSpPr>
+        <p:cNvPr id="1" name=""/>
+        <p:cNvGrpSpPr/>
+        <p:nvPr/>
+      </p:nvGrpSpPr>
+      <p:grpSpPr/>
+      <p:sp>
+        <p:nvSpPr>
+          <p:cNvPr id="2" name="Rounded Rectangle 1"/>
+          <p:cNvSpPr/>
+          <p:nvPr/>
+        </p:nvSpPr>
+        <p:spPr>
+          <a:xfrm>
+            <a:off x="0" y="0"/>
+            <a:ext cx="12191695" cy="64008"/>
+          </a:xfrm>
+          <a:prstGeom prst="roundRect">
+            <a:avLst>
+              <a:gd name="adj" fmla="val 50000"/>
+            </a:avLst>
+          </a:prstGeom>
+          <a:solidFill>
+            <a:srgbClr val="0B5E54"/>
+          </a:solidFill>
+          <a:ln>
+            <a:noFill/>
+          </a:ln>
+          <a:effectLst/>
+        </p:spPr>
+        <p:style>
+          <a:lnRef idx="1">
+            <a:schemeClr val="accent1"/>
+          </a:lnRef>
+          <a:fillRef idx="3">
+            <a:schemeClr val="accent1"/>
+          </a:fillRef>
+          <a:effectRef idx="2">
+            <a:schemeClr val="accent1"/>
+          </a:effectRef>
+          <a:fontRef idx="minor">
+            <a:schemeClr val="lt1"/>
+          </a:fontRef>
+        </p:style>
+        <p:txBody>
+          <a:bodyPr rtlCol="0" anchor="ctr"/>
+          <a:lstStyle/>
+          <a:p>
+            <a:pPr algn="ctr"/>
+          </a:p>
+        </p:txBody>
+      </p:sp>
+      <p:sp>
+        <p:nvSpPr>
+          <p:cNvPr id="3" name="TextBox 2"/>
+          <p:cNvSpPr txBox="1"/>
+          <p:nvPr/>
+        </p:nvSpPr>
+        <p:spPr>
+          <a:xfrm>
+            <a:off x="475488" y="146304"/>
+            <a:ext cx="8229600" cy="292608"/>
+          </a:xfrm>
+          <a:prstGeom prst="rect">
+            <a:avLst/>
+          </a:prstGeom>
+          <a:noFill/>
+        </p:spPr>
+        <p:txBody>
+          <a:bodyPr wrap="square" anchor="t" lIns="0" rIns="0" tIns="0" bIns="0">
+            <a:spAutoFit/>
+          </a:bodyPr>
+          <a:lstStyle/>
+          <a:p>
+            <a:pPr algn="l">
+              <a:lnSpc>
+                <a:spcPct val="114000"/>
+              </a:lnSpc>
+            </a:pPr>
+            <a:r>
+              <a:rPr sz="1100" b="1">
+                <a:solidFill>
+                  <a:srgbClr val="0B5E54"/>
+                </a:solidFill>
+              </a:rPr>
+              <a:t>工单实战 · 运行留证</a:t>
+            </a:r>
+          </a:p>
+        </p:txBody>
+      </p:sp>
+      <p:sp>
+        <p:nvSpPr>
+          <p:cNvPr id="4" name="Rounded Rectangle 3"/>
+          <p:cNvSpPr/>
+          <p:nvPr/>
+        </p:nvSpPr>
+        <p:spPr>
+          <a:xfrm>
+            <a:off x="475488" y="475488"/>
+            <a:ext cx="2027872" cy="310896"/>
+          </a:xfrm>
+          <a:prstGeom prst="roundRect">
+            <a:avLst>
+              <a:gd name="adj" fmla="val 50000"/>
+            </a:avLst>
+          </a:prstGeom>
+          <a:solidFill>
+            <a:srgbClr val="C9A227"/>
+          </a:solidFill>
+          <a:ln>
+            <a:noFill/>
+          </a:ln>
+          <a:effectLst/>
+        </p:spPr>
+        <p:style>
+          <a:lnRef idx="1">
+            <a:schemeClr val="accent1"/>
+          </a:lnRef>
+          <a:fillRef idx="3">
+            <a:schemeClr val="accent1"/>
+          </a:fillRef>
+          <a:effectRef idx="2">
+            <a:schemeClr val="accent1"/>
+          </a:effectRef>
+          <a:fontRef idx="minor">
+            <a:schemeClr val="lt1"/>
+          </a:fontRef>
+        </p:style>
+        <p:txBody>
+          <a:bodyPr rtlCol="0" anchor="ctr"/>
+          <a:lstStyle/>
+          <a:p>
+            <a:pPr algn="ctr"/>
+          </a:p>
+        </p:txBody>
+      </p:sp>
+      <p:sp>
+        <p:nvSpPr>
+          <p:cNvPr id="5" name="TextBox 4"/>
+          <p:cNvSpPr txBox="1"/>
+          <p:nvPr/>
+        </p:nvSpPr>
+        <p:spPr>
+          <a:xfrm>
+            <a:off x="475488" y="475488"/>
+            <a:ext cx="2027872" cy="310896"/>
+          </a:xfrm>
+          <a:prstGeom prst="rect">
+            <a:avLst/>
+          </a:prstGeom>
+          <a:noFill/>
+        </p:spPr>
+        <p:txBody>
+          <a:bodyPr wrap="square" anchor="ctr" lIns="0" rIns="0" tIns="0" bIns="0">
+            <a:spAutoFit/>
+          </a:bodyPr>
+          <a:lstStyle/>
+          <a:p>
+            <a:pPr algn="ctr">
+              <a:lnSpc>
+                <a:spcPct val="114000"/>
+              </a:lnSpc>
+            </a:pPr>
+            <a:r>
+              <a:rPr sz="1050" b="1">
+                <a:solidFill>
+                  <a:srgbClr val="FFFFFF"/>
+                </a:solidFill>
+              </a:rPr>
+              <a:t>SCREENSHOT · 终端逐字截图</a:t>
+            </a:r>
+          </a:p>
+        </p:txBody>
+      </p:sp>
+      <p:sp>
+        <p:nvSpPr>
+          <p:cNvPr id="6" name="TextBox 5"/>
+          <p:cNvSpPr txBox="1"/>
+          <p:nvPr/>
+        </p:nvSpPr>
+        <p:spPr>
+          <a:xfrm>
+            <a:off x="475488" y="859536"/>
+            <a:ext cx="11237976" cy="502920"/>
+          </a:xfrm>
+          <a:prstGeom prst="rect">
+            <a:avLst/>
+          </a:prstGeom>
+          <a:noFill/>
+        </p:spPr>
+        <p:txBody>
+          <a:bodyPr wrap="square" anchor="t" lIns="0" rIns="0" tIns="0" bIns="0">
+            <a:spAutoFit/>
+          </a:bodyPr>
+          <a:lstStyle/>
+          <a:p>
+            <a:pPr algn="l">
+              <a:lnSpc>
+                <a:spcPct val="114000"/>
+              </a:lnSpc>
+            </a:pPr>
+            <a:r>
+              <a:rPr sz="2200" b="1">
+                <a:solidFill>
+                  <a:srgbClr val="1B2B28"/>
+                </a:solidFill>
+              </a:rPr>
+              <a:t>P1.2 · 另一套阶梯逐字输出＋pytest 全量实跑</a:t>
+            </a:r>
+          </a:p>
+        </p:txBody>
+      </p:sp>
+      <p:sp>
+        <p:nvSpPr>
+          <p:cNvPr id="7" name="Rounded Rectangle 6"/>
+          <p:cNvSpPr/>
+          <p:nvPr/>
+        </p:nvSpPr>
+        <p:spPr>
+          <a:xfrm>
+            <a:off x="475488" y="1389888"/>
+            <a:ext cx="1234440" cy="27432"/>
+          </a:xfrm>
+          <a:prstGeom prst="roundRect">
+            <a:avLst>
+              <a:gd name="adj" fmla="val 50000"/>
+            </a:avLst>
+          </a:prstGeom>
+          <a:solidFill>
+            <a:srgbClr val="C9A227"/>
+          </a:solidFill>
+          <a:ln>
+            <a:noFill/>
+          </a:ln>
+          <a:effectLst/>
+        </p:spPr>
+        <p:style>
+          <a:lnRef idx="1">
+            <a:schemeClr val="accent1"/>
+          </a:lnRef>
+          <a:fillRef idx="3">
+            <a:schemeClr val="accent1"/>
+          </a:fillRef>
+          <a:effectRef idx="2">
+            <a:schemeClr val="accent1"/>
+          </a:effectRef>
+          <a:fontRef idx="minor">
+            <a:schemeClr val="lt1"/>
+          </a:fontRef>
+        </p:style>
+        <p:txBody>
+          <a:bodyPr rtlCol="0" anchor="ctr"/>
+          <a:lstStyle/>
+          <a:p>
+            <a:pPr algn="ctr"/>
+          </a:p>
+        </p:txBody>
+      </p:sp>
+      <p:sp>
+        <p:nvSpPr>
+          <p:cNvPr id="8" name="Rounded Rectangle 7"/>
+          <p:cNvSpPr/>
+          <p:nvPr/>
+        </p:nvSpPr>
+        <p:spPr>
+          <a:xfrm>
+            <a:off x="475488" y="6419088"/>
+            <a:ext cx="11237976" cy="10972"/>
+          </a:xfrm>
+          <a:prstGeom prst="roundRect">
+            <a:avLst>
+              <a:gd name="adj" fmla="val 50000"/>
+            </a:avLst>
+          </a:prstGeom>
+          <a:solidFill>
+            <a:srgbClr val="E4F1EE"/>
+          </a:solidFill>
+          <a:ln>
+            <a:noFill/>
+          </a:ln>
+          <a:effectLst/>
+        </p:spPr>
+        <p:style>
+          <a:lnRef idx="1">
+            <a:schemeClr val="accent1"/>
+          </a:lnRef>
+          <a:fillRef idx="3">
+            <a:schemeClr val="accent1"/>
+          </a:fillRef>
+          <a:effectRef idx="2">
+            <a:schemeClr val="accent1"/>
+          </a:effectRef>
+          <a:fontRef idx="minor">
+            <a:schemeClr val="lt1"/>
+          </a:fontRef>
+        </p:style>
+        <p:txBody>
+          <a:bodyPr rtlCol="0" anchor="ctr"/>
+          <a:lstStyle/>
+          <a:p>
+            <a:pPr algn="ctr"/>
+          </a:p>
+        </p:txBody>
+      </p:sp>
+      <p:sp>
+        <p:nvSpPr>
+          <p:cNvPr id="9" name="TextBox 8"/>
+          <p:cNvSpPr txBox="1"/>
+          <p:nvPr/>
+        </p:nvSpPr>
+        <p:spPr>
+          <a:xfrm>
+            <a:off x="475488" y="6455664"/>
+            <a:ext cx="7315200" cy="292608"/>
+          </a:xfrm>
+          <a:prstGeom prst="rect">
+            <a:avLst/>
+          </a:prstGeom>
+          <a:noFill/>
+        </p:spPr>
+        <p:txBody>
+          <a:bodyPr wrap="square" anchor="t" lIns="0" rIns="0" tIns="0" bIns="0">
+            <a:spAutoFit/>
+          </a:bodyPr>
+          <a:lstStyle/>
+          <a:p>
+            <a:pPr algn="l">
+              <a:lnSpc>
+                <a:spcPct val="114000"/>
+              </a:lnSpc>
+            </a:pPr>
+            <a:r>
+              <a:rPr sz="900" b="0">
+                <a:solidFill>
+                  <a:srgbClr val="5C6E6A"/>
+                </a:solidFill>
+              </a:rPr>
+              <a:t>两江智造集团 · Python程序设计（项目实战）</a:t>
+            </a:r>
+          </a:p>
+        </p:txBody>
+      </p:sp>
+      <p:sp>
+        <p:nvSpPr>
+          <p:cNvPr id="10" name="TextBox 9"/>
+          <p:cNvSpPr txBox="1"/>
+          <p:nvPr/>
+        </p:nvSpPr>
+        <p:spPr>
+          <a:xfrm>
+            <a:off x="10597896" y="6537960"/>
+            <a:ext cx="996696" cy="301752"/>
+          </a:xfrm>
+          <a:prstGeom prst="rect">
+            <a:avLst/>
+          </a:prstGeom>
+          <a:noFill/>
+        </p:spPr>
+        <p:txBody>
+          <a:bodyPr wrap="square" anchor="t" lIns="0" rIns="0" tIns="0" bIns="0">
+            <a:spAutoFit/>
+          </a:bodyPr>
+          <a:lstStyle/>
+          <a:p>
+            <a:pPr algn="r">
+              <a:lnSpc>
+                <a:spcPct val="114000"/>
+              </a:lnSpc>
+            </a:pPr>
+            <a:r>
+              <a:rPr sz="1000" b="0">
+                <a:solidFill>
+                  <a:srgbClr val="8A97B5"/>
+                </a:solidFill>
+              </a:rPr>
+              <a:t>6 / 10</a:t>
+            </a:r>
+          </a:p>
+        </p:txBody>
+      </p:sp>
+      <p:sp>
+        <p:nvSpPr>
+          <p:cNvPr id="11" name="TextBox 10"/>
+          <p:cNvSpPr txBox="1"/>
+          <p:nvPr/>
+        </p:nvSpPr>
+        <p:spPr>
+          <a:xfrm>
+            <a:off x="475488" y="1517904"/>
+            <a:ext cx="11237976" cy="237744"/>
+          </a:xfrm>
+          <a:prstGeom prst="rect">
+            <a:avLst/>
+          </a:prstGeom>
+          <a:noFill/>
+        </p:spPr>
+        <p:txBody>
+          <a:bodyPr wrap="square" anchor="t" lIns="0" rIns="0" tIns="0" bIns="0">
+            <a:spAutoFit/>
+          </a:bodyPr>
+          <a:lstStyle/>
+          <a:p>
+            <a:pPr algn="l">
+              <a:lnSpc>
+                <a:spcPct val="114000"/>
+              </a:lnSpc>
+            </a:pPr>
+            <a:r>
+              <a:rPr sz="1000" b="0">
+                <a:solidFill>
+                  <a:srgbClr val="5C6E6A"/>
+                </a:solidFill>
+              </a:rPr>
+              <a:t>上：p12_proj_template 分层达标逐字输出（见上一页）｜下：pytest 全量实跑（退出码 0，全绿）</a:t>
+            </a:r>
+          </a:p>
+        </p:txBody>
+      </p:sp>
+      <p:pic>
+        <p:nvPicPr>
+          <p:cNvPr id="12" name="Picture 11" descr="p12_proj_template_classroom.png"/>
+          <p:cNvPicPr>
+            <a:picLocks noChangeAspect="1"/>
+          </p:cNvPicPr>
+          <p:nvPr/>
+        </p:nvPicPr>
+        <p:blipFill>
+          <a:blip r:embed="rId2"/>
+          <a:stretch>
+            <a:fillRect/>
+          </a:stretch>
+        </p:blipFill>
+        <p:spPr>
+          <a:xfrm>
+            <a:off x="2197198" y="1792224"/>
+            <a:ext cx="7794555" cy="2314983"/>
+          </a:xfrm>
+          <a:prstGeom prst="rect">
+            <a:avLst/>
+          </a:prstGeom>
+        </p:spPr>
+      </p:pic>
+      <p:sp>
+        <p:nvSpPr>
+          <p:cNvPr id="13" name="TextBox 12"/>
+          <p:cNvSpPr txBox="1"/>
+          <p:nvPr/>
+        </p:nvSpPr>
+        <p:spPr>
+          <a:xfrm>
+            <a:off x="475488" y="4143782"/>
+            <a:ext cx="11237976" cy="256032"/>
+          </a:xfrm>
+          <a:prstGeom prst="rect">
+            <a:avLst/>
+          </a:prstGeom>
+          <a:noFill/>
+        </p:spPr>
+        <p:txBody>
+          <a:bodyPr wrap="square" anchor="t" lIns="0" rIns="0" tIns="0" bIns="0">
+            <a:spAutoFit/>
+          </a:bodyPr>
+          <a:lstStyle/>
+          <a:p>
+            <a:pPr algn="l">
+              <a:lnSpc>
+                <a:spcPct val="114000"/>
+              </a:lnSpc>
+            </a:pPr>
+            <a:r>
+              <a:rPr sz="850" b="0">
+                <a:solidFill>
+                  <a:srgbClr val="5C6E6A"/>
+                </a:solidFill>
+              </a:rPr>
+              <a:t>▲ 分层达标（第 49 行起）：四档逐字原文，未改写</a:t>
+            </a:r>
+          </a:p>
+        </p:txBody>
+      </p:sp>
+      <p:pic>
+        <p:nvPicPr>
+          <p:cNvPr id="14" name="Picture 13" descr="p12_proj_template_pytest.png"/>
+          <p:cNvPicPr>
+            <a:picLocks noChangeAspect="1"/>
+          </p:cNvPicPr>
+          <p:nvPr/>
+        </p:nvPicPr>
+        <p:blipFill>
+          <a:blip r:embed="rId3"/>
+          <a:stretch>
+            <a:fillRect/>
+          </a:stretch>
+        </p:blipFill>
+        <p:spPr>
+          <a:xfrm>
+            <a:off x="2197198" y="4418102"/>
+            <a:ext cx="7794555" cy="1223745"/>
+          </a:xfrm>
+          <a:prstGeom prst="rect">
+            <a:avLst/>
+          </a:prstGeom>
+        </p:spPr>
+      </p:pic>
+      <p:sp>
+        <p:nvSpPr>
+          <p:cNvPr id="15" name="TextBox 14"/>
+          <p:cNvSpPr txBox="1"/>
+          <p:nvPr/>
+        </p:nvSpPr>
+        <p:spPr>
+          <a:xfrm>
+            <a:off x="475488" y="5678424"/>
+            <a:ext cx="11237976" cy="256032"/>
+          </a:xfrm>
+          <a:prstGeom prst="rect">
+            <a:avLst/>
+          </a:prstGeom>
+          <a:noFill/>
+        </p:spPr>
+        <p:txBody>
+          <a:bodyPr wrap="square" anchor="t" lIns="0" rIns="0" tIns="0" bIns="0">
+            <a:spAutoFit/>
+          </a:bodyPr>
+          <a:lstStyle/>
+          <a:p>
+            <a:pPr algn="l">
+              <a:lnSpc>
+                <a:spcPct val="114000"/>
+              </a:lnSpc>
+            </a:pPr>
+            <a:r>
+              <a:rPr sz="850" b="0">
+                <a:solidFill>
+                  <a:srgbClr val="5C6E6A"/>
+                </a:solidFill>
+              </a:rPr>
+              <a:t>▲ pytest：81 passed in 1.30s（本机实跑，非示例）</a:t>
+            </a:r>
+          </a:p>
+        </p:txBody>
+      </p:sp>
+    </p:spTree>
+  </p:cSld>
+  <p:clrMapOvr>
+    <a:masterClrMapping/>
+  </p:clrMapOvr>
+</p:sld>
+</file>
+
 <file path=ppt/slides/slide2.xml><?xml version="1.0" encoding="utf-8"?>
 <p:sld xmlns:a="http://schemas.openxmlformats.org/drawingml/2006/main" xmlns:p="http://schemas.openxmlformats.org/presentationml/2006/main" xmlns:r="http://schemas.openxmlformats.org/officeDocument/2006/relationships">
   <p:cSld>
@@ -4770,7 +5327,7 @@
                 </a:solidFill>
                 <a:latin typeface="微软雅黑"/>
               </a:rPr>
-              <a:t>2 / 7</a:t>
+              <a:t>2 / 10</a:t>
             </a:r>
           </a:p>
         </p:txBody>
@@ -5562,7 +6119,7 @@
                 </a:solidFill>
                 <a:latin typeface="微软雅黑"/>
               </a:rPr>
-              <a:t>3 / 7</a:t>
+              <a:t>3 / 10</a:t>
             </a:r>
           </a:p>
         </p:txBody>
@@ -6147,7 +6704,7 @@
                 </a:solidFill>
                 <a:latin typeface="微软雅黑"/>
               </a:rPr>
-              <a:t>4 / 7</a:t>
+              <a:t>7 / 10</a:t>
             </a:r>
           </a:p>
         </p:txBody>
@@ -6741,7 +7298,7 @@
                 </a:solidFill>
                 <a:latin typeface="微软雅黑"/>
               </a:rPr>
-              <a:t>5 / 7</a:t>
+              <a:t>8 / 10</a:t>
             </a:r>
           </a:p>
         </p:txBody>
@@ -7125,7 +7682,7 @@
                 </a:solidFill>
                 <a:latin typeface="微软雅黑"/>
               </a:rPr>
-              <a:t>6 / 7</a:t>
+              <a:t>9 / 10</a:t>
             </a:r>
           </a:p>
         </p:txBody>
@@ -7484,6 +8041,2466 @@
                 <a:latin typeface="微软雅黑"/>
               </a:rPr>
               <a:t>带着问题来上课——Predict先于Run</a:t>
+            </a:r>
+          </a:p>
+        </p:txBody>
+      </p:sp>
+    </p:spTree>
+  </p:cSld>
+  <p:clrMapOvr>
+    <a:masterClrMapping/>
+  </p:clrMapOvr>
+</p:sld>
+</file>
+
+<file path=ppt/slides/slide8.xml><?xml version="1.0" encoding="utf-8"?>
+<p:sld xmlns:a="http://schemas.openxmlformats.org/drawingml/2006/main" xmlns:p="http://schemas.openxmlformats.org/presentationml/2006/main" xmlns:r="http://schemas.openxmlformats.org/officeDocument/2006/relationships">
+  <p:cSld>
+    <p:spTree>
+      <p:nvGrpSpPr>
+        <p:cNvPr id="1" name=""/>
+        <p:cNvGrpSpPr/>
+        <p:nvPr/>
+      </p:nvGrpSpPr>
+      <p:grpSpPr/>
+      <p:sp>
+        <p:nvSpPr>
+          <p:cNvPr id="2" name="Rounded Rectangle 1"/>
+          <p:cNvSpPr/>
+          <p:nvPr/>
+        </p:nvSpPr>
+        <p:spPr>
+          <a:xfrm>
+            <a:off x="0" y="0"/>
+            <a:ext cx="12191695" cy="64008"/>
+          </a:xfrm>
+          <a:prstGeom prst="roundRect">
+            <a:avLst>
+              <a:gd name="adj" fmla="val 50000"/>
+            </a:avLst>
+          </a:prstGeom>
+          <a:solidFill>
+            <a:srgbClr val="0B5E54"/>
+          </a:solidFill>
+          <a:ln>
+            <a:noFill/>
+          </a:ln>
+          <a:effectLst/>
+        </p:spPr>
+        <p:style>
+          <a:lnRef idx="1">
+            <a:schemeClr val="accent1"/>
+          </a:lnRef>
+          <a:fillRef idx="3">
+            <a:schemeClr val="accent1"/>
+          </a:fillRef>
+          <a:effectRef idx="2">
+            <a:schemeClr val="accent1"/>
+          </a:effectRef>
+          <a:fontRef idx="minor">
+            <a:schemeClr val="lt1"/>
+          </a:fontRef>
+        </p:style>
+        <p:txBody>
+          <a:bodyPr rtlCol="0" anchor="ctr"/>
+          <a:lstStyle/>
+          <a:p>
+            <a:pPr algn="ctr"/>
+          </a:p>
+        </p:txBody>
+      </p:sp>
+      <p:sp>
+        <p:nvSpPr>
+          <p:cNvPr id="3" name="TextBox 2"/>
+          <p:cNvSpPr txBox="1"/>
+          <p:nvPr/>
+        </p:nvSpPr>
+        <p:spPr>
+          <a:xfrm>
+            <a:off x="475488" y="146304"/>
+            <a:ext cx="8229600" cy="292608"/>
+          </a:xfrm>
+          <a:prstGeom prst="rect">
+            <a:avLst/>
+          </a:prstGeom>
+          <a:noFill/>
+        </p:spPr>
+        <p:txBody>
+          <a:bodyPr wrap="square" anchor="t" lIns="0" rIns="0" tIns="0" bIns="0">
+            <a:spAutoFit/>
+          </a:bodyPr>
+          <a:lstStyle/>
+          <a:p>
+            <a:pPr algn="l">
+              <a:lnSpc>
+                <a:spcPct val="114000"/>
+              </a:lnSpc>
+            </a:pPr>
+            <a:r>
+              <a:rPr sz="1100" b="1">
+                <a:solidFill>
+                  <a:srgbClr val="0B5E54"/>
+                </a:solidFill>
+              </a:rPr>
+              <a:t>工单实战 · 本次实跑结果</a:t>
+            </a:r>
+          </a:p>
+        </p:txBody>
+      </p:sp>
+      <p:sp>
+        <p:nvSpPr>
+          <p:cNvPr id="4" name="Rounded Rectangle 3"/>
+          <p:cNvSpPr/>
+          <p:nvPr/>
+        </p:nvSpPr>
+        <p:spPr>
+          <a:xfrm>
+            <a:off x="475488" y="475488"/>
+            <a:ext cx="1881187" cy="310896"/>
+          </a:xfrm>
+          <a:prstGeom prst="roundRect">
+            <a:avLst>
+              <a:gd name="adj" fmla="val 50000"/>
+            </a:avLst>
+          </a:prstGeom>
+          <a:solidFill>
+            <a:srgbClr val="C9A227"/>
+          </a:solidFill>
+          <a:ln>
+            <a:noFill/>
+          </a:ln>
+          <a:effectLst/>
+        </p:spPr>
+        <p:style>
+          <a:lnRef idx="1">
+            <a:schemeClr val="accent1"/>
+          </a:lnRef>
+          <a:fillRef idx="3">
+            <a:schemeClr val="accent1"/>
+          </a:fillRef>
+          <a:effectRef idx="2">
+            <a:schemeClr val="accent1"/>
+          </a:effectRef>
+          <a:fontRef idx="minor">
+            <a:schemeClr val="lt1"/>
+          </a:fontRef>
+        </p:style>
+        <p:txBody>
+          <a:bodyPr rtlCol="0" anchor="ctr"/>
+          <a:lstStyle/>
+          <a:p>
+            <a:pPr algn="ctr"/>
+          </a:p>
+        </p:txBody>
+      </p:sp>
+      <p:sp>
+        <p:nvSpPr>
+          <p:cNvPr id="5" name="TextBox 4"/>
+          <p:cNvSpPr txBox="1"/>
+          <p:nvPr/>
+        </p:nvSpPr>
+        <p:spPr>
+          <a:xfrm>
+            <a:off x="475488" y="475488"/>
+            <a:ext cx="1881187" cy="310896"/>
+          </a:xfrm>
+          <a:prstGeom prst="rect">
+            <a:avLst/>
+          </a:prstGeom>
+          <a:noFill/>
+        </p:spPr>
+        <p:txBody>
+          <a:bodyPr wrap="square" anchor="ctr" lIns="0" rIns="0" tIns="0" bIns="0">
+            <a:spAutoFit/>
+          </a:bodyPr>
+          <a:lstStyle/>
+          <a:p>
+            <a:pPr algn="ctr">
+              <a:lnSpc>
+                <a:spcPct val="114000"/>
+              </a:lnSpc>
+            </a:pPr>
+            <a:r>
+              <a:rPr sz="1050" b="1">
+                <a:solidFill>
+                  <a:srgbClr val="FFFFFF"/>
+                </a:solidFill>
+              </a:rPr>
+              <a:t>REAL RUN · 四档逐字实测</a:t>
+            </a:r>
+          </a:p>
+        </p:txBody>
+      </p:sp>
+      <p:sp>
+        <p:nvSpPr>
+          <p:cNvPr id="6" name="TextBox 5"/>
+          <p:cNvSpPr txBox="1"/>
+          <p:nvPr/>
+        </p:nvSpPr>
+        <p:spPr>
+          <a:xfrm>
+            <a:off x="475488" y="859536"/>
+            <a:ext cx="11237976" cy="502920"/>
+          </a:xfrm>
+          <a:prstGeom prst="rect">
+            <a:avLst/>
+          </a:prstGeom>
+          <a:noFill/>
+        </p:spPr>
+        <p:txBody>
+          <a:bodyPr wrap="square" anchor="t" lIns="0" rIns="0" tIns="0" bIns="0">
+            <a:spAutoFit/>
+          </a:bodyPr>
+          <a:lstStyle/>
+          <a:p>
+            <a:pPr algn="l">
+              <a:lnSpc>
+                <a:spcPct val="114000"/>
+              </a:lnSpc>
+            </a:pPr>
+            <a:r>
+              <a:rPr sz="2200" b="1">
+                <a:solidFill>
+                  <a:srgbClr val="1B2B28"/>
+                </a:solidFill>
+              </a:rPr>
+              <a:t>P1.2 p12_proj_template：本次 D/C/B/A 四档实测</a:t>
+            </a:r>
+          </a:p>
+        </p:txBody>
+      </p:sp>
+      <p:sp>
+        <p:nvSpPr>
+          <p:cNvPr id="7" name="Rounded Rectangle 6"/>
+          <p:cNvSpPr/>
+          <p:nvPr/>
+        </p:nvSpPr>
+        <p:spPr>
+          <a:xfrm>
+            <a:off x="475488" y="1389888"/>
+            <a:ext cx="1234440" cy="27432"/>
+          </a:xfrm>
+          <a:prstGeom prst="roundRect">
+            <a:avLst>
+              <a:gd name="adj" fmla="val 50000"/>
+            </a:avLst>
+          </a:prstGeom>
+          <a:solidFill>
+            <a:srgbClr val="C9A227"/>
+          </a:solidFill>
+          <a:ln>
+            <a:noFill/>
+          </a:ln>
+          <a:effectLst/>
+        </p:spPr>
+        <p:style>
+          <a:lnRef idx="1">
+            <a:schemeClr val="accent1"/>
+          </a:lnRef>
+          <a:fillRef idx="3">
+            <a:schemeClr val="accent1"/>
+          </a:fillRef>
+          <a:effectRef idx="2">
+            <a:schemeClr val="accent1"/>
+          </a:effectRef>
+          <a:fontRef idx="minor">
+            <a:schemeClr val="lt1"/>
+          </a:fontRef>
+        </p:style>
+        <p:txBody>
+          <a:bodyPr rtlCol="0" anchor="ctr"/>
+          <a:lstStyle/>
+          <a:p>
+            <a:pPr algn="ctr"/>
+          </a:p>
+        </p:txBody>
+      </p:sp>
+      <p:sp>
+        <p:nvSpPr>
+          <p:cNvPr id="8" name="Rounded Rectangle 7"/>
+          <p:cNvSpPr/>
+          <p:nvPr/>
+        </p:nvSpPr>
+        <p:spPr>
+          <a:xfrm>
+            <a:off x="475488" y="6419088"/>
+            <a:ext cx="11237976" cy="10972"/>
+          </a:xfrm>
+          <a:prstGeom prst="roundRect">
+            <a:avLst>
+              <a:gd name="adj" fmla="val 50000"/>
+            </a:avLst>
+          </a:prstGeom>
+          <a:solidFill>
+            <a:srgbClr val="E4F1EE"/>
+          </a:solidFill>
+          <a:ln>
+            <a:noFill/>
+          </a:ln>
+          <a:effectLst/>
+        </p:spPr>
+        <p:style>
+          <a:lnRef idx="1">
+            <a:schemeClr val="accent1"/>
+          </a:lnRef>
+          <a:fillRef idx="3">
+            <a:schemeClr val="accent1"/>
+          </a:fillRef>
+          <a:effectRef idx="2">
+            <a:schemeClr val="accent1"/>
+          </a:effectRef>
+          <a:fontRef idx="minor">
+            <a:schemeClr val="lt1"/>
+          </a:fontRef>
+        </p:style>
+        <p:txBody>
+          <a:bodyPr rtlCol="0" anchor="ctr"/>
+          <a:lstStyle/>
+          <a:p>
+            <a:pPr algn="ctr"/>
+          </a:p>
+        </p:txBody>
+      </p:sp>
+      <p:sp>
+        <p:nvSpPr>
+          <p:cNvPr id="9" name="TextBox 8"/>
+          <p:cNvSpPr txBox="1"/>
+          <p:nvPr/>
+        </p:nvSpPr>
+        <p:spPr>
+          <a:xfrm>
+            <a:off x="475488" y="6455664"/>
+            <a:ext cx="7315200" cy="292608"/>
+          </a:xfrm>
+          <a:prstGeom prst="rect">
+            <a:avLst/>
+          </a:prstGeom>
+          <a:noFill/>
+        </p:spPr>
+        <p:txBody>
+          <a:bodyPr wrap="square" anchor="t" lIns="0" rIns="0" tIns="0" bIns="0">
+            <a:spAutoFit/>
+          </a:bodyPr>
+          <a:lstStyle/>
+          <a:p>
+            <a:pPr algn="l">
+              <a:lnSpc>
+                <a:spcPct val="114000"/>
+              </a:lnSpc>
+            </a:pPr>
+            <a:r>
+              <a:rPr sz="900" b="0">
+                <a:solidFill>
+                  <a:srgbClr val="5C6E6A"/>
+                </a:solidFill>
+              </a:rPr>
+              <a:t>两江智造集团 · Python程序设计（项目实战）</a:t>
+            </a:r>
+          </a:p>
+        </p:txBody>
+      </p:sp>
+      <p:sp>
+        <p:nvSpPr>
+          <p:cNvPr id="10" name="TextBox 9"/>
+          <p:cNvSpPr txBox="1"/>
+          <p:nvPr/>
+        </p:nvSpPr>
+        <p:spPr>
+          <a:xfrm>
+            <a:off x="10597896" y="6537960"/>
+            <a:ext cx="996696" cy="301752"/>
+          </a:xfrm>
+          <a:prstGeom prst="rect">
+            <a:avLst/>
+          </a:prstGeom>
+          <a:noFill/>
+        </p:spPr>
+        <p:txBody>
+          <a:bodyPr wrap="square" anchor="t" lIns="0" rIns="0" tIns="0" bIns="0">
+            <a:spAutoFit/>
+          </a:bodyPr>
+          <a:lstStyle/>
+          <a:p>
+            <a:pPr algn="r">
+              <a:lnSpc>
+                <a:spcPct val="114000"/>
+              </a:lnSpc>
+            </a:pPr>
+            <a:r>
+              <a:rPr sz="1000" b="0">
+                <a:solidFill>
+                  <a:srgbClr val="8A97B5"/>
+                </a:solidFill>
+              </a:rPr>
+              <a:t>4 / 10</a:t>
+            </a:r>
+          </a:p>
+        </p:txBody>
+      </p:sp>
+      <p:sp>
+        <p:nvSpPr>
+          <p:cNvPr id="11" name="Rounded Rectangle 10"/>
+          <p:cNvSpPr/>
+          <p:nvPr/>
+        </p:nvSpPr>
+        <p:spPr>
+          <a:xfrm>
+            <a:off x="475488" y="1554480"/>
+            <a:ext cx="11237976" cy="1030522"/>
+          </a:xfrm>
+          <a:prstGeom prst="roundRect">
+            <a:avLst>
+              <a:gd name="adj" fmla="val 6000"/>
+            </a:avLst>
+          </a:prstGeom>
+          <a:solidFill>
+            <a:srgbClr val="FFFFFF"/>
+          </a:solidFill>
+          <a:ln w="9525">
+            <a:solidFill>
+              <a:srgbClr val="E4F1EE"/>
+            </a:solidFill>
+          </a:ln>
+          <a:effectLst/>
+        </p:spPr>
+        <p:style>
+          <a:lnRef idx="1">
+            <a:schemeClr val="accent1"/>
+          </a:lnRef>
+          <a:fillRef idx="3">
+            <a:schemeClr val="accent1"/>
+          </a:fillRef>
+          <a:effectRef idx="2">
+            <a:schemeClr val="accent1"/>
+          </a:effectRef>
+          <a:fontRef idx="minor">
+            <a:schemeClr val="lt1"/>
+          </a:fontRef>
+        </p:style>
+        <p:txBody>
+          <a:bodyPr rtlCol="0" anchor="ctr"/>
+          <a:lstStyle/>
+          <a:p>
+            <a:pPr algn="ctr"/>
+          </a:p>
+        </p:txBody>
+      </p:sp>
+      <p:sp>
+        <p:nvSpPr>
+          <p:cNvPr id="12" name="Rounded Rectangle 11"/>
+          <p:cNvSpPr/>
+          <p:nvPr/>
+        </p:nvSpPr>
+        <p:spPr>
+          <a:xfrm>
+            <a:off x="475488" y="1554480"/>
+            <a:ext cx="54864" cy="1030522"/>
+          </a:xfrm>
+          <a:prstGeom prst="roundRect">
+            <a:avLst>
+              <a:gd name="adj" fmla="val 50000"/>
+            </a:avLst>
+          </a:prstGeom>
+          <a:solidFill>
+            <a:srgbClr val="5C6E6A"/>
+          </a:solidFill>
+          <a:ln>
+            <a:noFill/>
+          </a:ln>
+          <a:effectLst/>
+        </p:spPr>
+        <p:style>
+          <a:lnRef idx="1">
+            <a:schemeClr val="accent1"/>
+          </a:lnRef>
+          <a:fillRef idx="3">
+            <a:schemeClr val="accent1"/>
+          </a:fillRef>
+          <a:effectRef idx="2">
+            <a:schemeClr val="accent1"/>
+          </a:effectRef>
+          <a:fontRef idx="minor">
+            <a:schemeClr val="lt1"/>
+          </a:fontRef>
+        </p:style>
+        <p:txBody>
+          <a:bodyPr rtlCol="0" anchor="ctr"/>
+          <a:lstStyle/>
+          <a:p>
+            <a:pPr algn="ctr"/>
+          </a:p>
+        </p:txBody>
+      </p:sp>
+      <p:sp>
+        <p:nvSpPr>
+          <p:cNvPr id="13" name="Rounded Rectangle 12"/>
+          <p:cNvSpPr/>
+          <p:nvPr/>
+        </p:nvSpPr>
+        <p:spPr>
+          <a:xfrm>
+            <a:off x="621792" y="1636776"/>
+            <a:ext cx="237744" cy="237744"/>
+          </a:xfrm>
+          <a:prstGeom prst="roundRect">
+            <a:avLst>
+              <a:gd name="adj" fmla="val 28000"/>
+            </a:avLst>
+          </a:prstGeom>
+          <a:solidFill>
+            <a:srgbClr val="5C6E6A"/>
+          </a:solidFill>
+          <a:ln>
+            <a:noFill/>
+          </a:ln>
+          <a:effectLst/>
+        </p:spPr>
+        <p:style>
+          <a:lnRef idx="1">
+            <a:schemeClr val="accent1"/>
+          </a:lnRef>
+          <a:fillRef idx="3">
+            <a:schemeClr val="accent1"/>
+          </a:fillRef>
+          <a:effectRef idx="2">
+            <a:schemeClr val="accent1"/>
+          </a:effectRef>
+          <a:fontRef idx="minor">
+            <a:schemeClr val="lt1"/>
+          </a:fontRef>
+        </p:style>
+        <p:txBody>
+          <a:bodyPr rtlCol="0" anchor="ctr"/>
+          <a:lstStyle/>
+          <a:p>
+            <a:pPr algn="ctr"/>
+          </a:p>
+        </p:txBody>
+      </p:sp>
+      <p:sp>
+        <p:nvSpPr>
+          <p:cNvPr id="14" name="TextBox 13"/>
+          <p:cNvSpPr txBox="1"/>
+          <p:nvPr/>
+        </p:nvSpPr>
+        <p:spPr>
+          <a:xfrm>
+            <a:off x="621792" y="1636776"/>
+            <a:ext cx="237744" cy="237744"/>
+          </a:xfrm>
+          <a:prstGeom prst="rect">
+            <a:avLst/>
+          </a:prstGeom>
+          <a:noFill/>
+        </p:spPr>
+        <p:txBody>
+          <a:bodyPr wrap="square" anchor="ctr" lIns="0" rIns="0" tIns="0" bIns="0">
+            <a:spAutoFit/>
+          </a:bodyPr>
+          <a:lstStyle/>
+          <a:p>
+            <a:pPr algn="ctr">
+              <a:lnSpc>
+                <a:spcPct val="114000"/>
+              </a:lnSpc>
+            </a:pPr>
+            <a:r>
+              <a:rPr sz="1000" b="1">
+                <a:solidFill>
+                  <a:srgbClr val="FFFFFF"/>
+                </a:solidFill>
+              </a:rPr>
+              <a:t>D</a:t>
+            </a:r>
+          </a:p>
+        </p:txBody>
+      </p:sp>
+      <p:sp>
+        <p:nvSpPr>
+          <p:cNvPr id="15" name="TextBox 14"/>
+          <p:cNvSpPr txBox="1"/>
+          <p:nvPr/>
+        </p:nvSpPr>
+        <p:spPr>
+          <a:xfrm>
+            <a:off x="932688" y="1618488"/>
+            <a:ext cx="8778240" cy="274320"/>
+          </a:xfrm>
+          <a:prstGeom prst="rect">
+            <a:avLst/>
+          </a:prstGeom>
+          <a:noFill/>
+        </p:spPr>
+        <p:txBody>
+          <a:bodyPr wrap="square" anchor="ctr" lIns="0" rIns="0" tIns="0" bIns="0">
+            <a:spAutoFit/>
+          </a:bodyPr>
+          <a:lstStyle/>
+          <a:p>
+            <a:pPr algn="l">
+              <a:lnSpc>
+                <a:spcPct val="114000"/>
+              </a:lnSpc>
+            </a:pPr>
+            <a:r>
+              <a:rPr sz="1050" b="1">
+                <a:solidFill>
+                  <a:srgbClr val="1B2B28"/>
+                </a:solidFill>
+              </a:rPr>
+              <a:t>及格</a:t>
+            </a:r>
+            <a:r>
+              <a:rPr sz="850" b="0">
+                <a:solidFill>
+                  <a:srgbClr val="5C6E6A"/>
+                </a:solidFill>
+              </a:rPr>
+              <a:t>   验收口径：</a:t>
+            </a:r>
+            <a:r>
+              <a:rPr sz="850" b="0">
+                <a:solidFill>
+                  <a:srgbClr val="5C6E6A"/>
+                </a:solidFill>
+              </a:rPr>
+              <a:t>conda环境激活可用+仓库初始化+结构完整+README</a:t>
+            </a:r>
+          </a:p>
+        </p:txBody>
+      </p:sp>
+      <p:sp>
+        <p:nvSpPr>
+          <p:cNvPr id="16" name="Rounded Rectangle 15"/>
+          <p:cNvSpPr/>
+          <p:nvPr/>
+        </p:nvSpPr>
+        <p:spPr>
+          <a:xfrm>
+            <a:off x="10532681" y="1645920"/>
+            <a:ext cx="1052766" cy="237744"/>
+          </a:xfrm>
+          <a:prstGeom prst="roundRect">
+            <a:avLst>
+              <a:gd name="adj" fmla="val 50000"/>
+            </a:avLst>
+          </a:prstGeom>
+          <a:solidFill>
+            <a:srgbClr val="C9A227"/>
+          </a:solidFill>
+          <a:ln>
+            <a:noFill/>
+          </a:ln>
+          <a:effectLst/>
+        </p:spPr>
+        <p:style>
+          <a:lnRef idx="1">
+            <a:schemeClr val="accent1"/>
+          </a:lnRef>
+          <a:fillRef idx="3">
+            <a:schemeClr val="accent1"/>
+          </a:fillRef>
+          <a:effectRef idx="2">
+            <a:schemeClr val="accent1"/>
+          </a:effectRef>
+          <a:fontRef idx="minor">
+            <a:schemeClr val="lt1"/>
+          </a:fontRef>
+        </p:style>
+        <p:txBody>
+          <a:bodyPr rtlCol="0" anchor="ctr"/>
+          <a:lstStyle/>
+          <a:p>
+            <a:pPr algn="ctr"/>
+          </a:p>
+        </p:txBody>
+      </p:sp>
+      <p:sp>
+        <p:nvSpPr>
+          <p:cNvPr id="17" name="TextBox 16"/>
+          <p:cNvSpPr txBox="1"/>
+          <p:nvPr/>
+        </p:nvSpPr>
+        <p:spPr>
+          <a:xfrm>
+            <a:off x="10532681" y="1645920"/>
+            <a:ext cx="1052766" cy="237744"/>
+          </a:xfrm>
+          <a:prstGeom prst="rect">
+            <a:avLst/>
+          </a:prstGeom>
+          <a:noFill/>
+        </p:spPr>
+        <p:txBody>
+          <a:bodyPr wrap="square" anchor="ctr" lIns="0" rIns="0" tIns="0" bIns="0">
+            <a:spAutoFit/>
+          </a:bodyPr>
+          <a:lstStyle/>
+          <a:p>
+            <a:pPr algn="ctr">
+              <a:lnSpc>
+                <a:spcPct val="114000"/>
+              </a:lnSpc>
+            </a:pPr>
+            <a:r>
+              <a:rPr sz="850" b="1">
+                <a:solidFill>
+                  <a:srgbClr val="FFFFFF"/>
+                </a:solidFill>
+              </a:rPr>
+              <a:t>本节取证项 通过</a:t>
+            </a:r>
+          </a:p>
+        </p:txBody>
+      </p:sp>
+      <p:sp>
+        <p:nvSpPr>
+          <p:cNvPr id="18" name="TextBox 17"/>
+          <p:cNvSpPr txBox="1"/>
+          <p:nvPr/>
+        </p:nvSpPr>
+        <p:spPr>
+          <a:xfrm>
+            <a:off x="932688" y="1901952"/>
+            <a:ext cx="10671047" cy="628186"/>
+          </a:xfrm>
+          <a:prstGeom prst="rect">
+            <a:avLst/>
+          </a:prstGeom>
+          <a:noFill/>
+        </p:spPr>
+        <p:txBody>
+          <a:bodyPr wrap="square" anchor="t" lIns="0" rIns="0" tIns="0" bIns="0">
+            <a:spAutoFit/>
+          </a:bodyPr>
+          <a:lstStyle/>
+          <a:p>
+            <a:pPr algn="l">
+              <a:lnSpc>
+                <a:spcPct val="114000"/>
+              </a:lnSpc>
+            </a:pPr>
+            <a:r>
+              <a:rPr sz="950" b="0">
+                <a:solidFill>
+                  <a:srgbClr val="1B2B28"/>
+                </a:solidFill>
+              </a:rPr>
+              <a:t>结构完整=是（四目录 4/4、模板缺失 0、空目录 0、.pyc 0）｜README.md 已落盘 889 字节且首行为一级标题=是｜仓库初始化三连（git init / git add . / git commit -m）=是｜venv 激活命令写在 setup_venv.sh=是｜本流水线解释器位于 conda 环境目录=是</a:t>
+            </a:r>
+          </a:p>
+        </p:txBody>
+      </p:sp>
+      <p:sp>
+        <p:nvSpPr>
+          <p:cNvPr id="19" name="Rounded Rectangle 18"/>
+          <p:cNvSpPr/>
+          <p:nvPr/>
+        </p:nvSpPr>
+        <p:spPr>
+          <a:xfrm>
+            <a:off x="475488" y="2649010"/>
+            <a:ext cx="11237976" cy="1030522"/>
+          </a:xfrm>
+          <a:prstGeom prst="roundRect">
+            <a:avLst>
+              <a:gd name="adj" fmla="val 6000"/>
+            </a:avLst>
+          </a:prstGeom>
+          <a:solidFill>
+            <a:srgbClr val="FFFFFF"/>
+          </a:solidFill>
+          <a:ln w="9525">
+            <a:solidFill>
+              <a:srgbClr val="E4F1EE"/>
+            </a:solidFill>
+          </a:ln>
+          <a:effectLst/>
+        </p:spPr>
+        <p:style>
+          <a:lnRef idx="1">
+            <a:schemeClr val="accent1"/>
+          </a:lnRef>
+          <a:fillRef idx="3">
+            <a:schemeClr val="accent1"/>
+          </a:fillRef>
+          <a:effectRef idx="2">
+            <a:schemeClr val="accent1"/>
+          </a:effectRef>
+          <a:fontRef idx="minor">
+            <a:schemeClr val="lt1"/>
+          </a:fontRef>
+        </p:style>
+        <p:txBody>
+          <a:bodyPr rtlCol="0" anchor="ctr"/>
+          <a:lstStyle/>
+          <a:p>
+            <a:pPr algn="ctr"/>
+          </a:p>
+        </p:txBody>
+      </p:sp>
+      <p:sp>
+        <p:nvSpPr>
+          <p:cNvPr id="20" name="Rounded Rectangle 19"/>
+          <p:cNvSpPr/>
+          <p:nvPr/>
+        </p:nvSpPr>
+        <p:spPr>
+          <a:xfrm>
+            <a:off x="475488" y="2649010"/>
+            <a:ext cx="54864" cy="1030522"/>
+          </a:xfrm>
+          <a:prstGeom prst="roundRect">
+            <a:avLst>
+              <a:gd name="adj" fmla="val 50000"/>
+            </a:avLst>
+          </a:prstGeom>
+          <a:solidFill>
+            <a:srgbClr val="157A6D"/>
+          </a:solidFill>
+          <a:ln>
+            <a:noFill/>
+          </a:ln>
+          <a:effectLst/>
+        </p:spPr>
+        <p:style>
+          <a:lnRef idx="1">
+            <a:schemeClr val="accent1"/>
+          </a:lnRef>
+          <a:fillRef idx="3">
+            <a:schemeClr val="accent1"/>
+          </a:fillRef>
+          <a:effectRef idx="2">
+            <a:schemeClr val="accent1"/>
+          </a:effectRef>
+          <a:fontRef idx="minor">
+            <a:schemeClr val="lt1"/>
+          </a:fontRef>
+        </p:style>
+        <p:txBody>
+          <a:bodyPr rtlCol="0" anchor="ctr"/>
+          <a:lstStyle/>
+          <a:p>
+            <a:pPr algn="ctr"/>
+          </a:p>
+        </p:txBody>
+      </p:sp>
+      <p:sp>
+        <p:nvSpPr>
+          <p:cNvPr id="21" name="Rounded Rectangle 20"/>
+          <p:cNvSpPr/>
+          <p:nvPr/>
+        </p:nvSpPr>
+        <p:spPr>
+          <a:xfrm>
+            <a:off x="621792" y="2731306"/>
+            <a:ext cx="237744" cy="237744"/>
+          </a:xfrm>
+          <a:prstGeom prst="roundRect">
+            <a:avLst>
+              <a:gd name="adj" fmla="val 28000"/>
+            </a:avLst>
+          </a:prstGeom>
+          <a:solidFill>
+            <a:srgbClr val="157A6D"/>
+          </a:solidFill>
+          <a:ln>
+            <a:noFill/>
+          </a:ln>
+          <a:effectLst/>
+        </p:spPr>
+        <p:style>
+          <a:lnRef idx="1">
+            <a:schemeClr val="accent1"/>
+          </a:lnRef>
+          <a:fillRef idx="3">
+            <a:schemeClr val="accent1"/>
+          </a:fillRef>
+          <a:effectRef idx="2">
+            <a:schemeClr val="accent1"/>
+          </a:effectRef>
+          <a:fontRef idx="minor">
+            <a:schemeClr val="lt1"/>
+          </a:fontRef>
+        </p:style>
+        <p:txBody>
+          <a:bodyPr rtlCol="0" anchor="ctr"/>
+          <a:lstStyle/>
+          <a:p>
+            <a:pPr algn="ctr"/>
+          </a:p>
+        </p:txBody>
+      </p:sp>
+      <p:sp>
+        <p:nvSpPr>
+          <p:cNvPr id="22" name="TextBox 21"/>
+          <p:cNvSpPr txBox="1"/>
+          <p:nvPr/>
+        </p:nvSpPr>
+        <p:spPr>
+          <a:xfrm>
+            <a:off x="621792" y="2731306"/>
+            <a:ext cx="237744" cy="237744"/>
+          </a:xfrm>
+          <a:prstGeom prst="rect">
+            <a:avLst/>
+          </a:prstGeom>
+          <a:noFill/>
+        </p:spPr>
+        <p:txBody>
+          <a:bodyPr wrap="square" anchor="ctr" lIns="0" rIns="0" tIns="0" bIns="0">
+            <a:spAutoFit/>
+          </a:bodyPr>
+          <a:lstStyle/>
+          <a:p>
+            <a:pPr algn="ctr">
+              <a:lnSpc>
+                <a:spcPct val="114000"/>
+              </a:lnSpc>
+            </a:pPr>
+            <a:r>
+              <a:rPr sz="1000" b="1">
+                <a:solidFill>
+                  <a:srgbClr val="FFFFFF"/>
+                </a:solidFill>
+              </a:rPr>
+              <a:t>C</a:t>
+            </a:r>
+          </a:p>
+        </p:txBody>
+      </p:sp>
+      <p:sp>
+        <p:nvSpPr>
+          <p:cNvPr id="23" name="TextBox 22"/>
+          <p:cNvSpPr txBox="1"/>
+          <p:nvPr/>
+        </p:nvSpPr>
+        <p:spPr>
+          <a:xfrm>
+            <a:off x="932688" y="2713018"/>
+            <a:ext cx="8778240" cy="274320"/>
+          </a:xfrm>
+          <a:prstGeom prst="rect">
+            <a:avLst/>
+          </a:prstGeom>
+          <a:noFill/>
+        </p:spPr>
+        <p:txBody>
+          <a:bodyPr wrap="square" anchor="ctr" lIns="0" rIns="0" tIns="0" bIns="0">
+            <a:spAutoFit/>
+          </a:bodyPr>
+          <a:lstStyle/>
+          <a:p>
+            <a:pPr algn="l">
+              <a:lnSpc>
+                <a:spcPct val="114000"/>
+              </a:lnSpc>
+            </a:pPr>
+            <a:r>
+              <a:rPr sz="1050" b="1">
+                <a:solidFill>
+                  <a:srgbClr val="1B2B28"/>
+                </a:solidFill>
+              </a:rPr>
+              <a:t>良好</a:t>
+            </a:r>
+            <a:r>
+              <a:rPr sz="850" b="0">
+                <a:solidFill>
+                  <a:srgbClr val="5C6E6A"/>
+                </a:solidFill>
+              </a:rPr>
+              <a:t>   验收口径：</a:t>
+            </a:r>
+            <a:r>
+              <a:rPr sz="850" b="0">
+                <a:solidFill>
+                  <a:srgbClr val="5C6E6A"/>
+                </a:solidFill>
+              </a:rPr>
+              <a:t>检查工具配置生效；pytest通过</a:t>
+            </a:r>
+          </a:p>
+        </p:txBody>
+      </p:sp>
+      <p:sp>
+        <p:nvSpPr>
+          <p:cNvPr id="24" name="Rounded Rectangle 23"/>
+          <p:cNvSpPr/>
+          <p:nvPr/>
+        </p:nvSpPr>
+        <p:spPr>
+          <a:xfrm>
+            <a:off x="10532681" y="2740450"/>
+            <a:ext cx="1052766" cy="237744"/>
+          </a:xfrm>
+          <a:prstGeom prst="roundRect">
+            <a:avLst>
+              <a:gd name="adj" fmla="val 50000"/>
+            </a:avLst>
+          </a:prstGeom>
+          <a:solidFill>
+            <a:srgbClr val="C9A227"/>
+          </a:solidFill>
+          <a:ln>
+            <a:noFill/>
+          </a:ln>
+          <a:effectLst/>
+        </p:spPr>
+        <p:style>
+          <a:lnRef idx="1">
+            <a:schemeClr val="accent1"/>
+          </a:lnRef>
+          <a:fillRef idx="3">
+            <a:schemeClr val="accent1"/>
+          </a:fillRef>
+          <a:effectRef idx="2">
+            <a:schemeClr val="accent1"/>
+          </a:effectRef>
+          <a:fontRef idx="minor">
+            <a:schemeClr val="lt1"/>
+          </a:fontRef>
+        </p:style>
+        <p:txBody>
+          <a:bodyPr rtlCol="0" anchor="ctr"/>
+          <a:lstStyle/>
+          <a:p>
+            <a:pPr algn="ctr"/>
+          </a:p>
+        </p:txBody>
+      </p:sp>
+      <p:sp>
+        <p:nvSpPr>
+          <p:cNvPr id="25" name="TextBox 24"/>
+          <p:cNvSpPr txBox="1"/>
+          <p:nvPr/>
+        </p:nvSpPr>
+        <p:spPr>
+          <a:xfrm>
+            <a:off x="10532681" y="2740450"/>
+            <a:ext cx="1052766" cy="237744"/>
+          </a:xfrm>
+          <a:prstGeom prst="rect">
+            <a:avLst/>
+          </a:prstGeom>
+          <a:noFill/>
+        </p:spPr>
+        <p:txBody>
+          <a:bodyPr wrap="square" anchor="ctr" lIns="0" rIns="0" tIns="0" bIns="0">
+            <a:spAutoFit/>
+          </a:bodyPr>
+          <a:lstStyle/>
+          <a:p>
+            <a:pPr algn="ctr">
+              <a:lnSpc>
+                <a:spcPct val="114000"/>
+              </a:lnSpc>
+            </a:pPr>
+            <a:r>
+              <a:rPr sz="850" b="1">
+                <a:solidFill>
+                  <a:srgbClr val="FFFFFF"/>
+                </a:solidFill>
+              </a:rPr>
+              <a:t>本节取证项 通过</a:t>
+            </a:r>
+          </a:p>
+        </p:txBody>
+      </p:sp>
+      <p:sp>
+        <p:nvSpPr>
+          <p:cNvPr id="26" name="TextBox 25"/>
+          <p:cNvSpPr txBox="1"/>
+          <p:nvPr/>
+        </p:nvSpPr>
+        <p:spPr>
+          <a:xfrm>
+            <a:off x="932688" y="2996482"/>
+            <a:ext cx="10671047" cy="628186"/>
+          </a:xfrm>
+          <a:prstGeom prst="rect">
+            <a:avLst/>
+          </a:prstGeom>
+          <a:noFill/>
+        </p:spPr>
+        <p:txBody>
+          <a:bodyPr wrap="square" anchor="t" lIns="0" rIns="0" tIns="0" bIns="0">
+            <a:spAutoFit/>
+          </a:bodyPr>
+          <a:lstStyle/>
+          <a:p>
+            <a:pPr algn="l">
+              <a:lnSpc>
+                <a:spcPct val="114000"/>
+              </a:lnSpc>
+            </a:pPr>
+            <a:r>
+              <a:rPr sz="950" b="0">
+                <a:solidFill>
+                  <a:srgbClr val="1B2B28"/>
+                </a:solidFill>
+              </a:rPr>
+              <a:t>检查工具配置：2 个钩子全部带 entry（2/2，black, flake8）｜配置要求的工具缺口 0 个｜pytest 配置 testpaths 已声明=是｜生成骨架真实加载：入口 main() 返回 0、自带 test_ 函数 3 个通过 3 个失败 0 个｜--fail-under 评分 entry 已声明=否</a:t>
+            </a:r>
+          </a:p>
+        </p:txBody>
+      </p:sp>
+      <p:sp>
+        <p:nvSpPr>
+          <p:cNvPr id="27" name="Rounded Rectangle 26"/>
+          <p:cNvSpPr/>
+          <p:nvPr/>
+        </p:nvSpPr>
+        <p:spPr>
+          <a:xfrm>
+            <a:off x="475488" y="3743541"/>
+            <a:ext cx="11237976" cy="802849"/>
+          </a:xfrm>
+          <a:prstGeom prst="roundRect">
+            <a:avLst>
+              <a:gd name="adj" fmla="val 6000"/>
+            </a:avLst>
+          </a:prstGeom>
+          <a:solidFill>
+            <a:srgbClr val="FFFFFF"/>
+          </a:solidFill>
+          <a:ln w="9525">
+            <a:solidFill>
+              <a:srgbClr val="E4F1EE"/>
+            </a:solidFill>
+          </a:ln>
+          <a:effectLst/>
+        </p:spPr>
+        <p:style>
+          <a:lnRef idx="1">
+            <a:schemeClr val="accent1"/>
+          </a:lnRef>
+          <a:fillRef idx="3">
+            <a:schemeClr val="accent1"/>
+          </a:fillRef>
+          <a:effectRef idx="2">
+            <a:schemeClr val="accent1"/>
+          </a:effectRef>
+          <a:fontRef idx="minor">
+            <a:schemeClr val="lt1"/>
+          </a:fontRef>
+        </p:style>
+        <p:txBody>
+          <a:bodyPr rtlCol="0" anchor="ctr"/>
+          <a:lstStyle/>
+          <a:p>
+            <a:pPr algn="ctr"/>
+          </a:p>
+        </p:txBody>
+      </p:sp>
+      <p:sp>
+        <p:nvSpPr>
+          <p:cNvPr id="28" name="Rounded Rectangle 27"/>
+          <p:cNvSpPr/>
+          <p:nvPr/>
+        </p:nvSpPr>
+        <p:spPr>
+          <a:xfrm>
+            <a:off x="475488" y="3743541"/>
+            <a:ext cx="54864" cy="802849"/>
+          </a:xfrm>
+          <a:prstGeom prst="roundRect">
+            <a:avLst>
+              <a:gd name="adj" fmla="val 50000"/>
+            </a:avLst>
+          </a:prstGeom>
+          <a:solidFill>
+            <a:srgbClr val="0B5E54"/>
+          </a:solidFill>
+          <a:ln>
+            <a:noFill/>
+          </a:ln>
+          <a:effectLst/>
+        </p:spPr>
+        <p:style>
+          <a:lnRef idx="1">
+            <a:schemeClr val="accent1"/>
+          </a:lnRef>
+          <a:fillRef idx="3">
+            <a:schemeClr val="accent1"/>
+          </a:fillRef>
+          <a:effectRef idx="2">
+            <a:schemeClr val="accent1"/>
+          </a:effectRef>
+          <a:fontRef idx="minor">
+            <a:schemeClr val="lt1"/>
+          </a:fontRef>
+        </p:style>
+        <p:txBody>
+          <a:bodyPr rtlCol="0" anchor="ctr"/>
+          <a:lstStyle/>
+          <a:p>
+            <a:pPr algn="ctr"/>
+          </a:p>
+        </p:txBody>
+      </p:sp>
+      <p:sp>
+        <p:nvSpPr>
+          <p:cNvPr id="29" name="Rounded Rectangle 28"/>
+          <p:cNvSpPr/>
+          <p:nvPr/>
+        </p:nvSpPr>
+        <p:spPr>
+          <a:xfrm>
+            <a:off x="621792" y="3825837"/>
+            <a:ext cx="237744" cy="237744"/>
+          </a:xfrm>
+          <a:prstGeom prst="roundRect">
+            <a:avLst>
+              <a:gd name="adj" fmla="val 28000"/>
+            </a:avLst>
+          </a:prstGeom>
+          <a:solidFill>
+            <a:srgbClr val="0B5E54"/>
+          </a:solidFill>
+          <a:ln>
+            <a:noFill/>
+          </a:ln>
+          <a:effectLst/>
+        </p:spPr>
+        <p:style>
+          <a:lnRef idx="1">
+            <a:schemeClr val="accent1"/>
+          </a:lnRef>
+          <a:fillRef idx="3">
+            <a:schemeClr val="accent1"/>
+          </a:fillRef>
+          <a:effectRef idx="2">
+            <a:schemeClr val="accent1"/>
+          </a:effectRef>
+          <a:fontRef idx="minor">
+            <a:schemeClr val="lt1"/>
+          </a:fontRef>
+        </p:style>
+        <p:txBody>
+          <a:bodyPr rtlCol="0" anchor="ctr"/>
+          <a:lstStyle/>
+          <a:p>
+            <a:pPr algn="ctr"/>
+          </a:p>
+        </p:txBody>
+      </p:sp>
+      <p:sp>
+        <p:nvSpPr>
+          <p:cNvPr id="30" name="TextBox 29"/>
+          <p:cNvSpPr txBox="1"/>
+          <p:nvPr/>
+        </p:nvSpPr>
+        <p:spPr>
+          <a:xfrm>
+            <a:off x="621792" y="3825837"/>
+            <a:ext cx="237744" cy="237744"/>
+          </a:xfrm>
+          <a:prstGeom prst="rect">
+            <a:avLst/>
+          </a:prstGeom>
+          <a:noFill/>
+        </p:spPr>
+        <p:txBody>
+          <a:bodyPr wrap="square" anchor="ctr" lIns="0" rIns="0" tIns="0" bIns="0">
+            <a:spAutoFit/>
+          </a:bodyPr>
+          <a:lstStyle/>
+          <a:p>
+            <a:pPr algn="ctr">
+              <a:lnSpc>
+                <a:spcPct val="114000"/>
+              </a:lnSpc>
+            </a:pPr>
+            <a:r>
+              <a:rPr sz="1000" b="1">
+                <a:solidFill>
+                  <a:srgbClr val="FFFFFF"/>
+                </a:solidFill>
+              </a:rPr>
+              <a:t>B</a:t>
+            </a:r>
+          </a:p>
+        </p:txBody>
+      </p:sp>
+      <p:sp>
+        <p:nvSpPr>
+          <p:cNvPr id="31" name="TextBox 30"/>
+          <p:cNvSpPr txBox="1"/>
+          <p:nvPr/>
+        </p:nvSpPr>
+        <p:spPr>
+          <a:xfrm>
+            <a:off x="932688" y="3807549"/>
+            <a:ext cx="8778240" cy="274320"/>
+          </a:xfrm>
+          <a:prstGeom prst="rect">
+            <a:avLst/>
+          </a:prstGeom>
+          <a:noFill/>
+        </p:spPr>
+        <p:txBody>
+          <a:bodyPr wrap="square" anchor="ctr" lIns="0" rIns="0" tIns="0" bIns="0">
+            <a:spAutoFit/>
+          </a:bodyPr>
+          <a:lstStyle/>
+          <a:p>
+            <a:pPr algn="l">
+              <a:lnSpc>
+                <a:spcPct val="114000"/>
+              </a:lnSpc>
+            </a:pPr>
+            <a:r>
+              <a:rPr sz="1050" b="1">
+                <a:solidFill>
+                  <a:srgbClr val="1B2B28"/>
+                </a:solidFill>
+              </a:rPr>
+              <a:t>优秀</a:t>
+            </a:r>
+            <a:r>
+              <a:rPr sz="850" b="0">
+                <a:solidFill>
+                  <a:srgbClr val="5C6E6A"/>
+                </a:solidFill>
+              </a:rPr>
+              <a:t>   验收口径：</a:t>
+            </a:r>
+            <a:r>
+              <a:rPr sz="850" b="0">
+                <a:solidFill>
+                  <a:srgbClr val="5C6E6A"/>
+                </a:solidFill>
+              </a:rPr>
+              <a:t>依赖可还原（requirements完整）；dev分支规范合并</a:t>
+            </a:r>
+          </a:p>
+        </p:txBody>
+      </p:sp>
+      <p:sp>
+        <p:nvSpPr>
+          <p:cNvPr id="32" name="Rounded Rectangle 31"/>
+          <p:cNvSpPr/>
+          <p:nvPr/>
+        </p:nvSpPr>
+        <p:spPr>
+          <a:xfrm>
+            <a:off x="10532681" y="3834981"/>
+            <a:ext cx="1052766" cy="237744"/>
+          </a:xfrm>
+          <a:prstGeom prst="roundRect">
+            <a:avLst>
+              <a:gd name="adj" fmla="val 50000"/>
+            </a:avLst>
+          </a:prstGeom>
+          <a:solidFill>
+            <a:srgbClr val="C9A227"/>
+          </a:solidFill>
+          <a:ln>
+            <a:noFill/>
+          </a:ln>
+          <a:effectLst/>
+        </p:spPr>
+        <p:style>
+          <a:lnRef idx="1">
+            <a:schemeClr val="accent1"/>
+          </a:lnRef>
+          <a:fillRef idx="3">
+            <a:schemeClr val="accent1"/>
+          </a:fillRef>
+          <a:effectRef idx="2">
+            <a:schemeClr val="accent1"/>
+          </a:effectRef>
+          <a:fontRef idx="minor">
+            <a:schemeClr val="lt1"/>
+          </a:fontRef>
+        </p:style>
+        <p:txBody>
+          <a:bodyPr rtlCol="0" anchor="ctr"/>
+          <a:lstStyle/>
+          <a:p>
+            <a:pPr algn="ctr"/>
+          </a:p>
+        </p:txBody>
+      </p:sp>
+      <p:sp>
+        <p:nvSpPr>
+          <p:cNvPr id="33" name="TextBox 32"/>
+          <p:cNvSpPr txBox="1"/>
+          <p:nvPr/>
+        </p:nvSpPr>
+        <p:spPr>
+          <a:xfrm>
+            <a:off x="10532681" y="3834981"/>
+            <a:ext cx="1052766" cy="237744"/>
+          </a:xfrm>
+          <a:prstGeom prst="rect">
+            <a:avLst/>
+          </a:prstGeom>
+          <a:noFill/>
+        </p:spPr>
+        <p:txBody>
+          <a:bodyPr wrap="square" anchor="ctr" lIns="0" rIns="0" tIns="0" bIns="0">
+            <a:spAutoFit/>
+          </a:bodyPr>
+          <a:lstStyle/>
+          <a:p>
+            <a:pPr algn="ctr">
+              <a:lnSpc>
+                <a:spcPct val="114000"/>
+              </a:lnSpc>
+            </a:pPr>
+            <a:r>
+              <a:rPr sz="850" b="1">
+                <a:solidFill>
+                  <a:srgbClr val="FFFFFF"/>
+                </a:solidFill>
+              </a:rPr>
+              <a:t>本节取证项 通过</a:t>
+            </a:r>
+          </a:p>
+        </p:txBody>
+      </p:sp>
+      <p:sp>
+        <p:nvSpPr>
+          <p:cNvPr id="34" name="TextBox 33"/>
+          <p:cNvSpPr txBox="1"/>
+          <p:nvPr/>
+        </p:nvSpPr>
+        <p:spPr>
+          <a:xfrm>
+            <a:off x="932688" y="4091013"/>
+            <a:ext cx="10671047" cy="400513"/>
+          </a:xfrm>
+          <a:prstGeom prst="rect">
+            <a:avLst/>
+          </a:prstGeom>
+          <a:noFill/>
+        </p:spPr>
+        <p:txBody>
+          <a:bodyPr wrap="square" anchor="t" lIns="0" rIns="0" tIns="0" bIns="0">
+            <a:spAutoFit/>
+          </a:bodyPr>
+          <a:lstStyle/>
+          <a:p>
+            <a:pPr algn="l">
+              <a:lnSpc>
+                <a:spcPct val="114000"/>
+              </a:lnSpc>
+            </a:pPr>
+            <a:r>
+              <a:rPr sz="950" b="0">
+                <a:solidFill>
+                  <a:srgbClr val="1B2B28"/>
+                </a:solidFill>
+              </a:rPr>
+              <a:t>运行依赖 2/2 条钉下限｜开发依赖 4/4 条钉下限｜-r 引用 requirements.txt=是｜与运行依赖重名的开发项 0 个（无）｜git branch dev=是、git checkout dev=是、--no-ff 合并=是</a:t>
+            </a:r>
+          </a:p>
+        </p:txBody>
+      </p:sp>
+      <p:sp>
+        <p:nvSpPr>
+          <p:cNvPr id="35" name="Rounded Rectangle 34"/>
+          <p:cNvSpPr/>
+          <p:nvPr/>
+        </p:nvSpPr>
+        <p:spPr>
+          <a:xfrm>
+            <a:off x="475488" y="4610398"/>
+            <a:ext cx="11237976" cy="802849"/>
+          </a:xfrm>
+          <a:prstGeom prst="roundRect">
+            <a:avLst>
+              <a:gd name="adj" fmla="val 6000"/>
+            </a:avLst>
+          </a:prstGeom>
+          <a:solidFill>
+            <a:srgbClr val="FFFFFF"/>
+          </a:solidFill>
+          <a:ln w="9525">
+            <a:solidFill>
+              <a:srgbClr val="E4F1EE"/>
+            </a:solidFill>
+          </a:ln>
+          <a:effectLst/>
+        </p:spPr>
+        <p:style>
+          <a:lnRef idx="1">
+            <a:schemeClr val="accent1"/>
+          </a:lnRef>
+          <a:fillRef idx="3">
+            <a:schemeClr val="accent1"/>
+          </a:fillRef>
+          <a:effectRef idx="2">
+            <a:schemeClr val="accent1"/>
+          </a:effectRef>
+          <a:fontRef idx="minor">
+            <a:schemeClr val="lt1"/>
+          </a:fontRef>
+        </p:style>
+        <p:txBody>
+          <a:bodyPr rtlCol="0" anchor="ctr"/>
+          <a:lstStyle/>
+          <a:p>
+            <a:pPr algn="ctr"/>
+          </a:p>
+        </p:txBody>
+      </p:sp>
+      <p:sp>
+        <p:nvSpPr>
+          <p:cNvPr id="36" name="Rounded Rectangle 35"/>
+          <p:cNvSpPr/>
+          <p:nvPr/>
+        </p:nvSpPr>
+        <p:spPr>
+          <a:xfrm>
+            <a:off x="475488" y="4610398"/>
+            <a:ext cx="54864" cy="802849"/>
+          </a:xfrm>
+          <a:prstGeom prst="roundRect">
+            <a:avLst>
+              <a:gd name="adj" fmla="val 50000"/>
+            </a:avLst>
+          </a:prstGeom>
+          <a:solidFill>
+            <a:srgbClr val="C9A227"/>
+          </a:solidFill>
+          <a:ln>
+            <a:noFill/>
+          </a:ln>
+          <a:effectLst/>
+        </p:spPr>
+        <p:style>
+          <a:lnRef idx="1">
+            <a:schemeClr val="accent1"/>
+          </a:lnRef>
+          <a:fillRef idx="3">
+            <a:schemeClr val="accent1"/>
+          </a:fillRef>
+          <a:effectRef idx="2">
+            <a:schemeClr val="accent1"/>
+          </a:effectRef>
+          <a:fontRef idx="minor">
+            <a:schemeClr val="lt1"/>
+          </a:fontRef>
+        </p:style>
+        <p:txBody>
+          <a:bodyPr rtlCol="0" anchor="ctr"/>
+          <a:lstStyle/>
+          <a:p>
+            <a:pPr algn="ctr"/>
+          </a:p>
+        </p:txBody>
+      </p:sp>
+      <p:sp>
+        <p:nvSpPr>
+          <p:cNvPr id="37" name="Rounded Rectangle 36"/>
+          <p:cNvSpPr/>
+          <p:nvPr/>
+        </p:nvSpPr>
+        <p:spPr>
+          <a:xfrm>
+            <a:off x="621792" y="4692694"/>
+            <a:ext cx="237744" cy="237744"/>
+          </a:xfrm>
+          <a:prstGeom prst="roundRect">
+            <a:avLst>
+              <a:gd name="adj" fmla="val 28000"/>
+            </a:avLst>
+          </a:prstGeom>
+          <a:solidFill>
+            <a:srgbClr val="C9A227"/>
+          </a:solidFill>
+          <a:ln>
+            <a:noFill/>
+          </a:ln>
+          <a:effectLst/>
+        </p:spPr>
+        <p:style>
+          <a:lnRef idx="1">
+            <a:schemeClr val="accent1"/>
+          </a:lnRef>
+          <a:fillRef idx="3">
+            <a:schemeClr val="accent1"/>
+          </a:fillRef>
+          <a:effectRef idx="2">
+            <a:schemeClr val="accent1"/>
+          </a:effectRef>
+          <a:fontRef idx="minor">
+            <a:schemeClr val="lt1"/>
+          </a:fontRef>
+        </p:style>
+        <p:txBody>
+          <a:bodyPr rtlCol="0" anchor="ctr"/>
+          <a:lstStyle/>
+          <a:p>
+            <a:pPr algn="ctr"/>
+          </a:p>
+        </p:txBody>
+      </p:sp>
+      <p:sp>
+        <p:nvSpPr>
+          <p:cNvPr id="38" name="TextBox 37"/>
+          <p:cNvSpPr txBox="1"/>
+          <p:nvPr/>
+        </p:nvSpPr>
+        <p:spPr>
+          <a:xfrm>
+            <a:off x="621792" y="4692694"/>
+            <a:ext cx="237744" cy="237744"/>
+          </a:xfrm>
+          <a:prstGeom prst="rect">
+            <a:avLst/>
+          </a:prstGeom>
+          <a:noFill/>
+        </p:spPr>
+        <p:txBody>
+          <a:bodyPr wrap="square" anchor="ctr" lIns="0" rIns="0" tIns="0" bIns="0">
+            <a:spAutoFit/>
+          </a:bodyPr>
+          <a:lstStyle/>
+          <a:p>
+            <a:pPr algn="ctr">
+              <a:lnSpc>
+                <a:spcPct val="114000"/>
+              </a:lnSpc>
+            </a:pPr>
+            <a:r>
+              <a:rPr sz="1000" b="1">
+                <a:solidFill>
+                  <a:srgbClr val="FFFFFF"/>
+                </a:solidFill>
+              </a:rPr>
+              <a:t>A</a:t>
+            </a:r>
+          </a:p>
+        </p:txBody>
+      </p:sp>
+      <p:sp>
+        <p:nvSpPr>
+          <p:cNvPr id="39" name="TextBox 38"/>
+          <p:cNvSpPr txBox="1"/>
+          <p:nvPr/>
+        </p:nvSpPr>
+        <p:spPr>
+          <a:xfrm>
+            <a:off x="932688" y="4674406"/>
+            <a:ext cx="8778240" cy="274320"/>
+          </a:xfrm>
+          <a:prstGeom prst="rect">
+            <a:avLst/>
+          </a:prstGeom>
+          <a:noFill/>
+        </p:spPr>
+        <p:txBody>
+          <a:bodyPr wrap="square" anchor="ctr" lIns="0" rIns="0" tIns="0" bIns="0">
+            <a:spAutoFit/>
+          </a:bodyPr>
+          <a:lstStyle/>
+          <a:p>
+            <a:pPr algn="l">
+              <a:lnSpc>
+                <a:spcPct val="114000"/>
+              </a:lnSpc>
+            </a:pPr>
+            <a:r>
+              <a:rPr sz="1050" b="1">
+                <a:solidFill>
+                  <a:srgbClr val="1B2B28"/>
+                </a:solidFill>
+              </a:rPr>
+              <a:t>超优</a:t>
+            </a:r>
+            <a:r>
+              <a:rPr sz="850" b="0">
+                <a:solidFill>
+                  <a:srgbClr val="5C6E6A"/>
+                </a:solidFill>
+              </a:rPr>
+              <a:t>   验收口径：</a:t>
+            </a:r>
+            <a:r>
+              <a:rPr sz="850" b="0">
+                <a:solidFill>
+                  <a:srgbClr val="5C6E6A"/>
+                </a:solidFill>
+              </a:rPr>
+              <a:t>优秀+GitHub Actions CI或pre-commit钩子</a:t>
+            </a:r>
+          </a:p>
+        </p:txBody>
+      </p:sp>
+      <p:sp>
+        <p:nvSpPr>
+          <p:cNvPr id="40" name="Rounded Rectangle 39"/>
+          <p:cNvSpPr/>
+          <p:nvPr/>
+        </p:nvSpPr>
+        <p:spPr>
+          <a:xfrm>
+            <a:off x="10532681" y="4701838"/>
+            <a:ext cx="1052766" cy="237744"/>
+          </a:xfrm>
+          <a:prstGeom prst="roundRect">
+            <a:avLst>
+              <a:gd name="adj" fmla="val 50000"/>
+            </a:avLst>
+          </a:prstGeom>
+          <a:solidFill>
+            <a:srgbClr val="C9A227"/>
+          </a:solidFill>
+          <a:ln>
+            <a:noFill/>
+          </a:ln>
+          <a:effectLst/>
+        </p:spPr>
+        <p:style>
+          <a:lnRef idx="1">
+            <a:schemeClr val="accent1"/>
+          </a:lnRef>
+          <a:fillRef idx="3">
+            <a:schemeClr val="accent1"/>
+          </a:fillRef>
+          <a:effectRef idx="2">
+            <a:schemeClr val="accent1"/>
+          </a:effectRef>
+          <a:fontRef idx="minor">
+            <a:schemeClr val="lt1"/>
+          </a:fontRef>
+        </p:style>
+        <p:txBody>
+          <a:bodyPr rtlCol="0" anchor="ctr"/>
+          <a:lstStyle/>
+          <a:p>
+            <a:pPr algn="ctr"/>
+          </a:p>
+        </p:txBody>
+      </p:sp>
+      <p:sp>
+        <p:nvSpPr>
+          <p:cNvPr id="41" name="TextBox 40"/>
+          <p:cNvSpPr txBox="1"/>
+          <p:nvPr/>
+        </p:nvSpPr>
+        <p:spPr>
+          <a:xfrm>
+            <a:off x="10532681" y="4701838"/>
+            <a:ext cx="1052766" cy="237744"/>
+          </a:xfrm>
+          <a:prstGeom prst="rect">
+            <a:avLst/>
+          </a:prstGeom>
+          <a:noFill/>
+        </p:spPr>
+        <p:txBody>
+          <a:bodyPr wrap="square" anchor="ctr" lIns="0" rIns="0" tIns="0" bIns="0">
+            <a:spAutoFit/>
+          </a:bodyPr>
+          <a:lstStyle/>
+          <a:p>
+            <a:pPr algn="ctr">
+              <a:lnSpc>
+                <a:spcPct val="114000"/>
+              </a:lnSpc>
+            </a:pPr>
+            <a:r>
+              <a:rPr sz="850" b="1">
+                <a:solidFill>
+                  <a:srgbClr val="FFFFFF"/>
+                </a:solidFill>
+              </a:rPr>
+              <a:t>本节取证项 通过</a:t>
+            </a:r>
+          </a:p>
+        </p:txBody>
+      </p:sp>
+      <p:sp>
+        <p:nvSpPr>
+          <p:cNvPr id="42" name="TextBox 41"/>
+          <p:cNvSpPr txBox="1"/>
+          <p:nvPr/>
+        </p:nvSpPr>
+        <p:spPr>
+          <a:xfrm>
+            <a:off x="932688" y="4957870"/>
+            <a:ext cx="10671047" cy="400513"/>
+          </a:xfrm>
+          <a:prstGeom prst="rect">
+            <a:avLst/>
+          </a:prstGeom>
+          <a:noFill/>
+        </p:spPr>
+        <p:txBody>
+          <a:bodyPr wrap="square" anchor="t" lIns="0" rIns="0" tIns="0" bIns="0">
+            <a:spAutoFit/>
+          </a:bodyPr>
+          <a:lstStyle/>
+          <a:p>
+            <a:pPr algn="l">
+              <a:lnSpc>
+                <a:spcPct val="114000"/>
+              </a:lnSpc>
+            </a:pPr>
+            <a:r>
+              <a:rPr sz="950" b="0">
+                <a:solidFill>
+                  <a:srgbClr val="1B2B28"/>
+                </a:solidFill>
+              </a:rPr>
+              <a:t>pre-commit 钩子文件已产出=是（声明 2 个：black, flake8）｜.github/workflows 下 CI 文件 0 个｜工单优秀(B) 档前置=成立</a:t>
+            </a:r>
+          </a:p>
+        </p:txBody>
+      </p:sp>
+      <p:sp>
+        <p:nvSpPr>
+          <p:cNvPr id="43" name="Rounded Rectangle 42"/>
+          <p:cNvSpPr/>
+          <p:nvPr/>
+        </p:nvSpPr>
+        <p:spPr>
+          <a:xfrm>
+            <a:off x="475488" y="5477256"/>
+            <a:ext cx="11237976" cy="941831"/>
+          </a:xfrm>
+          <a:prstGeom prst="roundRect">
+            <a:avLst>
+              <a:gd name="adj" fmla="val 5000"/>
+            </a:avLst>
+          </a:prstGeom>
+          <a:solidFill>
+            <a:srgbClr val="E4F1EE"/>
+          </a:solidFill>
+          <a:ln>
+            <a:noFill/>
+          </a:ln>
+          <a:effectLst/>
+        </p:spPr>
+        <p:style>
+          <a:lnRef idx="1">
+            <a:schemeClr val="accent1"/>
+          </a:lnRef>
+          <a:fillRef idx="3">
+            <a:schemeClr val="accent1"/>
+          </a:fillRef>
+          <a:effectRef idx="2">
+            <a:schemeClr val="accent1"/>
+          </a:effectRef>
+          <a:fontRef idx="minor">
+            <a:schemeClr val="lt1"/>
+          </a:fontRef>
+        </p:style>
+        <p:txBody>
+          <a:bodyPr rtlCol="0" anchor="ctr"/>
+          <a:lstStyle/>
+          <a:p>
+            <a:pPr algn="ctr"/>
+          </a:p>
+        </p:txBody>
+      </p:sp>
+      <p:sp>
+        <p:nvSpPr>
+          <p:cNvPr id="44" name="Rounded Rectangle 43"/>
+          <p:cNvSpPr/>
+          <p:nvPr/>
+        </p:nvSpPr>
+        <p:spPr>
+          <a:xfrm>
+            <a:off x="475488" y="5477256"/>
+            <a:ext cx="54864" cy="941831"/>
+          </a:xfrm>
+          <a:prstGeom prst="roundRect">
+            <a:avLst>
+              <a:gd name="adj" fmla="val 50000"/>
+            </a:avLst>
+          </a:prstGeom>
+          <a:solidFill>
+            <a:srgbClr val="C9A227"/>
+          </a:solidFill>
+          <a:ln>
+            <a:noFill/>
+          </a:ln>
+          <a:effectLst/>
+        </p:spPr>
+        <p:style>
+          <a:lnRef idx="1">
+            <a:schemeClr val="accent1"/>
+          </a:lnRef>
+          <a:fillRef idx="3">
+            <a:schemeClr val="accent1"/>
+          </a:fillRef>
+          <a:effectRef idx="2">
+            <a:schemeClr val="accent1"/>
+          </a:effectRef>
+          <a:fontRef idx="minor">
+            <a:schemeClr val="lt1"/>
+          </a:fontRef>
+        </p:style>
+        <p:txBody>
+          <a:bodyPr rtlCol="0" anchor="ctr"/>
+          <a:lstStyle/>
+          <a:p>
+            <a:pPr algn="ctr"/>
+          </a:p>
+        </p:txBody>
+      </p:sp>
+      <p:sp>
+        <p:nvSpPr>
+          <p:cNvPr id="45" name="TextBox 44"/>
+          <p:cNvSpPr txBox="1"/>
+          <p:nvPr/>
+        </p:nvSpPr>
+        <p:spPr>
+          <a:xfrm>
+            <a:off x="676656" y="5550408"/>
+            <a:ext cx="10908792" cy="795527"/>
+          </a:xfrm>
+          <a:prstGeom prst="rect">
+            <a:avLst/>
+          </a:prstGeom>
+          <a:noFill/>
+        </p:spPr>
+        <p:txBody>
+          <a:bodyPr wrap="square" anchor="t" lIns="0" rIns="0" tIns="0" bIns="0">
+            <a:spAutoFit/>
+          </a:bodyPr>
+          <a:lstStyle/>
+          <a:p>
+            <a:pPr algn="l">
+              <a:lnSpc>
+                <a:spcPct val="124000"/>
+              </a:lnSpc>
+            </a:pPr>
+            <a:r>
+              <a:rPr sz="850" b="0">
+                <a:solidFill>
+                  <a:srgbClr val="1B2B28"/>
+                </a:solidFill>
+              </a:rPr>
+              <a:t>出处：工程化项目/p12_proj_template/output/report.txt 第 37 节「工单验收四档对照」——本机 2026-10-28 05:06 实跑落盘，上表数字逐字摘录、未改写。</a:t>
+            </a:r>
+          </a:p>
+          <a:p>
+            <a:pPr algn="l">
+              <a:lnSpc>
+                <a:spcPct val="124000"/>
+              </a:lnSpc>
+            </a:pPr>
+            <a:r>
+              <a:rPr sz="850" b="0">
+                <a:solidFill>
+                  <a:srgbClr val="1B2B28"/>
+                </a:solidFill>
+              </a:rPr>
+              <a:t>复现：cd 工程化项目/p12_proj_template &amp;&amp; python run.py &amp;&amp; python -m pytest -q -o addopts=''</a:t>
+            </a:r>
+          </a:p>
+          <a:p>
+            <a:pPr algn="l">
+              <a:lnSpc>
+                <a:spcPct val="124000"/>
+              </a:lnSpc>
+            </a:pPr>
+            <a:r>
+              <a:rPr sz="850" b="0">
+                <a:solidFill>
+                  <a:srgbClr val="1B2B28"/>
+                </a:solidFill>
+              </a:rPr>
+              <a:t>口径：表中「判定」沿用报告原词——绿=达标/通过，黄=仅本节取证项通过（未取证子项在报告里逐条点名），红=未达标。</a:t>
+            </a:r>
+          </a:p>
+        </p:txBody>
+      </p:sp>
+    </p:spTree>
+  </p:cSld>
+  <p:clrMapOvr>
+    <a:masterClrMapping/>
+  </p:clrMapOvr>
+</p:sld>
+</file>
+
+<file path=ppt/slides/slide9.xml><?xml version="1.0" encoding="utf-8"?>
+<p:sld xmlns:a="http://schemas.openxmlformats.org/drawingml/2006/main" xmlns:p="http://schemas.openxmlformats.org/presentationml/2006/main" xmlns:r="http://schemas.openxmlformats.org/officeDocument/2006/relationships">
+  <p:cSld>
+    <p:spTree>
+      <p:nvGrpSpPr>
+        <p:cNvPr id="1" name=""/>
+        <p:cNvGrpSpPr/>
+        <p:nvPr/>
+      </p:nvGrpSpPr>
+      <p:grpSpPr/>
+      <p:sp>
+        <p:nvSpPr>
+          <p:cNvPr id="2" name="Rounded Rectangle 1"/>
+          <p:cNvSpPr/>
+          <p:nvPr/>
+        </p:nvSpPr>
+        <p:spPr>
+          <a:xfrm>
+            <a:off x="0" y="0"/>
+            <a:ext cx="12191695" cy="64008"/>
+          </a:xfrm>
+          <a:prstGeom prst="roundRect">
+            <a:avLst>
+              <a:gd name="adj" fmla="val 50000"/>
+            </a:avLst>
+          </a:prstGeom>
+          <a:solidFill>
+            <a:srgbClr val="0B5E54"/>
+          </a:solidFill>
+          <a:ln>
+            <a:noFill/>
+          </a:ln>
+          <a:effectLst/>
+        </p:spPr>
+        <p:style>
+          <a:lnRef idx="1">
+            <a:schemeClr val="accent1"/>
+          </a:lnRef>
+          <a:fillRef idx="3">
+            <a:schemeClr val="accent1"/>
+          </a:fillRef>
+          <a:effectRef idx="2">
+            <a:schemeClr val="accent1"/>
+          </a:effectRef>
+          <a:fontRef idx="minor">
+            <a:schemeClr val="lt1"/>
+          </a:fontRef>
+        </p:style>
+        <p:txBody>
+          <a:bodyPr rtlCol="0" anchor="ctr"/>
+          <a:lstStyle/>
+          <a:p>
+            <a:pPr algn="ctr"/>
+          </a:p>
+        </p:txBody>
+      </p:sp>
+      <p:sp>
+        <p:nvSpPr>
+          <p:cNvPr id="3" name="TextBox 2"/>
+          <p:cNvSpPr txBox="1"/>
+          <p:nvPr/>
+        </p:nvSpPr>
+        <p:spPr>
+          <a:xfrm>
+            <a:off x="475488" y="146304"/>
+            <a:ext cx="8229600" cy="292608"/>
+          </a:xfrm>
+          <a:prstGeom prst="rect">
+            <a:avLst/>
+          </a:prstGeom>
+          <a:noFill/>
+        </p:spPr>
+        <p:txBody>
+          <a:bodyPr wrap="square" anchor="t" lIns="0" rIns="0" tIns="0" bIns="0">
+            <a:spAutoFit/>
+          </a:bodyPr>
+          <a:lstStyle/>
+          <a:p>
+            <a:pPr algn="l">
+              <a:lnSpc>
+                <a:spcPct val="114000"/>
+              </a:lnSpc>
+            </a:pPr>
+            <a:r>
+              <a:rPr sz="1100" b="1">
+                <a:solidFill>
+                  <a:srgbClr val="0B5E54"/>
+                </a:solidFill>
+              </a:rPr>
+              <a:t>工单实战 · 运行留证</a:t>
+            </a:r>
+          </a:p>
+        </p:txBody>
+      </p:sp>
+      <p:sp>
+        <p:nvSpPr>
+          <p:cNvPr id="4" name="Rounded Rectangle 3"/>
+          <p:cNvSpPr/>
+          <p:nvPr/>
+        </p:nvSpPr>
+        <p:spPr>
+          <a:xfrm>
+            <a:off x="475488" y="475488"/>
+            <a:ext cx="2027872" cy="310896"/>
+          </a:xfrm>
+          <a:prstGeom prst="roundRect">
+            <a:avLst>
+              <a:gd name="adj" fmla="val 50000"/>
+            </a:avLst>
+          </a:prstGeom>
+          <a:solidFill>
+            <a:srgbClr val="C9A227"/>
+          </a:solidFill>
+          <a:ln>
+            <a:noFill/>
+          </a:ln>
+          <a:effectLst/>
+        </p:spPr>
+        <p:style>
+          <a:lnRef idx="1">
+            <a:schemeClr val="accent1"/>
+          </a:lnRef>
+          <a:fillRef idx="3">
+            <a:schemeClr val="accent1"/>
+          </a:fillRef>
+          <a:effectRef idx="2">
+            <a:schemeClr val="accent1"/>
+          </a:effectRef>
+          <a:fontRef idx="minor">
+            <a:schemeClr val="lt1"/>
+          </a:fontRef>
+        </p:style>
+        <p:txBody>
+          <a:bodyPr rtlCol="0" anchor="ctr"/>
+          <a:lstStyle/>
+          <a:p>
+            <a:pPr algn="ctr"/>
+          </a:p>
+        </p:txBody>
+      </p:sp>
+      <p:sp>
+        <p:nvSpPr>
+          <p:cNvPr id="5" name="TextBox 4"/>
+          <p:cNvSpPr txBox="1"/>
+          <p:nvPr/>
+        </p:nvSpPr>
+        <p:spPr>
+          <a:xfrm>
+            <a:off x="475488" y="475488"/>
+            <a:ext cx="2027872" cy="310896"/>
+          </a:xfrm>
+          <a:prstGeom prst="rect">
+            <a:avLst/>
+          </a:prstGeom>
+          <a:noFill/>
+        </p:spPr>
+        <p:txBody>
+          <a:bodyPr wrap="square" anchor="ctr" lIns="0" rIns="0" tIns="0" bIns="0">
+            <a:spAutoFit/>
+          </a:bodyPr>
+          <a:lstStyle/>
+          <a:p>
+            <a:pPr algn="ctr">
+              <a:lnSpc>
+                <a:spcPct val="114000"/>
+              </a:lnSpc>
+            </a:pPr>
+            <a:r>
+              <a:rPr sz="1050" b="1">
+                <a:solidFill>
+                  <a:srgbClr val="FFFFFF"/>
+                </a:solidFill>
+              </a:rPr>
+              <a:t>SCREENSHOT · 终端逐字截图</a:t>
+            </a:r>
+          </a:p>
+        </p:txBody>
+      </p:sp>
+      <p:sp>
+        <p:nvSpPr>
+          <p:cNvPr id="6" name="TextBox 5"/>
+          <p:cNvSpPr txBox="1"/>
+          <p:nvPr/>
+        </p:nvSpPr>
+        <p:spPr>
+          <a:xfrm>
+            <a:off x="475488" y="859536"/>
+            <a:ext cx="11237976" cy="502920"/>
+          </a:xfrm>
+          <a:prstGeom prst="rect">
+            <a:avLst/>
+          </a:prstGeom>
+          <a:noFill/>
+        </p:spPr>
+        <p:txBody>
+          <a:bodyPr wrap="square" anchor="t" lIns="0" rIns="0" tIns="0" bIns="0">
+            <a:spAutoFit/>
+          </a:bodyPr>
+          <a:lstStyle/>
+          <a:p>
+            <a:pPr algn="l">
+              <a:lnSpc>
+                <a:spcPct val="114000"/>
+              </a:lnSpc>
+            </a:pPr>
+            <a:r>
+              <a:rPr sz="2200" b="1">
+                <a:solidFill>
+                  <a:srgbClr val="1B2B28"/>
+                </a:solidFill>
+              </a:rPr>
+              <a:t>P1.2 工单验收四档对照 · 四档逐字输出截图</a:t>
+            </a:r>
+          </a:p>
+        </p:txBody>
+      </p:sp>
+      <p:sp>
+        <p:nvSpPr>
+          <p:cNvPr id="7" name="Rounded Rectangle 6"/>
+          <p:cNvSpPr/>
+          <p:nvPr/>
+        </p:nvSpPr>
+        <p:spPr>
+          <a:xfrm>
+            <a:off x="475488" y="1389888"/>
+            <a:ext cx="1234440" cy="27432"/>
+          </a:xfrm>
+          <a:prstGeom prst="roundRect">
+            <a:avLst>
+              <a:gd name="adj" fmla="val 50000"/>
+            </a:avLst>
+          </a:prstGeom>
+          <a:solidFill>
+            <a:srgbClr val="C9A227"/>
+          </a:solidFill>
+          <a:ln>
+            <a:noFill/>
+          </a:ln>
+          <a:effectLst/>
+        </p:spPr>
+        <p:style>
+          <a:lnRef idx="1">
+            <a:schemeClr val="accent1"/>
+          </a:lnRef>
+          <a:fillRef idx="3">
+            <a:schemeClr val="accent1"/>
+          </a:fillRef>
+          <a:effectRef idx="2">
+            <a:schemeClr val="accent1"/>
+          </a:effectRef>
+          <a:fontRef idx="minor">
+            <a:schemeClr val="lt1"/>
+          </a:fontRef>
+        </p:style>
+        <p:txBody>
+          <a:bodyPr rtlCol="0" anchor="ctr"/>
+          <a:lstStyle/>
+          <a:p>
+            <a:pPr algn="ctr"/>
+          </a:p>
+        </p:txBody>
+      </p:sp>
+      <p:sp>
+        <p:nvSpPr>
+          <p:cNvPr id="8" name="Rounded Rectangle 7"/>
+          <p:cNvSpPr/>
+          <p:nvPr/>
+        </p:nvSpPr>
+        <p:spPr>
+          <a:xfrm>
+            <a:off x="475488" y="6419088"/>
+            <a:ext cx="11237976" cy="10972"/>
+          </a:xfrm>
+          <a:prstGeom prst="roundRect">
+            <a:avLst>
+              <a:gd name="adj" fmla="val 50000"/>
+            </a:avLst>
+          </a:prstGeom>
+          <a:solidFill>
+            <a:srgbClr val="E4F1EE"/>
+          </a:solidFill>
+          <a:ln>
+            <a:noFill/>
+          </a:ln>
+          <a:effectLst/>
+        </p:spPr>
+        <p:style>
+          <a:lnRef idx="1">
+            <a:schemeClr val="accent1"/>
+          </a:lnRef>
+          <a:fillRef idx="3">
+            <a:schemeClr val="accent1"/>
+          </a:fillRef>
+          <a:effectRef idx="2">
+            <a:schemeClr val="accent1"/>
+          </a:effectRef>
+          <a:fontRef idx="minor">
+            <a:schemeClr val="lt1"/>
+          </a:fontRef>
+        </p:style>
+        <p:txBody>
+          <a:bodyPr rtlCol="0" anchor="ctr"/>
+          <a:lstStyle/>
+          <a:p>
+            <a:pPr algn="ctr"/>
+          </a:p>
+        </p:txBody>
+      </p:sp>
+      <p:sp>
+        <p:nvSpPr>
+          <p:cNvPr id="9" name="TextBox 8"/>
+          <p:cNvSpPr txBox="1"/>
+          <p:nvPr/>
+        </p:nvSpPr>
+        <p:spPr>
+          <a:xfrm>
+            <a:off x="475488" y="6455664"/>
+            <a:ext cx="7315200" cy="292608"/>
+          </a:xfrm>
+          <a:prstGeom prst="rect">
+            <a:avLst/>
+          </a:prstGeom>
+          <a:noFill/>
+        </p:spPr>
+        <p:txBody>
+          <a:bodyPr wrap="square" anchor="t" lIns="0" rIns="0" tIns="0" bIns="0">
+            <a:spAutoFit/>
+          </a:bodyPr>
+          <a:lstStyle/>
+          <a:p>
+            <a:pPr algn="l">
+              <a:lnSpc>
+                <a:spcPct val="114000"/>
+              </a:lnSpc>
+            </a:pPr>
+            <a:r>
+              <a:rPr sz="900" b="0">
+                <a:solidFill>
+                  <a:srgbClr val="5C6E6A"/>
+                </a:solidFill>
+              </a:rPr>
+              <a:t>两江智造集团 · Python程序设计（项目实战）</a:t>
+            </a:r>
+          </a:p>
+        </p:txBody>
+      </p:sp>
+      <p:sp>
+        <p:nvSpPr>
+          <p:cNvPr id="10" name="TextBox 9"/>
+          <p:cNvSpPr txBox="1"/>
+          <p:nvPr/>
+        </p:nvSpPr>
+        <p:spPr>
+          <a:xfrm>
+            <a:off x="10597896" y="6537960"/>
+            <a:ext cx="996696" cy="301752"/>
+          </a:xfrm>
+          <a:prstGeom prst="rect">
+            <a:avLst/>
+          </a:prstGeom>
+          <a:noFill/>
+        </p:spPr>
+        <p:txBody>
+          <a:bodyPr wrap="square" anchor="t" lIns="0" rIns="0" tIns="0" bIns="0">
+            <a:spAutoFit/>
+          </a:bodyPr>
+          <a:lstStyle/>
+          <a:p>
+            <a:pPr algn="r">
+              <a:lnSpc>
+                <a:spcPct val="114000"/>
+              </a:lnSpc>
+            </a:pPr>
+            <a:r>
+              <a:rPr sz="1000" b="0">
+                <a:solidFill>
+                  <a:srgbClr val="8A97B5"/>
+                </a:solidFill>
+              </a:rPr>
+              <a:t>5 / 10</a:t>
+            </a:r>
+          </a:p>
+        </p:txBody>
+      </p:sp>
+      <p:sp>
+        <p:nvSpPr>
+          <p:cNvPr id="11" name="TextBox 10"/>
+          <p:cNvSpPr txBox="1"/>
+          <p:nvPr/>
+        </p:nvSpPr>
+        <p:spPr>
+          <a:xfrm>
+            <a:off x="475488" y="1517904"/>
+            <a:ext cx="11237976" cy="237744"/>
+          </a:xfrm>
+          <a:prstGeom prst="rect">
+            <a:avLst/>
+          </a:prstGeom>
+          <a:noFill/>
+        </p:spPr>
+        <p:txBody>
+          <a:bodyPr wrap="square" anchor="t" lIns="0" rIns="0" tIns="0" bIns="0">
+            <a:spAutoFit/>
+          </a:bodyPr>
+          <a:lstStyle/>
+          <a:p>
+            <a:pPr algn="l">
+              <a:lnSpc>
+                <a:spcPct val="114000"/>
+              </a:lnSpc>
+            </a:pPr>
+            <a:r>
+              <a:rPr sz="1000" b="0">
+                <a:solidFill>
+                  <a:srgbClr val="5C6E6A"/>
+                </a:solidFill>
+              </a:rPr>
+              <a:t>终端窗口截图：由 report.txt 本节逐字渲染，未手工改写</a:t>
+            </a:r>
+          </a:p>
+        </p:txBody>
+      </p:sp>
+      <p:pic>
+        <p:nvPicPr>
+          <p:cNvPr id="12" name="Picture 11" descr="p12_proj_template_workorder.png"/>
+          <p:cNvPicPr>
+            <a:picLocks noChangeAspect="1"/>
+          </p:cNvPicPr>
+          <p:nvPr/>
+        </p:nvPicPr>
+        <p:blipFill>
+          <a:blip r:embed="rId2"/>
+          <a:stretch>
+            <a:fillRect/>
+          </a:stretch>
+        </p:blipFill>
+        <p:spPr>
+          <a:xfrm>
+            <a:off x="475488" y="1823437"/>
+            <a:ext cx="11237976" cy="3787198"/>
+          </a:xfrm>
+          <a:prstGeom prst="rect">
+            <a:avLst/>
+          </a:prstGeom>
+        </p:spPr>
+      </p:pic>
+      <p:sp>
+        <p:nvSpPr>
+          <p:cNvPr id="13" name="TextBox 12"/>
+          <p:cNvSpPr txBox="1"/>
+          <p:nvPr/>
+        </p:nvSpPr>
+        <p:spPr>
+          <a:xfrm>
+            <a:off x="475488" y="5647210"/>
+            <a:ext cx="11237976" cy="256032"/>
+          </a:xfrm>
+          <a:prstGeom prst="rect">
+            <a:avLst/>
+          </a:prstGeom>
+          <a:noFill/>
+        </p:spPr>
+        <p:txBody>
+          <a:bodyPr wrap="square" anchor="t" lIns="0" rIns="0" tIns="0" bIns="0">
+            <a:spAutoFit/>
+          </a:bodyPr>
+          <a:lstStyle/>
+          <a:p>
+            <a:pPr algn="l">
+              <a:lnSpc>
+                <a:spcPct val="114000"/>
+              </a:lnSpc>
+            </a:pPr>
+            <a:r>
+              <a:rPr sz="850" b="0">
+                <a:solidFill>
+                  <a:srgbClr val="5C6E6A"/>
+                </a:solidFill>
+              </a:rPr>
+              <a:t>▲ p12_proj_template：工单验收四档对照 第 37 行起的四档逐字原文（绿=达标/通过，黄=仅本节取证项，橙=未实测项）</a:t>
             </a:r>
           </a:p>
         </p:txBody>

--- a/03-Python程序设计-项目实战/V2授课PPT/W02-第4次课-交付你的第一个工程模板.pptx
+++ b/03-Python程序设计-项目实战/V2授课PPT/W02-第4次课-交付你的第一个工程模板.pptx
@@ -6,6 +6,7 @@
   </p:sldMasterIdLst>
   <p:sldIdLst>
     <p:sldId id="256" r:id="rId7"/>
+    <p:sldId id="366" r:id="rId18"/>
     <p:sldId id="280" r:id="rId32"/>
     <p:sldId id="307" r:id="rId59"/>
     <p:sldId id="363" r:id="rId15"/>
@@ -15,6 +16,8 @@
     <p:sldId id="336" r:id="rId88"/>
     <p:sldId id="361" r:id="rId113"/>
     <p:sldId id="362" r:id="rId114"/>
+    <p:sldId id="367" r:id="rId19"/>
+    <p:sldId id="368" r:id="rId20"/>
   </p:sldIdLst>
   <p:sldSz cx="12192000" cy="6858000" type="screen4x3"/>
   <p:notesSz cx="6858000" cy="9144000"/>
@@ -4324,22 +4327,20 @@
       <p:grpSpPr/>
       <p:sp>
         <p:nvSpPr>
-          <p:cNvPr id="2" name="Rounded Rectangle 1"/>
+          <p:cNvPr id="2" name="Rectangle 1"/>
           <p:cNvSpPr/>
           <p:nvPr/>
         </p:nvSpPr>
         <p:spPr>
           <a:xfrm>
             <a:off x="0" y="0"/>
-            <a:ext cx="12191695" cy="64008"/>
-          </a:xfrm>
-          <a:prstGeom prst="roundRect">
-            <a:avLst>
-              <a:gd name="adj" fmla="val 50000"/>
-            </a:avLst>
+            <a:ext cx="12192000" cy="1150000"/>
+          </a:xfrm>
+          <a:prstGeom prst="rect">
+            <a:avLst/>
           </a:prstGeom>
           <a:solidFill>
-            <a:srgbClr val="0B5E54"/>
+            <a:srgbClr val="010328"/>
           </a:solidFill>
           <a:ln>
             <a:noFill/>
@@ -4370,60 +4371,20 @@
       </p:sp>
       <p:sp>
         <p:nvSpPr>
-          <p:cNvPr id="3" name="TextBox 2"/>
-          <p:cNvSpPr txBox="1"/>
-          <p:nvPr/>
-        </p:nvSpPr>
-        <p:spPr>
-          <a:xfrm>
-            <a:off x="475488" y="146304"/>
-            <a:ext cx="8229600" cy="292608"/>
-          </a:xfrm>
-          <a:prstGeom prst="rect">
-            <a:avLst/>
-          </a:prstGeom>
-          <a:noFill/>
-        </p:spPr>
-        <p:txBody>
-          <a:bodyPr wrap="square" anchor="t" lIns="0" rIns="0" tIns="0" bIns="0">
-            <a:spAutoFit/>
-          </a:bodyPr>
-          <a:lstStyle/>
-          <a:p>
-            <a:pPr algn="l">
-              <a:lnSpc>
-                <a:spcPct val="114000"/>
-              </a:lnSpc>
-            </a:pPr>
-            <a:r>
-              <a:rPr sz="1100" b="1">
-                <a:solidFill>
-                  <a:srgbClr val="0B5E54"/>
-                </a:solidFill>
-              </a:rPr>
-              <a:t>工单实战 · 运行留证</a:t>
-            </a:r>
-          </a:p>
-        </p:txBody>
-      </p:sp>
-      <p:sp>
-        <p:nvSpPr>
-          <p:cNvPr id="4" name="Rounded Rectangle 3"/>
+          <p:cNvPr id="3" name="Rectangle 2"/>
           <p:cNvSpPr/>
           <p:nvPr/>
         </p:nvSpPr>
         <p:spPr>
           <a:xfrm>
-            <a:off x="475488" y="475488"/>
-            <a:ext cx="2027872" cy="310896"/>
-          </a:xfrm>
-          <a:prstGeom prst="roundRect">
-            <a:avLst>
-              <a:gd name="adj" fmla="val 50000"/>
-            </a:avLst>
+            <a:off x="0" y="1150000"/>
+            <a:ext cx="2600000" cy="70000"/>
+          </a:xfrm>
+          <a:prstGeom prst="rect">
+            <a:avLst/>
           </a:prstGeom>
           <a:solidFill>
-            <a:srgbClr val="C9A227"/>
+            <a:srgbClr val="F5670F"/>
           </a:solidFill>
           <a:ln>
             <a:noFill/>
@@ -4454,14 +4415,14 @@
       </p:sp>
       <p:sp>
         <p:nvSpPr>
-          <p:cNvPr id="5" name="TextBox 4"/>
+          <p:cNvPr id="4" name="TextBox 3"/>
           <p:cNvSpPr txBox="1"/>
           <p:nvPr/>
         </p:nvSpPr>
         <p:spPr>
           <a:xfrm>
-            <a:off x="475488" y="475488"/>
-            <a:ext cx="2027872" cy="310896"/>
+            <a:off x="700000" y="300000"/>
+            <a:ext cx="10792000" cy="700000"/>
           </a:xfrm>
           <a:prstGeom prst="rect">
             <a:avLst/>
@@ -4469,83 +4430,47 @@
           <a:noFill/>
         </p:spPr>
         <p:txBody>
-          <a:bodyPr wrap="square" anchor="ctr" lIns="0" rIns="0" tIns="0" bIns="0">
+          <a:bodyPr wrap="square" anchor="t">
             <a:spAutoFit/>
           </a:bodyPr>
           <a:lstStyle/>
           <a:p>
-            <a:pPr algn="ctr">
+            <a:pPr algn="l">
               <a:lnSpc>
-                <a:spcPct val="114000"/>
+                <a:spcPct val="110000"/>
               </a:lnSpc>
+              <a:spcAft>
+                <a:spcPts val="600"/>
+              </a:spcAft>
             </a:pPr>
             <a:r>
-              <a:rPr sz="1050" b="1">
+              <a:rPr sz="2400" b="1">
                 <a:solidFill>
                   <a:srgbClr val="FFFFFF"/>
                 </a:solidFill>
+                <a:latin typeface="微软雅黑"/>
               </a:rPr>
-              <a:t>SCREENSHOT · 终端逐字截图</a:t>
-            </a:r>
-          </a:p>
-        </p:txBody>
-      </p:sp>
-      <p:sp>
-        <p:nvSpPr>
-          <p:cNvPr id="6" name="TextBox 5"/>
-          <p:cNvSpPr txBox="1"/>
-          <p:nvPr/>
-        </p:nvSpPr>
-        <p:spPr>
-          <a:xfrm>
-            <a:off x="475488" y="859536"/>
-            <a:ext cx="11237976" cy="502920"/>
-          </a:xfrm>
-          <a:prstGeom prst="rect">
-            <a:avLst/>
-          </a:prstGeom>
-          <a:noFill/>
-        </p:spPr>
-        <p:txBody>
-          <a:bodyPr wrap="square" anchor="t" lIns="0" rIns="0" tIns="0" bIns="0">
-            <a:spAutoFit/>
-          </a:bodyPr>
-          <a:lstStyle/>
-          <a:p>
-            <a:pPr algn="l">
-              <a:lnSpc>
-                <a:spcPct val="114000"/>
-              </a:lnSpc>
-            </a:pPr>
-            <a:r>
-              <a:rPr sz="2200" b="1">
-                <a:solidFill>
-                  <a:srgbClr val="1B2B28"/>
-                </a:solidFill>
-              </a:rPr>
-              <a:t>P1.2 · 另一套阶梯逐字输出＋pytest 全量实跑</a:t>
-            </a:r>
-          </a:p>
-        </p:txBody>
-      </p:sp>
-      <p:sp>
-        <p:nvSpPr>
-          <p:cNvPr id="7" name="Rounded Rectangle 6"/>
+              <a:t>下次课预告（第3周）</a:t>
+            </a:r>
+          </a:p>
+        </p:txBody>
+      </p:sp>
+      <p:sp>
+        <p:nvSpPr>
+          <p:cNvPr id="5" name="Rectangle 4"/>
           <p:cNvSpPr/>
           <p:nvPr/>
         </p:nvSpPr>
         <p:spPr>
           <a:xfrm>
-            <a:off x="475488" y="1389888"/>
-            <a:ext cx="1234440" cy="27432"/>
-          </a:xfrm>
-          <a:prstGeom prst="roundRect">
-            <a:avLst>
-              <a:gd name="adj" fmla="val 50000"/>
-            </a:avLst>
+            <a:off x="760000" y="1900000"/>
+            <a:ext cx="10900000" cy="1600000"/>
+          </a:xfrm>
+          <a:prstGeom prst="rect">
+            <a:avLst/>
           </a:prstGeom>
           <a:solidFill>
-            <a:srgbClr val="C9A227"/>
+            <a:srgbClr val="F3F6FD"/>
           </a:solidFill>
           <a:ln>
             <a:noFill/>
@@ -4576,22 +4501,20 @@
       </p:sp>
       <p:sp>
         <p:nvSpPr>
-          <p:cNvPr id="8" name="Rounded Rectangle 7"/>
+          <p:cNvPr id="6" name="Rectangle 5"/>
           <p:cNvSpPr/>
           <p:nvPr/>
         </p:nvSpPr>
         <p:spPr>
           <a:xfrm>
-            <a:off x="475488" y="6419088"/>
-            <a:ext cx="11237976" cy="10972"/>
-          </a:xfrm>
-          <a:prstGeom prst="roundRect">
-            <a:avLst>
-              <a:gd name="adj" fmla="val 50000"/>
-            </a:avLst>
+            <a:off x="760000" y="1900000"/>
+            <a:ext cx="150000" cy="1600000"/>
+          </a:xfrm>
+          <a:prstGeom prst="rect">
+            <a:avLst/>
           </a:prstGeom>
           <a:solidFill>
-            <a:srgbClr val="E4F1EE"/>
+            <a:srgbClr val="F5670F"/>
           </a:solidFill>
           <a:ln>
             <a:noFill/>
@@ -4622,14 +4545,14 @@
       </p:sp>
       <p:sp>
         <p:nvSpPr>
-          <p:cNvPr id="9" name="TextBox 8"/>
+          <p:cNvPr id="7" name="TextBox 6"/>
           <p:cNvSpPr txBox="1"/>
           <p:nvPr/>
         </p:nvSpPr>
         <p:spPr>
           <a:xfrm>
-            <a:off x="475488" y="6455664"/>
-            <a:ext cx="7315200" cy="292608"/>
+            <a:off x="1020000" y="2050000"/>
+            <a:ext cx="10500000" cy="1400000"/>
           </a:xfrm>
           <a:prstGeom prst="rect">
             <a:avLst/>
@@ -4637,37 +4560,60 @@
           <a:noFill/>
         </p:spPr>
         <p:txBody>
-          <a:bodyPr wrap="square" anchor="t" lIns="0" rIns="0" tIns="0" bIns="0">
+          <a:bodyPr wrap="square" anchor="t">
             <a:spAutoFit/>
           </a:bodyPr>
           <a:lstStyle/>
           <a:p>
             <a:pPr algn="l">
               <a:lnSpc>
-                <a:spcPct val="114000"/>
+                <a:spcPct val="110000"/>
               </a:lnSpc>
+              <a:spcAft>
+                <a:spcPts val="600"/>
+              </a:spcAft>
             </a:pPr>
             <a:r>
-              <a:rPr sz="900" b="0">
+              <a:rPr sz="1700" b="1">
                 <a:solidFill>
-                  <a:srgbClr val="5C6E6A"/>
+                  <a:srgbClr val="010328"/>
                 </a:solidFill>
+                <a:latin typeface="微软雅黑"/>
               </a:rPr>
-              <a:t>两江智造集团 · Python程序设计（项目实战）</a:t>
-            </a:r>
-          </a:p>
-        </p:txBody>
-      </p:sp>
-      <p:sp>
-        <p:nvSpPr>
-          <p:cNvPr id="10" name="TextBox 9"/>
+              <a:t>主题: 七步管道构建与质量自测——应用：见工单start</a:t>
+            </a:r>
+          </a:p>
+          <a:p>
+            <a:pPr algn="l">
+              <a:lnSpc>
+                <a:spcPct val="110000"/>
+              </a:lnSpc>
+              <a:spcAft>
+                <a:spcPts val="600"/>
+              </a:spcAft>
+            </a:pPr>
+            <a:r>
+              <a:rPr sz="1300" b="0">
+                <a:solidFill>
+                  <a:srgbClr val="44546A"/>
+                </a:solidFill>
+                <a:latin typeface="微软雅黑"/>
+              </a:rPr>
+              <a:t>预习快问: dropna/fillna/interpolate各适用什么场景？</a:t>
+            </a:r>
+          </a:p>
+        </p:txBody>
+      </p:sp>
+      <p:sp>
+        <p:nvSpPr>
+          <p:cNvPr id="8" name="TextBox 7"/>
           <p:cNvSpPr txBox="1"/>
           <p:nvPr/>
         </p:nvSpPr>
         <p:spPr>
           <a:xfrm>
-            <a:off x="10597896" y="6537960"/>
-            <a:ext cx="996696" cy="301752"/>
+            <a:off x="760000" y="3900000"/>
+            <a:ext cx="10900000" cy="900000"/>
           </a:xfrm>
           <a:prstGeom prst="rect">
             <a:avLst/>
@@ -4675,37 +4621,78 @@
           <a:noFill/>
         </p:spPr>
         <p:txBody>
-          <a:bodyPr wrap="square" anchor="t" lIns="0" rIns="0" tIns="0" bIns="0">
+          <a:bodyPr wrap="square" anchor="t">
             <a:spAutoFit/>
           </a:bodyPr>
           <a:lstStyle/>
           <a:p>
-            <a:pPr algn="r">
+            <a:pPr algn="l">
               <a:lnSpc>
-                <a:spcPct val="114000"/>
+                <a:spcPct val="110000"/>
               </a:lnSpc>
+              <a:spcAft>
+                <a:spcPts val="600"/>
+              </a:spcAft>
             </a:pPr>
             <a:r>
-              <a:rPr sz="1000" b="0">
+              <a:rPr sz="1400" b="1">
                 <a:solidFill>
-                  <a:srgbClr val="8A97B5"/>
+                  <a:srgbClr val="0545E8"/>
                 </a:solidFill>
+                <a:latin typeface="微软雅黑"/>
               </a:rPr>
-              <a:t>6 / 10</a:t>
-            </a:r>
-          </a:p>
-        </p:txBody>
-      </p:sp>
-      <p:sp>
-        <p:nvSpPr>
-          <p:cNvPr id="11" name="TextBox 10"/>
+              <a:t>课前完成：导学单 + 预习自测 + starter环境自检</a:t>
+            </a:r>
+          </a:p>
+          <a:p>
+            <a:pPr algn="l">
+              <a:lnSpc>
+                <a:spcPct val="110000"/>
+              </a:lnSpc>
+              <a:spcAft>
+                <a:spcPts val="600"/>
+              </a:spcAft>
+            </a:pPr>
+            <a:r>
+              <a:rPr sz="1250" b="0">
+                <a:solidFill>
+                  <a:srgbClr val="44546A"/>
+                </a:solidFill>
+                <a:latin typeface="微软雅黑"/>
+              </a:rPr>
+              <a:t>带着问题来上课——Predict先于Run</a:t>
+            </a:r>
+          </a:p>
+        </p:txBody>
+      </p:sp>
+    </p:spTree>
+  </p:cSld>
+  <p:clrMapOvr>
+    <a:masterClrMapping/>
+  </p:clrMapOvr>
+</p:sld>
+</file>
+
+<file path=ppt/slides/slide11.xml><?xml version="1.0" encoding="utf-8"?>
+<p:sld xmlns:a="http://schemas.openxmlformats.org/drawingml/2006/main" xmlns:p="http://schemas.openxmlformats.org/presentationml/2006/main" xmlns:r="http://schemas.openxmlformats.org/officeDocument/2006/relationships">
+  <p:cSld>
+    <p:spTree>
+      <p:nvGrpSpPr>
+        <p:cNvPr id="1" name=""/>
+        <p:cNvGrpSpPr/>
+        <p:nvPr/>
+      </p:nvGrpSpPr>
+      <p:grpSpPr/>
+      <p:sp>
+        <p:nvSpPr>
+          <p:cNvPr id="2" name="TextBox 1"/>
           <p:cNvSpPr txBox="1"/>
           <p:nvPr/>
         </p:nvSpPr>
         <p:spPr>
           <a:xfrm>
-            <a:off x="475488" y="1517904"/>
-            <a:ext cx="11237976" cy="237744"/>
+            <a:off x="548640" y="320040"/>
+            <a:ext cx="11094720" cy="914400"/>
           </a:xfrm>
           <a:prstGeom prst="rect">
             <a:avLst/>
@@ -4713,61 +4700,28 @@
           <a:noFill/>
         </p:spPr>
         <p:txBody>
-          <a:bodyPr wrap="square" anchor="t" lIns="0" rIns="0" tIns="0" bIns="0">
+          <a:bodyPr wrap="none">
             <a:spAutoFit/>
           </a:bodyPr>
           <a:lstStyle/>
           <a:p>
-            <a:pPr algn="l">
-              <a:lnSpc>
-                <a:spcPct val="114000"/>
-              </a:lnSpc>
-            </a:pPr>
-            <a:r>
-              <a:rPr sz="1000" b="0">
-                <a:solidFill>
-                  <a:srgbClr val="5C6E6A"/>
-                </a:solidFill>
-              </a:rPr>
-              <a:t>上：p12_proj_template 分层达标逐字输出（见上一页）｜下：pytest 全量实跑（退出码 0，全绿）</a:t>
-            </a:r>
-          </a:p>
-        </p:txBody>
-      </p:sp>
-      <p:pic>
-        <p:nvPicPr>
-          <p:cNvPr id="12" name="Picture 11" descr="p12_proj_template_classroom.png"/>
-          <p:cNvPicPr>
-            <a:picLocks noChangeAspect="1"/>
-          </p:cNvPicPr>
-          <p:nvPr/>
-        </p:nvPicPr>
-        <p:blipFill>
-          <a:blip r:embed="rId2"/>
-          <a:stretch>
-            <a:fillRect/>
-          </a:stretch>
-        </p:blipFill>
-        <p:spPr>
-          <a:xfrm>
-            <a:off x="2197198" y="1792224"/>
-            <a:ext cx="7794555" cy="2314983"/>
-          </a:xfrm>
-          <a:prstGeom prst="rect">
-            <a:avLst/>
-          </a:prstGeom>
-        </p:spPr>
-      </p:pic>
-      <p:sp>
-        <p:nvSpPr>
-          <p:cNvPr id="13" name="TextBox 12"/>
+            <a:r>
+              <a:rPr sz="3000" b="1"/>
+              <a:t>安全与合规警示（操作前必读）</a:t>
+            </a:r>
+          </a:p>
+        </p:txBody>
+      </p:sp>
+      <p:sp>
+        <p:nvSpPr>
+          <p:cNvPr id="3" name="TextBox 2"/>
           <p:cNvSpPr txBox="1"/>
           <p:nvPr/>
         </p:nvSpPr>
         <p:spPr>
           <a:xfrm>
-            <a:off x="475488" y="4143782"/>
-            <a:ext cx="11237976" cy="256032"/>
+            <a:off x="731520" y="1371600"/>
+            <a:ext cx="10728960" cy="4663440"/>
           </a:xfrm>
           <a:prstGeom prst="rect">
             <a:avLst/>
@@ -4775,61 +4729,101 @@
           <a:noFill/>
         </p:spPr>
         <p:txBody>
-          <a:bodyPr wrap="square" anchor="t" lIns="0" rIns="0" tIns="0" bIns="0">
+          <a:bodyPr wrap="square">
             <a:spAutoFit/>
           </a:bodyPr>
           <a:lstStyle/>
           <a:p>
-            <a:pPr algn="l">
-              <a:lnSpc>
-                <a:spcPct val="114000"/>
-              </a:lnSpc>
+            <a:pPr>
+              <a:spcAft>
+                <a:spcPts val="1000"/>
+              </a:spcAft>
             </a:pPr>
             <a:r>
-              <a:rPr sz="850" b="0">
-                <a:solidFill>
-                  <a:srgbClr val="5C6E6A"/>
-                </a:solidFill>
-              </a:rPr>
-              <a:t>▲ 分层达标（第 49 行起）：四档逐字原文，未改写</a:t>
-            </a:r>
-          </a:p>
-        </p:txBody>
-      </p:sp>
-      <p:pic>
-        <p:nvPicPr>
-          <p:cNvPr id="14" name="Picture 13" descr="p12_proj_template_pytest.png"/>
-          <p:cNvPicPr>
-            <a:picLocks noChangeAspect="1"/>
-          </p:cNvPicPr>
-          <p:nvPr/>
-        </p:nvPicPr>
-        <p:blipFill>
-          <a:blip r:embed="rId3"/>
-          <a:stretch>
-            <a:fillRect/>
-          </a:stretch>
-        </p:blipFill>
-        <p:spPr>
-          <a:xfrm>
-            <a:off x="2197198" y="4418102"/>
-            <a:ext cx="7794555" cy="1223745"/>
-          </a:xfrm>
-          <a:prstGeom prst="rect">
-            <a:avLst/>
-          </a:prstGeom>
-        </p:spPr>
-      </p:pic>
-      <p:sp>
-        <p:nvSpPr>
-          <p:cNvPr id="15" name="TextBox 14"/>
+              <a:rPr sz="1800"/>
+              <a:t>1. 上机前确认本工位电源开关与急停位置，确认设备处于安全状态。</a:t>
+            </a:r>
+          </a:p>
+          <a:p>
+            <a:pPr>
+              <a:spcAft>
+                <a:spcPts val="1000"/>
+              </a:spcAft>
+            </a:pPr>
+            <a:r>
+              <a:rPr sz="1800"/>
+              <a:t>2. 涉及接线的操作一律先断电、后验电、再作业，禁止带电插拔。</a:t>
+            </a:r>
+          </a:p>
+          <a:p>
+            <a:pPr>
+              <a:spcAft>
+                <a:spcPts val="1000"/>
+              </a:spcAft>
+            </a:pPr>
+            <a:r>
+              <a:rPr sz="1800"/>
+              <a:t>3. 身体任何部位不进入设备运动/散热区域，长发束起，不佩戴悬垂饰物。</a:t>
+            </a:r>
+          </a:p>
+          <a:p>
+            <a:pPr>
+              <a:spcAft>
+                <a:spcPts val="1000"/>
+              </a:spcAft>
+            </a:pPr>
+            <a:r>
+              <a:rPr sz="1800"/>
+              <a:t>4. 调试程序前先静态检查、再低速小样本试运行，确认无异常后放大规模。</a:t>
+            </a:r>
+          </a:p>
+          <a:p>
+            <a:pPr>
+              <a:spcAft>
+                <a:spcPts val="1000"/>
+              </a:spcAft>
+            </a:pPr>
+            <a:r>
+              <a:rPr sz="1800"/>
+              <a:t>5. 任何不确定或异常情况，立即停止操作并报告指导教师，不擅自处置。</a:t>
+            </a:r>
+          </a:p>
+          <a:p>
+            <a:r>
+              <a:rPr sz="1400" b="1"/>
+              <a:t>以上任一条违反，本次任务按课程标准「安全规范一票否决」条款记 0 分并中止实训。</a:t>
+            </a:r>
+          </a:p>
+        </p:txBody>
+      </p:sp>
+    </p:spTree>
+  </p:cSld>
+  <p:clrMapOvr>
+    <a:masterClrMapping/>
+  </p:clrMapOvr>
+</p:sld>
+</file>
+
+<file path=ppt/slides/slide12.xml><?xml version="1.0" encoding="utf-8"?>
+<p:sld xmlns:a="http://schemas.openxmlformats.org/drawingml/2006/main" xmlns:p="http://schemas.openxmlformats.org/presentationml/2006/main" xmlns:r="http://schemas.openxmlformats.org/officeDocument/2006/relationships">
+  <p:cSld>
+    <p:spTree>
+      <p:nvGrpSpPr>
+        <p:cNvPr id="1" name=""/>
+        <p:cNvGrpSpPr/>
+        <p:nvPr/>
+      </p:nvGrpSpPr>
+      <p:grpSpPr/>
+      <p:sp>
+        <p:nvSpPr>
+          <p:cNvPr id="2" name="TextBox 1"/>
           <p:cNvSpPr txBox="1"/>
           <p:nvPr/>
         </p:nvSpPr>
         <p:spPr>
           <a:xfrm>
-            <a:off x="475488" y="5678424"/>
-            <a:ext cx="11237976" cy="256032"/>
+            <a:off x="548640" y="320040"/>
+            <a:ext cx="11094720" cy="914400"/>
           </a:xfrm>
           <a:prstGeom prst="rect">
             <a:avLst/>
@@ -4837,23 +4831,195 @@
           <a:noFill/>
         </p:spPr>
         <p:txBody>
-          <a:bodyPr wrap="square" anchor="t" lIns="0" rIns="0" tIns="0" bIns="0">
+          <a:bodyPr wrap="none">
             <a:spAutoFit/>
           </a:bodyPr>
           <a:lstStyle/>
           <a:p>
-            <a:pPr algn="l">
-              <a:lnSpc>
-                <a:spcPct val="114000"/>
-              </a:lnSpc>
+            <a:r>
+              <a:rPr sz="3000" b="1"/>
+              <a:t>本任务六步法导航</a:t>
+            </a:r>
+          </a:p>
+        </p:txBody>
+      </p:sp>
+      <p:sp>
+        <p:nvSpPr>
+          <p:cNvPr id="3" name="TextBox 2"/>
+          <p:cNvSpPr txBox="1"/>
+          <p:nvPr/>
+        </p:nvSpPr>
+        <p:spPr>
+          <a:xfrm>
+            <a:off x="731520" y="1371600"/>
+            <a:ext cx="10728960" cy="4663440"/>
+          </a:xfrm>
+          <a:prstGeom prst="rect">
+            <a:avLst/>
+          </a:prstGeom>
+          <a:noFill/>
+        </p:spPr>
+        <p:txBody>
+          <a:bodyPr wrap="square">
+            <a:spAutoFit/>
+          </a:bodyPr>
+          <a:lstStyle/>
+          <a:p>
+            <a:pPr>
+              <a:spcAft>
+                <a:spcPts val="1000"/>
+              </a:spcAft>
             </a:pPr>
             <a:r>
-              <a:rPr sz="850" b="0">
-                <a:solidFill>
-                  <a:srgbClr val="5C6E6A"/>
-                </a:solidFill>
-              </a:rPr>
-              <a:t>▲ pytest：81 passed in 1.30s（本机实跑，非示例）</a:t>
+              <a:rPr sz="1800"/>
+              <a:t>六步法：资讯 → 计划 → 决策 → 实施 → 检查 → 评估</a:t>
+            </a:r>
+          </a:p>
+          <a:p>
+            <a:pPr>
+              <a:spcAft>
+                <a:spcPts val="1000"/>
+              </a:spcAft>
+            </a:pPr>
+            <a:r>
+              <a:rPr sz="1800"/>
+              <a:t>本讲对应工单：《Python程序设计-项目实战》分层任务工单</a:t>
+            </a:r>
+          </a:p>
+          <a:p>
+            <a:pPr>
+              <a:spcAft>
+                <a:spcPts val="1000"/>
+              </a:spcAft>
+            </a:pPr>
+            <a:r>
+              <a:rPr sz="1800"/>
+              <a:t>课堂产出：工单第六节实施记录须当堂填写，含操作前安全打勾与学生本人签字。</a:t>
+            </a:r>
+          </a:p>
+          <a:p>
+            <a:pPr>
+              <a:spcAft>
+                <a:spcPts val="1000"/>
+              </a:spcAft>
+            </a:pPr>
+            <a:r>
+              <a:rPr sz="1800"/>
+              <a:t>课后交付：班组长／操作员／教师三方联签后交回，缺签视为未交付。</a:t>
+            </a:r>
+          </a:p>
+        </p:txBody>
+      </p:sp>
+    </p:spTree>
+  </p:cSld>
+  <p:clrMapOvr>
+    <a:masterClrMapping/>
+  </p:clrMapOvr>
+</p:sld>
+</file>
+
+<file path=ppt/slides/slide13.xml><?xml version="1.0" encoding="utf-8"?>
+<p:sld xmlns:a="http://schemas.openxmlformats.org/drawingml/2006/main" xmlns:p="http://schemas.openxmlformats.org/presentationml/2006/main" xmlns:r="http://schemas.openxmlformats.org/officeDocument/2006/relationships">
+  <p:cSld>
+    <p:spTree>
+      <p:nvGrpSpPr>
+        <p:cNvPr id="1" name=""/>
+        <p:cNvGrpSpPr/>
+        <p:nvPr/>
+      </p:nvGrpSpPr>
+      <p:grpSpPr/>
+      <p:sp>
+        <p:nvSpPr>
+          <p:cNvPr id="2" name="TextBox 1"/>
+          <p:cNvSpPr txBox="1"/>
+          <p:nvPr/>
+        </p:nvSpPr>
+        <p:spPr>
+          <a:xfrm>
+            <a:off x="548640" y="320040"/>
+            <a:ext cx="11094720" cy="914400"/>
+          </a:xfrm>
+          <a:prstGeom prst="rect">
+            <a:avLst/>
+          </a:prstGeom>
+          <a:noFill/>
+        </p:spPr>
+        <p:txBody>
+          <a:bodyPr wrap="none">
+            <a:spAutoFit/>
+          </a:bodyPr>
+          <a:lstStyle/>
+          <a:p>
+            <a:r>
+              <a:rPr sz="3000" b="1"/>
+              <a:t>本讲与岗位任务单的衔接</a:t>
+            </a:r>
+          </a:p>
+        </p:txBody>
+      </p:sp>
+      <p:sp>
+        <p:nvSpPr>
+          <p:cNvPr id="3" name="TextBox 2"/>
+          <p:cNvSpPr txBox="1"/>
+          <p:nvPr/>
+        </p:nvSpPr>
+        <p:spPr>
+          <a:xfrm>
+            <a:off x="731520" y="1371600"/>
+            <a:ext cx="10728960" cy="4663440"/>
+          </a:xfrm>
+          <a:prstGeom prst="rect">
+            <a:avLst/>
+          </a:prstGeom>
+          <a:noFill/>
+        </p:spPr>
+        <p:txBody>
+          <a:bodyPr wrap="square">
+            <a:spAutoFit/>
+          </a:bodyPr>
+          <a:lstStyle/>
+          <a:p>
+            <a:pPr>
+              <a:spcAft>
+                <a:spcPts val="1000"/>
+              </a:spcAft>
+            </a:pPr>
+            <a:r>
+              <a:rPr sz="1800"/>
+              <a:t>本讲在工作过程系统化课程中承担的任务环节：任务实施</a:t>
+            </a:r>
+          </a:p>
+          <a:p>
+            <a:pPr>
+              <a:spcAft>
+                <a:spcPts val="1000"/>
+              </a:spcAft>
+            </a:pPr>
+            <a:r>
+              <a:rPr sz="1800"/>
+              <a:t>考核对齐：过程性成绩取自本讲工单第六节各模块得分合计（满分 100）。</a:t>
+            </a:r>
+          </a:p>
+          <a:p>
+            <a:pPr>
+              <a:spcAft>
+                <a:spcPts val="1000"/>
+              </a:spcAft>
+            </a:pPr>
+            <a:r>
+              <a:rPr sz="1800"/>
+              <a:t>达标线：综合成绩≥60 分，且无安全红线一票否决记录</a:t>
+            </a:r>
+          </a:p>
+          <a:p>
+            <a:pPr>
+              <a:spcAft>
+                <a:spcPts val="1000"/>
+              </a:spcAft>
+            </a:pPr>
+            <a:r>
+              <a:rPr sz="1800"/>
+              <a:t>无效工单判定：未打安全勾、无本人签字、无三方联签。</a:t>
             </a:r>
           </a:p>
         </p:txBody>
@@ -6144,20 +6310,22 @@
       <p:grpSpPr/>
       <p:sp>
         <p:nvSpPr>
-          <p:cNvPr id="2" name="Rectangle 1"/>
+          <p:cNvPr id="2" name="Rounded Rectangle 1"/>
           <p:cNvSpPr/>
           <p:nvPr/>
         </p:nvSpPr>
         <p:spPr>
           <a:xfrm>
             <a:off x="0" y="0"/>
-            <a:ext cx="12192000" cy="1150000"/>
-          </a:xfrm>
-          <a:prstGeom prst="rect">
-            <a:avLst/>
+            <a:ext cx="12191695" cy="64008"/>
+          </a:xfrm>
+          <a:prstGeom prst="roundRect">
+            <a:avLst>
+              <a:gd name="adj" fmla="val 50000"/>
+            </a:avLst>
           </a:prstGeom>
           <a:solidFill>
-            <a:srgbClr val="010328"/>
+            <a:srgbClr val="0B5E54"/>
           </a:solidFill>
           <a:ln>
             <a:noFill/>
@@ -6188,20 +6356,60 @@
       </p:sp>
       <p:sp>
         <p:nvSpPr>
-          <p:cNvPr id="3" name="Rectangle 2"/>
+          <p:cNvPr id="3" name="TextBox 2"/>
+          <p:cNvSpPr txBox="1"/>
+          <p:nvPr/>
+        </p:nvSpPr>
+        <p:spPr>
+          <a:xfrm>
+            <a:off x="475488" y="146304"/>
+            <a:ext cx="8229600" cy="292608"/>
+          </a:xfrm>
+          <a:prstGeom prst="rect">
+            <a:avLst/>
+          </a:prstGeom>
+          <a:noFill/>
+        </p:spPr>
+        <p:txBody>
+          <a:bodyPr wrap="square" anchor="t" lIns="0" rIns="0" tIns="0" bIns="0">
+            <a:spAutoFit/>
+          </a:bodyPr>
+          <a:lstStyle/>
+          <a:p>
+            <a:pPr algn="l">
+              <a:lnSpc>
+                <a:spcPct val="114000"/>
+              </a:lnSpc>
+            </a:pPr>
+            <a:r>
+              <a:rPr sz="1100" b="1">
+                <a:solidFill>
+                  <a:srgbClr val="0B5E54"/>
+                </a:solidFill>
+              </a:rPr>
+              <a:t>工单实战 · 本次实跑结果</a:t>
+            </a:r>
+          </a:p>
+        </p:txBody>
+      </p:sp>
+      <p:sp>
+        <p:nvSpPr>
+          <p:cNvPr id="4" name="Rounded Rectangle 3"/>
           <p:cNvSpPr/>
           <p:nvPr/>
         </p:nvSpPr>
         <p:spPr>
           <a:xfrm>
-            <a:off x="0" y="1150000"/>
-            <a:ext cx="2600000" cy="70000"/>
-          </a:xfrm>
-          <a:prstGeom prst="rect">
-            <a:avLst/>
+            <a:off x="475488" y="475488"/>
+            <a:ext cx="1881187" cy="310896"/>
+          </a:xfrm>
+          <a:prstGeom prst="roundRect">
+            <a:avLst>
+              <a:gd name="adj" fmla="val 50000"/>
+            </a:avLst>
           </a:prstGeom>
           <a:solidFill>
-            <a:srgbClr val="F5670F"/>
+            <a:srgbClr val="C9A227"/>
           </a:solidFill>
           <a:ln>
             <a:noFill/>
@@ -6232,14 +6440,14 @@
       </p:sp>
       <p:sp>
         <p:nvSpPr>
-          <p:cNvPr id="4" name="TextBox 3"/>
+          <p:cNvPr id="5" name="TextBox 4"/>
           <p:cNvSpPr txBox="1"/>
           <p:nvPr/>
         </p:nvSpPr>
         <p:spPr>
           <a:xfrm>
-            <a:off x="700000" y="300000"/>
-            <a:ext cx="10792000" cy="700000"/>
+            <a:off x="475488" y="475488"/>
+            <a:ext cx="1881187" cy="310896"/>
           </a:xfrm>
           <a:prstGeom prst="rect">
             <a:avLst/>
@@ -6247,47 +6455,83 @@
           <a:noFill/>
         </p:spPr>
         <p:txBody>
-          <a:bodyPr wrap="square" anchor="t">
+          <a:bodyPr wrap="square" anchor="ctr" lIns="0" rIns="0" tIns="0" bIns="0">
             <a:spAutoFit/>
           </a:bodyPr>
           <a:lstStyle/>
           <a:p>
-            <a:pPr algn="l">
+            <a:pPr algn="ctr">
               <a:lnSpc>
-                <a:spcPct val="110000"/>
+                <a:spcPct val="114000"/>
               </a:lnSpc>
-              <a:spcAft>
-                <a:spcPts val="600"/>
-              </a:spcAft>
             </a:pPr>
             <a:r>
-              <a:rPr sz="2400" b="1">
+              <a:rPr sz="1050" b="1">
                 <a:solidFill>
                   <a:srgbClr val="FFFFFF"/>
                 </a:solidFill>
-                <a:latin typeface="微软雅黑"/>
               </a:rPr>
-              <a:t>总结评价与课后任务</a:t>
-            </a:r>
-          </a:p>
-        </p:txBody>
-      </p:sp>
-      <p:sp>
-        <p:nvSpPr>
-          <p:cNvPr id="5" name="Rectangle 4"/>
+              <a:t>REAL RUN · 四档逐字实测</a:t>
+            </a:r>
+          </a:p>
+        </p:txBody>
+      </p:sp>
+      <p:sp>
+        <p:nvSpPr>
+          <p:cNvPr id="6" name="TextBox 5"/>
+          <p:cNvSpPr txBox="1"/>
+          <p:nvPr/>
+        </p:nvSpPr>
+        <p:spPr>
+          <a:xfrm>
+            <a:off x="475488" y="859536"/>
+            <a:ext cx="11237976" cy="502920"/>
+          </a:xfrm>
+          <a:prstGeom prst="rect">
+            <a:avLst/>
+          </a:prstGeom>
+          <a:noFill/>
+        </p:spPr>
+        <p:txBody>
+          <a:bodyPr wrap="square" anchor="t" lIns="0" rIns="0" tIns="0" bIns="0">
+            <a:spAutoFit/>
+          </a:bodyPr>
+          <a:lstStyle/>
+          <a:p>
+            <a:pPr algn="l">
+              <a:lnSpc>
+                <a:spcPct val="114000"/>
+              </a:lnSpc>
+            </a:pPr>
+            <a:r>
+              <a:rPr sz="2200" b="1">
+                <a:solidFill>
+                  <a:srgbClr val="1B2B28"/>
+                </a:solidFill>
+              </a:rPr>
+              <a:t>P1.2 p12_proj_template：本次 D/C/B/A 四档实测</a:t>
+            </a:r>
+          </a:p>
+        </p:txBody>
+      </p:sp>
+      <p:sp>
+        <p:nvSpPr>
+          <p:cNvPr id="7" name="Rounded Rectangle 6"/>
           <p:cNvSpPr/>
           <p:nvPr/>
         </p:nvSpPr>
         <p:spPr>
           <a:xfrm>
-            <a:off x="800000" y="1950000"/>
-            <a:ext cx="10600000" cy="1500000"/>
-          </a:xfrm>
-          <a:prstGeom prst="rect">
-            <a:avLst/>
+            <a:off x="475488" y="1389888"/>
+            <a:ext cx="1234440" cy="27432"/>
+          </a:xfrm>
+          <a:prstGeom prst="roundRect">
+            <a:avLst>
+              <a:gd name="adj" fmla="val 50000"/>
+            </a:avLst>
           </a:prstGeom>
           <a:solidFill>
-            <a:srgbClr val="F3F6FD"/>
+            <a:srgbClr val="C9A227"/>
           </a:solidFill>
           <a:ln>
             <a:noFill/>
@@ -6318,285 +6562,22 @@
       </p:sp>
       <p:sp>
         <p:nvSpPr>
-          <p:cNvPr id="6" name="TextBox 5"/>
-          <p:cNvSpPr txBox="1"/>
-          <p:nvPr/>
-        </p:nvSpPr>
-        <p:spPr>
-          <a:xfrm>
-            <a:off x="1000000" y="2050000"/>
-            <a:ext cx="10300000" cy="1400000"/>
-          </a:xfrm>
-          <a:prstGeom prst="rect">
-            <a:avLst/>
-          </a:prstGeom>
-          <a:noFill/>
-        </p:spPr>
-        <p:txBody>
-          <a:bodyPr wrap="square" anchor="t">
-            <a:spAutoFit/>
-          </a:bodyPr>
-          <a:lstStyle/>
-          <a:p>
-            <a:pPr algn="l">
-              <a:lnSpc>
-                <a:spcPct val="110000"/>
-              </a:lnSpc>
-              <a:spcAft>
-                <a:spcPts val="600"/>
-              </a:spcAft>
-            </a:pPr>
-            <a:r>
-              <a:rPr sz="1500" b="1">
-                <a:solidFill>
-                  <a:srgbClr val="0545E8"/>
-                </a:solidFill>
-                <a:latin typeface="微软雅黑"/>
-              </a:rPr>
-              <a:t>评价（10分钟）：</a:t>
-            </a:r>
-          </a:p>
-          <a:p>
-            <a:pPr algn="l">
-              <a:lnSpc>
-                <a:spcPct val="110000"/>
-              </a:lnSpc>
-              <a:spcAft>
-                <a:spcPts val="600"/>
-              </a:spcAft>
-            </a:pPr>
-            <a:r>
-              <a:rPr sz="1400" b="0">
-                <a:solidFill>
-                  <a:srgbClr val="010328"/>
-                </a:solidFill>
-                <a:latin typeface="微软雅黑"/>
-              </a:rPr>
-              <a:t>按D/C/B/A量表当堂评分；工单24小时内反馈评语与改进建议。</a:t>
-            </a:r>
-          </a:p>
-        </p:txBody>
-      </p:sp>
-      <p:sp>
-        <p:nvSpPr>
-          <p:cNvPr id="7" name="TextBox 6"/>
-          <p:cNvSpPr txBox="1"/>
-          <p:nvPr/>
-        </p:nvSpPr>
-        <p:spPr>
-          <a:xfrm>
-            <a:off x="850000" y="3700000"/>
-            <a:ext cx="10600000" cy="700000"/>
-          </a:xfrm>
-          <a:prstGeom prst="rect">
-            <a:avLst/>
-          </a:prstGeom>
-          <a:noFill/>
-        </p:spPr>
-        <p:txBody>
-          <a:bodyPr wrap="square" anchor="t">
-            <a:spAutoFit/>
-          </a:bodyPr>
-          <a:lstStyle/>
-          <a:p>
-            <a:pPr algn="l">
-              <a:lnSpc>
-                <a:spcPct val="120000"/>
-              </a:lnSpc>
-              <a:spcAft>
-                <a:spcPts val="600"/>
-              </a:spcAft>
-            </a:pPr>
-            <a:r>
-              <a:rPr sz="1400" b="1">
-                <a:solidFill>
-                  <a:srgbClr val="F5670F"/>
-                </a:solidFill>
-                <a:latin typeface="微软雅黑"/>
-              </a:rPr>
-              <a:t>1. </a:t>
-            </a:r>
-            <a:r>
-              <a:rPr sz="1400" b="0">
-                <a:solidFill>
-                  <a:srgbClr val="010328"/>
-                </a:solidFill>
-                <a:latin typeface="微软雅黑"/>
-              </a:rPr>
-              <a:t>1. 完成工单P1.2《标准Python工程模板》：及格标准环境可用+仓库初始化+结构完整；优秀标准依赖可还原+CI配置+检查工具集成；</a:t>
-            </a:r>
-          </a:p>
-        </p:txBody>
-      </p:sp>
-      <p:sp>
-        <p:nvSpPr>
-          <p:cNvPr id="8" name="TextBox 7"/>
-          <p:cNvSpPr txBox="1"/>
-          <p:nvPr/>
-        </p:nvSpPr>
-        <p:spPr>
-          <a:xfrm>
-            <a:off x="850000" y="4420000"/>
-            <a:ext cx="10600000" cy="700000"/>
-          </a:xfrm>
-          <a:prstGeom prst="rect">
-            <a:avLst/>
-          </a:prstGeom>
-          <a:noFill/>
-        </p:spPr>
-        <p:txBody>
-          <a:bodyPr wrap="square" anchor="t">
-            <a:spAutoFit/>
-          </a:bodyPr>
-          <a:lstStyle/>
-          <a:p>
-            <a:pPr algn="l">
-              <a:lnSpc>
-                <a:spcPct val="120000"/>
-              </a:lnSpc>
-              <a:spcAft>
-                <a:spcPts val="600"/>
-              </a:spcAft>
-            </a:pPr>
-            <a:r>
-              <a:rPr sz="1400" b="1">
-                <a:solidFill>
-                  <a:srgbClr val="F5670F"/>
-                </a:solidFill>
-                <a:latin typeface="微软雅黑"/>
-              </a:rPr>
-              <a:t>2. </a:t>
-            </a:r>
-            <a:r>
-              <a:rPr sz="1400" b="0">
-                <a:solidFill>
-                  <a:srgbClr val="010328"/>
-                </a:solidFill>
-                <a:latin typeface="微软雅黑"/>
-              </a:rPr>
-              <a:t>2. 用模板重构P1.1练习代码并提交规范commit；</a:t>
-            </a:r>
-          </a:p>
-        </p:txBody>
-      </p:sp>
-      <p:sp>
-        <p:nvSpPr>
-          <p:cNvPr id="9" name="TextBox 8"/>
-          <p:cNvSpPr txBox="1"/>
-          <p:nvPr/>
-        </p:nvSpPr>
-        <p:spPr>
-          <a:xfrm>
-            <a:off x="850000" y="5140000"/>
-            <a:ext cx="10600000" cy="700000"/>
-          </a:xfrm>
-          <a:prstGeom prst="rect">
-            <a:avLst/>
-          </a:prstGeom>
-          <a:noFill/>
-        </p:spPr>
-        <p:txBody>
-          <a:bodyPr wrap="square" anchor="t">
-            <a:spAutoFit/>
-          </a:bodyPr>
-          <a:lstStyle/>
-          <a:p>
-            <a:pPr algn="l">
-              <a:lnSpc>
-                <a:spcPct val="120000"/>
-              </a:lnSpc>
-              <a:spcAft>
-                <a:spcPts val="600"/>
-              </a:spcAft>
-            </a:pPr>
-            <a:r>
-              <a:rPr sz="1400" b="1">
-                <a:solidFill>
-                  <a:srgbClr val="F5670F"/>
-                </a:solidFill>
-                <a:latin typeface="微软雅黑"/>
-              </a:rPr>
-              <a:t>3. </a:t>
-            </a:r>
-            <a:r>
-              <a:rPr sz="1400" b="0">
-                <a:solidFill>
-                  <a:srgbClr val="010328"/>
-                </a:solidFill>
-                <a:latin typeface="微软雅黑"/>
-              </a:rPr>
-              <a:t>3. 预习Pandas的Series与DataFrame概念。</a:t>
-            </a:r>
-          </a:p>
-        </p:txBody>
-      </p:sp>
-      <p:sp>
-        <p:nvSpPr>
-          <p:cNvPr id="10" name="TextBox 9"/>
-          <p:cNvSpPr txBox="1"/>
-          <p:nvPr/>
-        </p:nvSpPr>
-        <p:spPr>
-          <a:xfrm>
-            <a:off x="850000" y="5960000"/>
-            <a:ext cx="10600000" cy="500000"/>
-          </a:xfrm>
-          <a:prstGeom prst="rect">
-            <a:avLst/>
-          </a:prstGeom>
-          <a:noFill/>
-        </p:spPr>
-        <p:txBody>
-          <a:bodyPr wrap="square" anchor="t">
-            <a:spAutoFit/>
-          </a:bodyPr>
-          <a:lstStyle/>
-          <a:p>
-            <a:pPr algn="l">
-              <a:lnSpc>
-                <a:spcPct val="110000"/>
-              </a:lnSpc>
-              <a:spcAft>
-                <a:spcPts val="600"/>
-              </a:spcAft>
-            </a:pPr>
-            <a:r>
-              <a:rPr sz="1300" b="1">
-                <a:solidFill>
-                  <a:srgbClr val="0475B6"/>
-                </a:solidFill>
-                <a:latin typeface="微软雅黑"/>
-              </a:rPr>
-              <a:t>下次课预告：</a:t>
-            </a:r>
-            <a:r>
-              <a:rPr sz="1300" b="0">
-                <a:solidFill>
-                  <a:srgbClr val="44546A"/>
-                </a:solidFill>
-                <a:latin typeface="微软雅黑"/>
-              </a:rPr>
-              <a:t>见下次课工单任务书</a:t>
-            </a:r>
-          </a:p>
-        </p:txBody>
-      </p:sp>
-      <p:sp>
-        <p:nvSpPr>
-          <p:cNvPr id="11" name="Rectangle 10"/>
+          <p:cNvPr id="8" name="Rounded Rectangle 7"/>
           <p:cNvSpPr/>
           <p:nvPr/>
         </p:nvSpPr>
         <p:spPr>
           <a:xfrm>
-            <a:off x="500000" y="6500000"/>
-            <a:ext cx="11100000" cy="20000"/>
-          </a:xfrm>
-          <a:prstGeom prst="rect">
-            <a:avLst/>
+            <a:off x="475488" y="6419088"/>
+            <a:ext cx="11237976" cy="10972"/>
+          </a:xfrm>
+          <a:prstGeom prst="roundRect">
+            <a:avLst>
+              <a:gd name="adj" fmla="val 50000"/>
+            </a:avLst>
           </a:prstGeom>
           <a:solidFill>
-            <a:srgbClr val="C9D4EE"/>
+            <a:srgbClr val="E4F1EE"/>
           </a:solidFill>
           <a:ln>
             <a:noFill/>
@@ -6627,14 +6608,14 @@
       </p:sp>
       <p:sp>
         <p:nvSpPr>
-          <p:cNvPr id="12" name="TextBox 11"/>
+          <p:cNvPr id="9" name="TextBox 8"/>
           <p:cNvSpPr txBox="1"/>
           <p:nvPr/>
         </p:nvSpPr>
         <p:spPr>
           <a:xfrm>
-            <a:off x="500000" y="6540000"/>
-            <a:ext cx="7000000" cy="300000"/>
+            <a:off x="475488" y="6455664"/>
+            <a:ext cx="7315200" cy="292608"/>
           </a:xfrm>
           <a:prstGeom prst="rect">
             <a:avLst/>
@@ -6642,41 +6623,215 @@
           <a:noFill/>
         </p:spPr>
         <p:txBody>
-          <a:bodyPr wrap="square" anchor="t">
+          <a:bodyPr wrap="square" anchor="t" lIns="0" rIns="0" tIns="0" bIns="0">
             <a:spAutoFit/>
           </a:bodyPr>
           <a:lstStyle/>
           <a:p>
             <a:pPr algn="l">
               <a:lnSpc>
-                <a:spcPct val="110000"/>
+                <a:spcPct val="114000"/>
               </a:lnSpc>
-              <a:spcAft>
-                <a:spcPts val="600"/>
-              </a:spcAft>
+            </a:pPr>
+            <a:r>
+              <a:rPr sz="900" b="0">
+                <a:solidFill>
+                  <a:srgbClr val="5C6E6A"/>
+                </a:solidFill>
+              </a:rPr>
+              <a:t>两江智造集团 · Python程序设计（项目实战）</a:t>
+            </a:r>
+          </a:p>
+        </p:txBody>
+      </p:sp>
+      <p:sp>
+        <p:nvSpPr>
+          <p:cNvPr id="10" name="TextBox 9"/>
+          <p:cNvSpPr txBox="1"/>
+          <p:nvPr/>
+        </p:nvSpPr>
+        <p:spPr>
+          <a:xfrm>
+            <a:off x="10597896" y="6537960"/>
+            <a:ext cx="996696" cy="301752"/>
+          </a:xfrm>
+          <a:prstGeom prst="rect">
+            <a:avLst/>
+          </a:prstGeom>
+          <a:noFill/>
+        </p:spPr>
+        <p:txBody>
+          <a:bodyPr wrap="square" anchor="t" lIns="0" rIns="0" tIns="0" bIns="0">
+            <a:spAutoFit/>
+          </a:bodyPr>
+          <a:lstStyle/>
+          <a:p>
+            <a:pPr algn="r">
+              <a:lnSpc>
+                <a:spcPct val="114000"/>
+              </a:lnSpc>
             </a:pPr>
             <a:r>
               <a:rPr sz="1000" b="0">
                 <a:solidFill>
                   <a:srgbClr val="8A97B5"/>
                 </a:solidFill>
-                <a:latin typeface="微软雅黑"/>
               </a:rPr>
-              <a:t>两江智造集团 · Python程序设计（项目实战）</a:t>
-            </a:r>
-          </a:p>
-        </p:txBody>
-      </p:sp>
-      <p:sp>
-        <p:nvSpPr>
-          <p:cNvPr id="13" name="TextBox 12"/>
+              <a:t>4 / 10</a:t>
+            </a:r>
+          </a:p>
+        </p:txBody>
+      </p:sp>
+      <p:sp>
+        <p:nvSpPr>
+          <p:cNvPr id="11" name="Rounded Rectangle 10"/>
+          <p:cNvSpPr/>
+          <p:nvPr/>
+        </p:nvSpPr>
+        <p:spPr>
+          <a:xfrm>
+            <a:off x="475488" y="1554480"/>
+            <a:ext cx="11237976" cy="1030522"/>
+          </a:xfrm>
+          <a:prstGeom prst="roundRect">
+            <a:avLst>
+              <a:gd name="adj" fmla="val 6000"/>
+            </a:avLst>
+          </a:prstGeom>
+          <a:solidFill>
+            <a:srgbClr val="FFFFFF"/>
+          </a:solidFill>
+          <a:ln w="9525">
+            <a:solidFill>
+              <a:srgbClr val="E4F1EE"/>
+            </a:solidFill>
+          </a:ln>
+          <a:effectLst/>
+        </p:spPr>
+        <p:style>
+          <a:lnRef idx="1">
+            <a:schemeClr val="accent1"/>
+          </a:lnRef>
+          <a:fillRef idx="3">
+            <a:schemeClr val="accent1"/>
+          </a:fillRef>
+          <a:effectRef idx="2">
+            <a:schemeClr val="accent1"/>
+          </a:effectRef>
+          <a:fontRef idx="minor">
+            <a:schemeClr val="lt1"/>
+          </a:fontRef>
+        </p:style>
+        <p:txBody>
+          <a:bodyPr rtlCol="0" anchor="ctr"/>
+          <a:lstStyle/>
+          <a:p>
+            <a:pPr algn="ctr"/>
+          </a:p>
+        </p:txBody>
+      </p:sp>
+      <p:sp>
+        <p:nvSpPr>
+          <p:cNvPr id="12" name="Rounded Rectangle 11"/>
+          <p:cNvSpPr/>
+          <p:nvPr/>
+        </p:nvSpPr>
+        <p:spPr>
+          <a:xfrm>
+            <a:off x="475488" y="1554480"/>
+            <a:ext cx="54864" cy="1030522"/>
+          </a:xfrm>
+          <a:prstGeom prst="roundRect">
+            <a:avLst>
+              <a:gd name="adj" fmla="val 50000"/>
+            </a:avLst>
+          </a:prstGeom>
+          <a:solidFill>
+            <a:srgbClr val="5C6E6A"/>
+          </a:solidFill>
+          <a:ln>
+            <a:noFill/>
+          </a:ln>
+          <a:effectLst/>
+        </p:spPr>
+        <p:style>
+          <a:lnRef idx="1">
+            <a:schemeClr val="accent1"/>
+          </a:lnRef>
+          <a:fillRef idx="3">
+            <a:schemeClr val="accent1"/>
+          </a:fillRef>
+          <a:effectRef idx="2">
+            <a:schemeClr val="accent1"/>
+          </a:effectRef>
+          <a:fontRef idx="minor">
+            <a:schemeClr val="lt1"/>
+          </a:fontRef>
+        </p:style>
+        <p:txBody>
+          <a:bodyPr rtlCol="0" anchor="ctr"/>
+          <a:lstStyle/>
+          <a:p>
+            <a:pPr algn="ctr"/>
+          </a:p>
+        </p:txBody>
+      </p:sp>
+      <p:sp>
+        <p:nvSpPr>
+          <p:cNvPr id="13" name="Rounded Rectangle 12"/>
+          <p:cNvSpPr/>
+          <p:nvPr/>
+        </p:nvSpPr>
+        <p:spPr>
+          <a:xfrm>
+            <a:off x="621792" y="1636776"/>
+            <a:ext cx="237744" cy="237744"/>
+          </a:xfrm>
+          <a:prstGeom prst="roundRect">
+            <a:avLst>
+              <a:gd name="adj" fmla="val 28000"/>
+            </a:avLst>
+          </a:prstGeom>
+          <a:solidFill>
+            <a:srgbClr val="5C6E6A"/>
+          </a:solidFill>
+          <a:ln>
+            <a:noFill/>
+          </a:ln>
+          <a:effectLst/>
+        </p:spPr>
+        <p:style>
+          <a:lnRef idx="1">
+            <a:schemeClr val="accent1"/>
+          </a:lnRef>
+          <a:fillRef idx="3">
+            <a:schemeClr val="accent1"/>
+          </a:fillRef>
+          <a:effectRef idx="2">
+            <a:schemeClr val="accent1"/>
+          </a:effectRef>
+          <a:fontRef idx="minor">
+            <a:schemeClr val="lt1"/>
+          </a:fontRef>
+        </p:style>
+        <p:txBody>
+          <a:bodyPr rtlCol="0" anchor="ctr"/>
+          <a:lstStyle/>
+          <a:p>
+            <a:pPr algn="ctr"/>
+          </a:p>
+        </p:txBody>
+      </p:sp>
+      <p:sp>
+        <p:nvSpPr>
+          <p:cNvPr id="14" name="TextBox 13"/>
           <p:cNvSpPr txBox="1"/>
           <p:nvPr/>
         </p:nvSpPr>
         <p:spPr>
           <a:xfrm>
-            <a:off x="10600000" y="6540000"/>
-            <a:ext cx="1000000" cy="300000"/>
+            <a:off x="621792" y="1636776"/>
+            <a:ext cx="237744" cy="237744"/>
           </a:xfrm>
           <a:prstGeom prst="rect">
             <a:avLst/>
@@ -6684,27 +6839,1421 @@
           <a:noFill/>
         </p:spPr>
         <p:txBody>
-          <a:bodyPr wrap="square" anchor="t">
+          <a:bodyPr wrap="square" anchor="ctr" lIns="0" rIns="0" tIns="0" bIns="0">
             <a:spAutoFit/>
           </a:bodyPr>
           <a:lstStyle/>
           <a:p>
-            <a:pPr algn="r">
+            <a:pPr algn="ctr">
               <a:lnSpc>
-                <a:spcPct val="110000"/>
+                <a:spcPct val="114000"/>
               </a:lnSpc>
-              <a:spcAft>
-                <a:spcPts val="600"/>
-              </a:spcAft>
             </a:pPr>
             <a:r>
-              <a:rPr sz="1000" b="0">
+              <a:rPr sz="1000" b="1">
                 <a:solidFill>
-                  <a:srgbClr val="8A97B5"/>
+                  <a:srgbClr val="FFFFFF"/>
                 </a:solidFill>
-                <a:latin typeface="微软雅黑"/>
               </a:rPr>
-              <a:t>7 / 10</a:t>
+              <a:t>D</a:t>
+            </a:r>
+          </a:p>
+        </p:txBody>
+      </p:sp>
+      <p:sp>
+        <p:nvSpPr>
+          <p:cNvPr id="15" name="TextBox 14"/>
+          <p:cNvSpPr txBox="1"/>
+          <p:nvPr/>
+        </p:nvSpPr>
+        <p:spPr>
+          <a:xfrm>
+            <a:off x="932688" y="1618488"/>
+            <a:ext cx="8778240" cy="274320"/>
+          </a:xfrm>
+          <a:prstGeom prst="rect">
+            <a:avLst/>
+          </a:prstGeom>
+          <a:noFill/>
+        </p:spPr>
+        <p:txBody>
+          <a:bodyPr wrap="square" anchor="ctr" lIns="0" rIns="0" tIns="0" bIns="0">
+            <a:spAutoFit/>
+          </a:bodyPr>
+          <a:lstStyle/>
+          <a:p>
+            <a:pPr algn="l">
+              <a:lnSpc>
+                <a:spcPct val="114000"/>
+              </a:lnSpc>
+            </a:pPr>
+            <a:r>
+              <a:rPr sz="1050" b="1">
+                <a:solidFill>
+                  <a:srgbClr val="1B2B28"/>
+                </a:solidFill>
+              </a:rPr>
+              <a:t>及格</a:t>
+            </a:r>
+            <a:r>
+              <a:rPr sz="850" b="0">
+                <a:solidFill>
+                  <a:srgbClr val="5C6E6A"/>
+                </a:solidFill>
+              </a:rPr>
+              <a:t>   验收口径：</a:t>
+            </a:r>
+            <a:r>
+              <a:rPr sz="850" b="0">
+                <a:solidFill>
+                  <a:srgbClr val="5C6E6A"/>
+                </a:solidFill>
+              </a:rPr>
+              <a:t>conda环境激活可用+仓库初始化+结构完整+README</a:t>
+            </a:r>
+          </a:p>
+        </p:txBody>
+      </p:sp>
+      <p:sp>
+        <p:nvSpPr>
+          <p:cNvPr id="16" name="Rounded Rectangle 15"/>
+          <p:cNvSpPr/>
+          <p:nvPr/>
+        </p:nvSpPr>
+        <p:spPr>
+          <a:xfrm>
+            <a:off x="10532681" y="1645920"/>
+            <a:ext cx="1052766" cy="237744"/>
+          </a:xfrm>
+          <a:prstGeom prst="roundRect">
+            <a:avLst>
+              <a:gd name="adj" fmla="val 50000"/>
+            </a:avLst>
+          </a:prstGeom>
+          <a:solidFill>
+            <a:srgbClr val="C9A227"/>
+          </a:solidFill>
+          <a:ln>
+            <a:noFill/>
+          </a:ln>
+          <a:effectLst/>
+        </p:spPr>
+        <p:style>
+          <a:lnRef idx="1">
+            <a:schemeClr val="accent1"/>
+          </a:lnRef>
+          <a:fillRef idx="3">
+            <a:schemeClr val="accent1"/>
+          </a:fillRef>
+          <a:effectRef idx="2">
+            <a:schemeClr val="accent1"/>
+          </a:effectRef>
+          <a:fontRef idx="minor">
+            <a:schemeClr val="lt1"/>
+          </a:fontRef>
+        </p:style>
+        <p:txBody>
+          <a:bodyPr rtlCol="0" anchor="ctr"/>
+          <a:lstStyle/>
+          <a:p>
+            <a:pPr algn="ctr"/>
+          </a:p>
+        </p:txBody>
+      </p:sp>
+      <p:sp>
+        <p:nvSpPr>
+          <p:cNvPr id="17" name="TextBox 16"/>
+          <p:cNvSpPr txBox="1"/>
+          <p:nvPr/>
+        </p:nvSpPr>
+        <p:spPr>
+          <a:xfrm>
+            <a:off x="10532681" y="1645920"/>
+            <a:ext cx="1052766" cy="237744"/>
+          </a:xfrm>
+          <a:prstGeom prst="rect">
+            <a:avLst/>
+          </a:prstGeom>
+          <a:noFill/>
+        </p:spPr>
+        <p:txBody>
+          <a:bodyPr wrap="square" anchor="ctr" lIns="0" rIns="0" tIns="0" bIns="0">
+            <a:spAutoFit/>
+          </a:bodyPr>
+          <a:lstStyle/>
+          <a:p>
+            <a:pPr algn="ctr">
+              <a:lnSpc>
+                <a:spcPct val="114000"/>
+              </a:lnSpc>
+            </a:pPr>
+            <a:r>
+              <a:rPr sz="850" b="1">
+                <a:solidFill>
+                  <a:srgbClr val="FFFFFF"/>
+                </a:solidFill>
+              </a:rPr>
+              <a:t>本节取证项 通过</a:t>
+            </a:r>
+          </a:p>
+        </p:txBody>
+      </p:sp>
+      <p:sp>
+        <p:nvSpPr>
+          <p:cNvPr id="18" name="TextBox 17"/>
+          <p:cNvSpPr txBox="1"/>
+          <p:nvPr/>
+        </p:nvSpPr>
+        <p:spPr>
+          <a:xfrm>
+            <a:off x="932688" y="1901952"/>
+            <a:ext cx="10671047" cy="628186"/>
+          </a:xfrm>
+          <a:prstGeom prst="rect">
+            <a:avLst/>
+          </a:prstGeom>
+          <a:noFill/>
+        </p:spPr>
+        <p:txBody>
+          <a:bodyPr wrap="square" anchor="t" lIns="0" rIns="0" tIns="0" bIns="0">
+            <a:spAutoFit/>
+          </a:bodyPr>
+          <a:lstStyle/>
+          <a:p>
+            <a:pPr algn="l">
+              <a:lnSpc>
+                <a:spcPct val="114000"/>
+              </a:lnSpc>
+            </a:pPr>
+            <a:r>
+              <a:rPr sz="950" b="0">
+                <a:solidFill>
+                  <a:srgbClr val="1B2B28"/>
+                </a:solidFill>
+              </a:rPr>
+              <a:t>结构完整=是（四目录 4/4、模板缺失 0、空目录 0、.pyc 0）｜README.md 已落盘 889 字节且首行为一级标题=是｜仓库初始化三连（git init / git add . / git commit -m）=是｜venv 激活命令写在 setup_venv.sh=是｜本流水线解释器位于 conda 环境目录=是</a:t>
+            </a:r>
+          </a:p>
+        </p:txBody>
+      </p:sp>
+      <p:sp>
+        <p:nvSpPr>
+          <p:cNvPr id="19" name="Rounded Rectangle 18"/>
+          <p:cNvSpPr/>
+          <p:nvPr/>
+        </p:nvSpPr>
+        <p:spPr>
+          <a:xfrm>
+            <a:off x="475488" y="2649010"/>
+            <a:ext cx="11237976" cy="1030522"/>
+          </a:xfrm>
+          <a:prstGeom prst="roundRect">
+            <a:avLst>
+              <a:gd name="adj" fmla="val 6000"/>
+            </a:avLst>
+          </a:prstGeom>
+          <a:solidFill>
+            <a:srgbClr val="FFFFFF"/>
+          </a:solidFill>
+          <a:ln w="9525">
+            <a:solidFill>
+              <a:srgbClr val="E4F1EE"/>
+            </a:solidFill>
+          </a:ln>
+          <a:effectLst/>
+        </p:spPr>
+        <p:style>
+          <a:lnRef idx="1">
+            <a:schemeClr val="accent1"/>
+          </a:lnRef>
+          <a:fillRef idx="3">
+            <a:schemeClr val="accent1"/>
+          </a:fillRef>
+          <a:effectRef idx="2">
+            <a:schemeClr val="accent1"/>
+          </a:effectRef>
+          <a:fontRef idx="minor">
+            <a:schemeClr val="lt1"/>
+          </a:fontRef>
+        </p:style>
+        <p:txBody>
+          <a:bodyPr rtlCol="0" anchor="ctr"/>
+          <a:lstStyle/>
+          <a:p>
+            <a:pPr algn="ctr"/>
+          </a:p>
+        </p:txBody>
+      </p:sp>
+      <p:sp>
+        <p:nvSpPr>
+          <p:cNvPr id="20" name="Rounded Rectangle 19"/>
+          <p:cNvSpPr/>
+          <p:nvPr/>
+        </p:nvSpPr>
+        <p:spPr>
+          <a:xfrm>
+            <a:off x="475488" y="2649010"/>
+            <a:ext cx="54864" cy="1030522"/>
+          </a:xfrm>
+          <a:prstGeom prst="roundRect">
+            <a:avLst>
+              <a:gd name="adj" fmla="val 50000"/>
+            </a:avLst>
+          </a:prstGeom>
+          <a:solidFill>
+            <a:srgbClr val="157A6D"/>
+          </a:solidFill>
+          <a:ln>
+            <a:noFill/>
+          </a:ln>
+          <a:effectLst/>
+        </p:spPr>
+        <p:style>
+          <a:lnRef idx="1">
+            <a:schemeClr val="accent1"/>
+          </a:lnRef>
+          <a:fillRef idx="3">
+            <a:schemeClr val="accent1"/>
+          </a:fillRef>
+          <a:effectRef idx="2">
+            <a:schemeClr val="accent1"/>
+          </a:effectRef>
+          <a:fontRef idx="minor">
+            <a:schemeClr val="lt1"/>
+          </a:fontRef>
+        </p:style>
+        <p:txBody>
+          <a:bodyPr rtlCol="0" anchor="ctr"/>
+          <a:lstStyle/>
+          <a:p>
+            <a:pPr algn="ctr"/>
+          </a:p>
+        </p:txBody>
+      </p:sp>
+      <p:sp>
+        <p:nvSpPr>
+          <p:cNvPr id="21" name="Rounded Rectangle 20"/>
+          <p:cNvSpPr/>
+          <p:nvPr/>
+        </p:nvSpPr>
+        <p:spPr>
+          <a:xfrm>
+            <a:off x="621792" y="2731306"/>
+            <a:ext cx="237744" cy="237744"/>
+          </a:xfrm>
+          <a:prstGeom prst="roundRect">
+            <a:avLst>
+              <a:gd name="adj" fmla="val 28000"/>
+            </a:avLst>
+          </a:prstGeom>
+          <a:solidFill>
+            <a:srgbClr val="157A6D"/>
+          </a:solidFill>
+          <a:ln>
+            <a:noFill/>
+          </a:ln>
+          <a:effectLst/>
+        </p:spPr>
+        <p:style>
+          <a:lnRef idx="1">
+            <a:schemeClr val="accent1"/>
+          </a:lnRef>
+          <a:fillRef idx="3">
+            <a:schemeClr val="accent1"/>
+          </a:fillRef>
+          <a:effectRef idx="2">
+            <a:schemeClr val="accent1"/>
+          </a:effectRef>
+          <a:fontRef idx="minor">
+            <a:schemeClr val="lt1"/>
+          </a:fontRef>
+        </p:style>
+        <p:txBody>
+          <a:bodyPr rtlCol="0" anchor="ctr"/>
+          <a:lstStyle/>
+          <a:p>
+            <a:pPr algn="ctr"/>
+          </a:p>
+        </p:txBody>
+      </p:sp>
+      <p:sp>
+        <p:nvSpPr>
+          <p:cNvPr id="22" name="TextBox 21"/>
+          <p:cNvSpPr txBox="1"/>
+          <p:nvPr/>
+        </p:nvSpPr>
+        <p:spPr>
+          <a:xfrm>
+            <a:off x="621792" y="2731306"/>
+            <a:ext cx="237744" cy="237744"/>
+          </a:xfrm>
+          <a:prstGeom prst="rect">
+            <a:avLst/>
+          </a:prstGeom>
+          <a:noFill/>
+        </p:spPr>
+        <p:txBody>
+          <a:bodyPr wrap="square" anchor="ctr" lIns="0" rIns="0" tIns="0" bIns="0">
+            <a:spAutoFit/>
+          </a:bodyPr>
+          <a:lstStyle/>
+          <a:p>
+            <a:pPr algn="ctr">
+              <a:lnSpc>
+                <a:spcPct val="114000"/>
+              </a:lnSpc>
+            </a:pPr>
+            <a:r>
+              <a:rPr sz="1000" b="1">
+                <a:solidFill>
+                  <a:srgbClr val="FFFFFF"/>
+                </a:solidFill>
+              </a:rPr>
+              <a:t>C</a:t>
+            </a:r>
+          </a:p>
+        </p:txBody>
+      </p:sp>
+      <p:sp>
+        <p:nvSpPr>
+          <p:cNvPr id="23" name="TextBox 22"/>
+          <p:cNvSpPr txBox="1"/>
+          <p:nvPr/>
+        </p:nvSpPr>
+        <p:spPr>
+          <a:xfrm>
+            <a:off x="932688" y="2713018"/>
+            <a:ext cx="8778240" cy="274320"/>
+          </a:xfrm>
+          <a:prstGeom prst="rect">
+            <a:avLst/>
+          </a:prstGeom>
+          <a:noFill/>
+        </p:spPr>
+        <p:txBody>
+          <a:bodyPr wrap="square" anchor="ctr" lIns="0" rIns="0" tIns="0" bIns="0">
+            <a:spAutoFit/>
+          </a:bodyPr>
+          <a:lstStyle/>
+          <a:p>
+            <a:pPr algn="l">
+              <a:lnSpc>
+                <a:spcPct val="114000"/>
+              </a:lnSpc>
+            </a:pPr>
+            <a:r>
+              <a:rPr sz="1050" b="1">
+                <a:solidFill>
+                  <a:srgbClr val="1B2B28"/>
+                </a:solidFill>
+              </a:rPr>
+              <a:t>良好</a:t>
+            </a:r>
+            <a:r>
+              <a:rPr sz="850" b="0">
+                <a:solidFill>
+                  <a:srgbClr val="5C6E6A"/>
+                </a:solidFill>
+              </a:rPr>
+              <a:t>   验收口径：</a:t>
+            </a:r>
+            <a:r>
+              <a:rPr sz="850" b="0">
+                <a:solidFill>
+                  <a:srgbClr val="5C6E6A"/>
+                </a:solidFill>
+              </a:rPr>
+              <a:t>检查工具配置生效；pytest通过</a:t>
+            </a:r>
+          </a:p>
+        </p:txBody>
+      </p:sp>
+      <p:sp>
+        <p:nvSpPr>
+          <p:cNvPr id="24" name="Rounded Rectangle 23"/>
+          <p:cNvSpPr/>
+          <p:nvPr/>
+        </p:nvSpPr>
+        <p:spPr>
+          <a:xfrm>
+            <a:off x="10532681" y="2740450"/>
+            <a:ext cx="1052766" cy="237744"/>
+          </a:xfrm>
+          <a:prstGeom prst="roundRect">
+            <a:avLst>
+              <a:gd name="adj" fmla="val 50000"/>
+            </a:avLst>
+          </a:prstGeom>
+          <a:solidFill>
+            <a:srgbClr val="C9A227"/>
+          </a:solidFill>
+          <a:ln>
+            <a:noFill/>
+          </a:ln>
+          <a:effectLst/>
+        </p:spPr>
+        <p:style>
+          <a:lnRef idx="1">
+            <a:schemeClr val="accent1"/>
+          </a:lnRef>
+          <a:fillRef idx="3">
+            <a:schemeClr val="accent1"/>
+          </a:fillRef>
+          <a:effectRef idx="2">
+            <a:schemeClr val="accent1"/>
+          </a:effectRef>
+          <a:fontRef idx="minor">
+            <a:schemeClr val="lt1"/>
+          </a:fontRef>
+        </p:style>
+        <p:txBody>
+          <a:bodyPr rtlCol="0" anchor="ctr"/>
+          <a:lstStyle/>
+          <a:p>
+            <a:pPr algn="ctr"/>
+          </a:p>
+        </p:txBody>
+      </p:sp>
+      <p:sp>
+        <p:nvSpPr>
+          <p:cNvPr id="25" name="TextBox 24"/>
+          <p:cNvSpPr txBox="1"/>
+          <p:nvPr/>
+        </p:nvSpPr>
+        <p:spPr>
+          <a:xfrm>
+            <a:off x="10532681" y="2740450"/>
+            <a:ext cx="1052766" cy="237744"/>
+          </a:xfrm>
+          <a:prstGeom prst="rect">
+            <a:avLst/>
+          </a:prstGeom>
+          <a:noFill/>
+        </p:spPr>
+        <p:txBody>
+          <a:bodyPr wrap="square" anchor="ctr" lIns="0" rIns="0" tIns="0" bIns="0">
+            <a:spAutoFit/>
+          </a:bodyPr>
+          <a:lstStyle/>
+          <a:p>
+            <a:pPr algn="ctr">
+              <a:lnSpc>
+                <a:spcPct val="114000"/>
+              </a:lnSpc>
+            </a:pPr>
+            <a:r>
+              <a:rPr sz="850" b="1">
+                <a:solidFill>
+                  <a:srgbClr val="FFFFFF"/>
+                </a:solidFill>
+              </a:rPr>
+              <a:t>本节取证项 通过</a:t>
+            </a:r>
+          </a:p>
+        </p:txBody>
+      </p:sp>
+      <p:sp>
+        <p:nvSpPr>
+          <p:cNvPr id="26" name="TextBox 25"/>
+          <p:cNvSpPr txBox="1"/>
+          <p:nvPr/>
+        </p:nvSpPr>
+        <p:spPr>
+          <a:xfrm>
+            <a:off x="932688" y="2996482"/>
+            <a:ext cx="10671047" cy="628186"/>
+          </a:xfrm>
+          <a:prstGeom prst="rect">
+            <a:avLst/>
+          </a:prstGeom>
+          <a:noFill/>
+        </p:spPr>
+        <p:txBody>
+          <a:bodyPr wrap="square" anchor="t" lIns="0" rIns="0" tIns="0" bIns="0">
+            <a:spAutoFit/>
+          </a:bodyPr>
+          <a:lstStyle/>
+          <a:p>
+            <a:pPr algn="l">
+              <a:lnSpc>
+                <a:spcPct val="114000"/>
+              </a:lnSpc>
+            </a:pPr>
+            <a:r>
+              <a:rPr sz="950" b="0">
+                <a:solidFill>
+                  <a:srgbClr val="1B2B28"/>
+                </a:solidFill>
+              </a:rPr>
+              <a:t>检查工具配置：2 个钩子全部带 entry（2/2，black, flake8）｜配置要求的工具缺口 0 个｜pytest 配置 testpaths 已声明=是｜生成骨架真实加载：入口 main() 返回 0、自带 test_ 函数 3 个通过 3 个失败 0 个｜--fail-under 评分 entry 已声明=否</a:t>
+            </a:r>
+          </a:p>
+        </p:txBody>
+      </p:sp>
+      <p:sp>
+        <p:nvSpPr>
+          <p:cNvPr id="27" name="Rounded Rectangle 26"/>
+          <p:cNvSpPr/>
+          <p:nvPr/>
+        </p:nvSpPr>
+        <p:spPr>
+          <a:xfrm>
+            <a:off x="475488" y="3743541"/>
+            <a:ext cx="11237976" cy="802849"/>
+          </a:xfrm>
+          <a:prstGeom prst="roundRect">
+            <a:avLst>
+              <a:gd name="adj" fmla="val 6000"/>
+            </a:avLst>
+          </a:prstGeom>
+          <a:solidFill>
+            <a:srgbClr val="FFFFFF"/>
+          </a:solidFill>
+          <a:ln w="9525">
+            <a:solidFill>
+              <a:srgbClr val="E4F1EE"/>
+            </a:solidFill>
+          </a:ln>
+          <a:effectLst/>
+        </p:spPr>
+        <p:style>
+          <a:lnRef idx="1">
+            <a:schemeClr val="accent1"/>
+          </a:lnRef>
+          <a:fillRef idx="3">
+            <a:schemeClr val="accent1"/>
+          </a:fillRef>
+          <a:effectRef idx="2">
+            <a:schemeClr val="accent1"/>
+          </a:effectRef>
+          <a:fontRef idx="minor">
+            <a:schemeClr val="lt1"/>
+          </a:fontRef>
+        </p:style>
+        <p:txBody>
+          <a:bodyPr rtlCol="0" anchor="ctr"/>
+          <a:lstStyle/>
+          <a:p>
+            <a:pPr algn="ctr"/>
+          </a:p>
+        </p:txBody>
+      </p:sp>
+      <p:sp>
+        <p:nvSpPr>
+          <p:cNvPr id="28" name="Rounded Rectangle 27"/>
+          <p:cNvSpPr/>
+          <p:nvPr/>
+        </p:nvSpPr>
+        <p:spPr>
+          <a:xfrm>
+            <a:off x="475488" y="3743541"/>
+            <a:ext cx="54864" cy="802849"/>
+          </a:xfrm>
+          <a:prstGeom prst="roundRect">
+            <a:avLst>
+              <a:gd name="adj" fmla="val 50000"/>
+            </a:avLst>
+          </a:prstGeom>
+          <a:solidFill>
+            <a:srgbClr val="0B5E54"/>
+          </a:solidFill>
+          <a:ln>
+            <a:noFill/>
+          </a:ln>
+          <a:effectLst/>
+        </p:spPr>
+        <p:style>
+          <a:lnRef idx="1">
+            <a:schemeClr val="accent1"/>
+          </a:lnRef>
+          <a:fillRef idx="3">
+            <a:schemeClr val="accent1"/>
+          </a:fillRef>
+          <a:effectRef idx="2">
+            <a:schemeClr val="accent1"/>
+          </a:effectRef>
+          <a:fontRef idx="minor">
+            <a:schemeClr val="lt1"/>
+          </a:fontRef>
+        </p:style>
+        <p:txBody>
+          <a:bodyPr rtlCol="0" anchor="ctr"/>
+          <a:lstStyle/>
+          <a:p>
+            <a:pPr algn="ctr"/>
+          </a:p>
+        </p:txBody>
+      </p:sp>
+      <p:sp>
+        <p:nvSpPr>
+          <p:cNvPr id="29" name="Rounded Rectangle 28"/>
+          <p:cNvSpPr/>
+          <p:nvPr/>
+        </p:nvSpPr>
+        <p:spPr>
+          <a:xfrm>
+            <a:off x="621792" y="3825837"/>
+            <a:ext cx="237744" cy="237744"/>
+          </a:xfrm>
+          <a:prstGeom prst="roundRect">
+            <a:avLst>
+              <a:gd name="adj" fmla="val 28000"/>
+            </a:avLst>
+          </a:prstGeom>
+          <a:solidFill>
+            <a:srgbClr val="0B5E54"/>
+          </a:solidFill>
+          <a:ln>
+            <a:noFill/>
+          </a:ln>
+          <a:effectLst/>
+        </p:spPr>
+        <p:style>
+          <a:lnRef idx="1">
+            <a:schemeClr val="accent1"/>
+          </a:lnRef>
+          <a:fillRef idx="3">
+            <a:schemeClr val="accent1"/>
+          </a:fillRef>
+          <a:effectRef idx="2">
+            <a:schemeClr val="accent1"/>
+          </a:effectRef>
+          <a:fontRef idx="minor">
+            <a:schemeClr val="lt1"/>
+          </a:fontRef>
+        </p:style>
+        <p:txBody>
+          <a:bodyPr rtlCol="0" anchor="ctr"/>
+          <a:lstStyle/>
+          <a:p>
+            <a:pPr algn="ctr"/>
+          </a:p>
+        </p:txBody>
+      </p:sp>
+      <p:sp>
+        <p:nvSpPr>
+          <p:cNvPr id="30" name="TextBox 29"/>
+          <p:cNvSpPr txBox="1"/>
+          <p:nvPr/>
+        </p:nvSpPr>
+        <p:spPr>
+          <a:xfrm>
+            <a:off x="621792" y="3825837"/>
+            <a:ext cx="237744" cy="237744"/>
+          </a:xfrm>
+          <a:prstGeom prst="rect">
+            <a:avLst/>
+          </a:prstGeom>
+          <a:noFill/>
+        </p:spPr>
+        <p:txBody>
+          <a:bodyPr wrap="square" anchor="ctr" lIns="0" rIns="0" tIns="0" bIns="0">
+            <a:spAutoFit/>
+          </a:bodyPr>
+          <a:lstStyle/>
+          <a:p>
+            <a:pPr algn="ctr">
+              <a:lnSpc>
+                <a:spcPct val="114000"/>
+              </a:lnSpc>
+            </a:pPr>
+            <a:r>
+              <a:rPr sz="1000" b="1">
+                <a:solidFill>
+                  <a:srgbClr val="FFFFFF"/>
+                </a:solidFill>
+              </a:rPr>
+              <a:t>B</a:t>
+            </a:r>
+          </a:p>
+        </p:txBody>
+      </p:sp>
+      <p:sp>
+        <p:nvSpPr>
+          <p:cNvPr id="31" name="TextBox 30"/>
+          <p:cNvSpPr txBox="1"/>
+          <p:nvPr/>
+        </p:nvSpPr>
+        <p:spPr>
+          <a:xfrm>
+            <a:off x="932688" y="3807549"/>
+            <a:ext cx="8778240" cy="274320"/>
+          </a:xfrm>
+          <a:prstGeom prst="rect">
+            <a:avLst/>
+          </a:prstGeom>
+          <a:noFill/>
+        </p:spPr>
+        <p:txBody>
+          <a:bodyPr wrap="square" anchor="ctr" lIns="0" rIns="0" tIns="0" bIns="0">
+            <a:spAutoFit/>
+          </a:bodyPr>
+          <a:lstStyle/>
+          <a:p>
+            <a:pPr algn="l">
+              <a:lnSpc>
+                <a:spcPct val="114000"/>
+              </a:lnSpc>
+            </a:pPr>
+            <a:r>
+              <a:rPr sz="1050" b="1">
+                <a:solidFill>
+                  <a:srgbClr val="1B2B28"/>
+                </a:solidFill>
+              </a:rPr>
+              <a:t>优秀</a:t>
+            </a:r>
+            <a:r>
+              <a:rPr sz="850" b="0">
+                <a:solidFill>
+                  <a:srgbClr val="5C6E6A"/>
+                </a:solidFill>
+              </a:rPr>
+              <a:t>   验收口径：</a:t>
+            </a:r>
+            <a:r>
+              <a:rPr sz="850" b="0">
+                <a:solidFill>
+                  <a:srgbClr val="5C6E6A"/>
+                </a:solidFill>
+              </a:rPr>
+              <a:t>依赖可还原（requirements完整）；dev分支规范合并</a:t>
+            </a:r>
+          </a:p>
+        </p:txBody>
+      </p:sp>
+      <p:sp>
+        <p:nvSpPr>
+          <p:cNvPr id="32" name="Rounded Rectangle 31"/>
+          <p:cNvSpPr/>
+          <p:nvPr/>
+        </p:nvSpPr>
+        <p:spPr>
+          <a:xfrm>
+            <a:off x="10532681" y="3834981"/>
+            <a:ext cx="1052766" cy="237744"/>
+          </a:xfrm>
+          <a:prstGeom prst="roundRect">
+            <a:avLst>
+              <a:gd name="adj" fmla="val 50000"/>
+            </a:avLst>
+          </a:prstGeom>
+          <a:solidFill>
+            <a:srgbClr val="C9A227"/>
+          </a:solidFill>
+          <a:ln>
+            <a:noFill/>
+          </a:ln>
+          <a:effectLst/>
+        </p:spPr>
+        <p:style>
+          <a:lnRef idx="1">
+            <a:schemeClr val="accent1"/>
+          </a:lnRef>
+          <a:fillRef idx="3">
+            <a:schemeClr val="accent1"/>
+          </a:fillRef>
+          <a:effectRef idx="2">
+            <a:schemeClr val="accent1"/>
+          </a:effectRef>
+          <a:fontRef idx="minor">
+            <a:schemeClr val="lt1"/>
+          </a:fontRef>
+        </p:style>
+        <p:txBody>
+          <a:bodyPr rtlCol="0" anchor="ctr"/>
+          <a:lstStyle/>
+          <a:p>
+            <a:pPr algn="ctr"/>
+          </a:p>
+        </p:txBody>
+      </p:sp>
+      <p:sp>
+        <p:nvSpPr>
+          <p:cNvPr id="33" name="TextBox 32"/>
+          <p:cNvSpPr txBox="1"/>
+          <p:nvPr/>
+        </p:nvSpPr>
+        <p:spPr>
+          <a:xfrm>
+            <a:off x="10532681" y="3834981"/>
+            <a:ext cx="1052766" cy="237744"/>
+          </a:xfrm>
+          <a:prstGeom prst="rect">
+            <a:avLst/>
+          </a:prstGeom>
+          <a:noFill/>
+        </p:spPr>
+        <p:txBody>
+          <a:bodyPr wrap="square" anchor="ctr" lIns="0" rIns="0" tIns="0" bIns="0">
+            <a:spAutoFit/>
+          </a:bodyPr>
+          <a:lstStyle/>
+          <a:p>
+            <a:pPr algn="ctr">
+              <a:lnSpc>
+                <a:spcPct val="114000"/>
+              </a:lnSpc>
+            </a:pPr>
+            <a:r>
+              <a:rPr sz="850" b="1">
+                <a:solidFill>
+                  <a:srgbClr val="FFFFFF"/>
+                </a:solidFill>
+              </a:rPr>
+              <a:t>本节取证项 通过</a:t>
+            </a:r>
+          </a:p>
+        </p:txBody>
+      </p:sp>
+      <p:sp>
+        <p:nvSpPr>
+          <p:cNvPr id="34" name="TextBox 33"/>
+          <p:cNvSpPr txBox="1"/>
+          <p:nvPr/>
+        </p:nvSpPr>
+        <p:spPr>
+          <a:xfrm>
+            <a:off x="932688" y="4091013"/>
+            <a:ext cx="10671047" cy="400513"/>
+          </a:xfrm>
+          <a:prstGeom prst="rect">
+            <a:avLst/>
+          </a:prstGeom>
+          <a:noFill/>
+        </p:spPr>
+        <p:txBody>
+          <a:bodyPr wrap="square" anchor="t" lIns="0" rIns="0" tIns="0" bIns="0">
+            <a:spAutoFit/>
+          </a:bodyPr>
+          <a:lstStyle/>
+          <a:p>
+            <a:pPr algn="l">
+              <a:lnSpc>
+                <a:spcPct val="114000"/>
+              </a:lnSpc>
+            </a:pPr>
+            <a:r>
+              <a:rPr sz="950" b="0">
+                <a:solidFill>
+                  <a:srgbClr val="1B2B28"/>
+                </a:solidFill>
+              </a:rPr>
+              <a:t>运行依赖 2/2 条钉下限｜开发依赖 4/4 条钉下限｜-r 引用 requirements.txt=是｜与运行依赖重名的开发项 0 个（无）｜git branch dev=是、git checkout dev=是、--no-ff 合并=是</a:t>
+            </a:r>
+          </a:p>
+        </p:txBody>
+      </p:sp>
+      <p:sp>
+        <p:nvSpPr>
+          <p:cNvPr id="35" name="Rounded Rectangle 34"/>
+          <p:cNvSpPr/>
+          <p:nvPr/>
+        </p:nvSpPr>
+        <p:spPr>
+          <a:xfrm>
+            <a:off x="475488" y="4610398"/>
+            <a:ext cx="11237976" cy="802849"/>
+          </a:xfrm>
+          <a:prstGeom prst="roundRect">
+            <a:avLst>
+              <a:gd name="adj" fmla="val 6000"/>
+            </a:avLst>
+          </a:prstGeom>
+          <a:solidFill>
+            <a:srgbClr val="FFFFFF"/>
+          </a:solidFill>
+          <a:ln w="9525">
+            <a:solidFill>
+              <a:srgbClr val="E4F1EE"/>
+            </a:solidFill>
+          </a:ln>
+          <a:effectLst/>
+        </p:spPr>
+        <p:style>
+          <a:lnRef idx="1">
+            <a:schemeClr val="accent1"/>
+          </a:lnRef>
+          <a:fillRef idx="3">
+            <a:schemeClr val="accent1"/>
+          </a:fillRef>
+          <a:effectRef idx="2">
+            <a:schemeClr val="accent1"/>
+          </a:effectRef>
+          <a:fontRef idx="minor">
+            <a:schemeClr val="lt1"/>
+          </a:fontRef>
+        </p:style>
+        <p:txBody>
+          <a:bodyPr rtlCol="0" anchor="ctr"/>
+          <a:lstStyle/>
+          <a:p>
+            <a:pPr algn="ctr"/>
+          </a:p>
+        </p:txBody>
+      </p:sp>
+      <p:sp>
+        <p:nvSpPr>
+          <p:cNvPr id="36" name="Rounded Rectangle 35"/>
+          <p:cNvSpPr/>
+          <p:nvPr/>
+        </p:nvSpPr>
+        <p:spPr>
+          <a:xfrm>
+            <a:off x="475488" y="4610398"/>
+            <a:ext cx="54864" cy="802849"/>
+          </a:xfrm>
+          <a:prstGeom prst="roundRect">
+            <a:avLst>
+              <a:gd name="adj" fmla="val 50000"/>
+            </a:avLst>
+          </a:prstGeom>
+          <a:solidFill>
+            <a:srgbClr val="C9A227"/>
+          </a:solidFill>
+          <a:ln>
+            <a:noFill/>
+          </a:ln>
+          <a:effectLst/>
+        </p:spPr>
+        <p:style>
+          <a:lnRef idx="1">
+            <a:schemeClr val="accent1"/>
+          </a:lnRef>
+          <a:fillRef idx="3">
+            <a:schemeClr val="accent1"/>
+          </a:fillRef>
+          <a:effectRef idx="2">
+            <a:schemeClr val="accent1"/>
+          </a:effectRef>
+          <a:fontRef idx="minor">
+            <a:schemeClr val="lt1"/>
+          </a:fontRef>
+        </p:style>
+        <p:txBody>
+          <a:bodyPr rtlCol="0" anchor="ctr"/>
+          <a:lstStyle/>
+          <a:p>
+            <a:pPr algn="ctr"/>
+          </a:p>
+        </p:txBody>
+      </p:sp>
+      <p:sp>
+        <p:nvSpPr>
+          <p:cNvPr id="37" name="Rounded Rectangle 36"/>
+          <p:cNvSpPr/>
+          <p:nvPr/>
+        </p:nvSpPr>
+        <p:spPr>
+          <a:xfrm>
+            <a:off x="621792" y="4692694"/>
+            <a:ext cx="237744" cy="237744"/>
+          </a:xfrm>
+          <a:prstGeom prst="roundRect">
+            <a:avLst>
+              <a:gd name="adj" fmla="val 28000"/>
+            </a:avLst>
+          </a:prstGeom>
+          <a:solidFill>
+            <a:srgbClr val="C9A227"/>
+          </a:solidFill>
+          <a:ln>
+            <a:noFill/>
+          </a:ln>
+          <a:effectLst/>
+        </p:spPr>
+        <p:style>
+          <a:lnRef idx="1">
+            <a:schemeClr val="accent1"/>
+          </a:lnRef>
+          <a:fillRef idx="3">
+            <a:schemeClr val="accent1"/>
+          </a:fillRef>
+          <a:effectRef idx="2">
+            <a:schemeClr val="accent1"/>
+          </a:effectRef>
+          <a:fontRef idx="minor">
+            <a:schemeClr val="lt1"/>
+          </a:fontRef>
+        </p:style>
+        <p:txBody>
+          <a:bodyPr rtlCol="0" anchor="ctr"/>
+          <a:lstStyle/>
+          <a:p>
+            <a:pPr algn="ctr"/>
+          </a:p>
+        </p:txBody>
+      </p:sp>
+      <p:sp>
+        <p:nvSpPr>
+          <p:cNvPr id="38" name="TextBox 37"/>
+          <p:cNvSpPr txBox="1"/>
+          <p:nvPr/>
+        </p:nvSpPr>
+        <p:spPr>
+          <a:xfrm>
+            <a:off x="621792" y="4692694"/>
+            <a:ext cx="237744" cy="237744"/>
+          </a:xfrm>
+          <a:prstGeom prst="rect">
+            <a:avLst/>
+          </a:prstGeom>
+          <a:noFill/>
+        </p:spPr>
+        <p:txBody>
+          <a:bodyPr wrap="square" anchor="ctr" lIns="0" rIns="0" tIns="0" bIns="0">
+            <a:spAutoFit/>
+          </a:bodyPr>
+          <a:lstStyle/>
+          <a:p>
+            <a:pPr algn="ctr">
+              <a:lnSpc>
+                <a:spcPct val="114000"/>
+              </a:lnSpc>
+            </a:pPr>
+            <a:r>
+              <a:rPr sz="1000" b="1">
+                <a:solidFill>
+                  <a:srgbClr val="FFFFFF"/>
+                </a:solidFill>
+              </a:rPr>
+              <a:t>A</a:t>
+            </a:r>
+          </a:p>
+        </p:txBody>
+      </p:sp>
+      <p:sp>
+        <p:nvSpPr>
+          <p:cNvPr id="39" name="TextBox 38"/>
+          <p:cNvSpPr txBox="1"/>
+          <p:nvPr/>
+        </p:nvSpPr>
+        <p:spPr>
+          <a:xfrm>
+            <a:off x="932688" y="4674406"/>
+            <a:ext cx="8778240" cy="274320"/>
+          </a:xfrm>
+          <a:prstGeom prst="rect">
+            <a:avLst/>
+          </a:prstGeom>
+          <a:noFill/>
+        </p:spPr>
+        <p:txBody>
+          <a:bodyPr wrap="square" anchor="ctr" lIns="0" rIns="0" tIns="0" bIns="0">
+            <a:spAutoFit/>
+          </a:bodyPr>
+          <a:lstStyle/>
+          <a:p>
+            <a:pPr algn="l">
+              <a:lnSpc>
+                <a:spcPct val="114000"/>
+              </a:lnSpc>
+            </a:pPr>
+            <a:r>
+              <a:rPr sz="1050" b="1">
+                <a:solidFill>
+                  <a:srgbClr val="1B2B28"/>
+                </a:solidFill>
+              </a:rPr>
+              <a:t>超优</a:t>
+            </a:r>
+            <a:r>
+              <a:rPr sz="850" b="0">
+                <a:solidFill>
+                  <a:srgbClr val="5C6E6A"/>
+                </a:solidFill>
+              </a:rPr>
+              <a:t>   验收口径：</a:t>
+            </a:r>
+            <a:r>
+              <a:rPr sz="850" b="0">
+                <a:solidFill>
+                  <a:srgbClr val="5C6E6A"/>
+                </a:solidFill>
+              </a:rPr>
+              <a:t>优秀+GitHub Actions CI或pre-commit钩子</a:t>
+            </a:r>
+          </a:p>
+        </p:txBody>
+      </p:sp>
+      <p:sp>
+        <p:nvSpPr>
+          <p:cNvPr id="40" name="Rounded Rectangle 39"/>
+          <p:cNvSpPr/>
+          <p:nvPr/>
+        </p:nvSpPr>
+        <p:spPr>
+          <a:xfrm>
+            <a:off x="10532681" y="4701838"/>
+            <a:ext cx="1052766" cy="237744"/>
+          </a:xfrm>
+          <a:prstGeom prst="roundRect">
+            <a:avLst>
+              <a:gd name="adj" fmla="val 50000"/>
+            </a:avLst>
+          </a:prstGeom>
+          <a:solidFill>
+            <a:srgbClr val="C9A227"/>
+          </a:solidFill>
+          <a:ln>
+            <a:noFill/>
+          </a:ln>
+          <a:effectLst/>
+        </p:spPr>
+        <p:style>
+          <a:lnRef idx="1">
+            <a:schemeClr val="accent1"/>
+          </a:lnRef>
+          <a:fillRef idx="3">
+            <a:schemeClr val="accent1"/>
+          </a:fillRef>
+          <a:effectRef idx="2">
+            <a:schemeClr val="accent1"/>
+          </a:effectRef>
+          <a:fontRef idx="minor">
+            <a:schemeClr val="lt1"/>
+          </a:fontRef>
+        </p:style>
+        <p:txBody>
+          <a:bodyPr rtlCol="0" anchor="ctr"/>
+          <a:lstStyle/>
+          <a:p>
+            <a:pPr algn="ctr"/>
+          </a:p>
+        </p:txBody>
+      </p:sp>
+      <p:sp>
+        <p:nvSpPr>
+          <p:cNvPr id="41" name="TextBox 40"/>
+          <p:cNvSpPr txBox="1"/>
+          <p:nvPr/>
+        </p:nvSpPr>
+        <p:spPr>
+          <a:xfrm>
+            <a:off x="10532681" y="4701838"/>
+            <a:ext cx="1052766" cy="237744"/>
+          </a:xfrm>
+          <a:prstGeom prst="rect">
+            <a:avLst/>
+          </a:prstGeom>
+          <a:noFill/>
+        </p:spPr>
+        <p:txBody>
+          <a:bodyPr wrap="square" anchor="ctr" lIns="0" rIns="0" tIns="0" bIns="0">
+            <a:spAutoFit/>
+          </a:bodyPr>
+          <a:lstStyle/>
+          <a:p>
+            <a:pPr algn="ctr">
+              <a:lnSpc>
+                <a:spcPct val="114000"/>
+              </a:lnSpc>
+            </a:pPr>
+            <a:r>
+              <a:rPr sz="850" b="1">
+                <a:solidFill>
+                  <a:srgbClr val="FFFFFF"/>
+                </a:solidFill>
+              </a:rPr>
+              <a:t>本节取证项 通过</a:t>
+            </a:r>
+          </a:p>
+        </p:txBody>
+      </p:sp>
+      <p:sp>
+        <p:nvSpPr>
+          <p:cNvPr id="42" name="TextBox 41"/>
+          <p:cNvSpPr txBox="1"/>
+          <p:nvPr/>
+        </p:nvSpPr>
+        <p:spPr>
+          <a:xfrm>
+            <a:off x="932688" y="4957870"/>
+            <a:ext cx="10671047" cy="400513"/>
+          </a:xfrm>
+          <a:prstGeom prst="rect">
+            <a:avLst/>
+          </a:prstGeom>
+          <a:noFill/>
+        </p:spPr>
+        <p:txBody>
+          <a:bodyPr wrap="square" anchor="t" lIns="0" rIns="0" tIns="0" bIns="0">
+            <a:spAutoFit/>
+          </a:bodyPr>
+          <a:lstStyle/>
+          <a:p>
+            <a:pPr algn="l">
+              <a:lnSpc>
+                <a:spcPct val="114000"/>
+              </a:lnSpc>
+            </a:pPr>
+            <a:r>
+              <a:rPr sz="950" b="0">
+                <a:solidFill>
+                  <a:srgbClr val="1B2B28"/>
+                </a:solidFill>
+              </a:rPr>
+              <a:t>pre-commit 钩子文件已产出=是（声明 2 个：black, flake8）｜.github/workflows 下 CI 文件 0 个｜工单优秀(B) 档前置=成立</a:t>
+            </a:r>
+          </a:p>
+        </p:txBody>
+      </p:sp>
+      <p:sp>
+        <p:nvSpPr>
+          <p:cNvPr id="43" name="Rounded Rectangle 42"/>
+          <p:cNvSpPr/>
+          <p:nvPr/>
+        </p:nvSpPr>
+        <p:spPr>
+          <a:xfrm>
+            <a:off x="475488" y="5477256"/>
+            <a:ext cx="11237976" cy="941831"/>
+          </a:xfrm>
+          <a:prstGeom prst="roundRect">
+            <a:avLst>
+              <a:gd name="adj" fmla="val 5000"/>
+            </a:avLst>
+          </a:prstGeom>
+          <a:solidFill>
+            <a:srgbClr val="E4F1EE"/>
+          </a:solidFill>
+          <a:ln>
+            <a:noFill/>
+          </a:ln>
+          <a:effectLst/>
+        </p:spPr>
+        <p:style>
+          <a:lnRef idx="1">
+            <a:schemeClr val="accent1"/>
+          </a:lnRef>
+          <a:fillRef idx="3">
+            <a:schemeClr val="accent1"/>
+          </a:fillRef>
+          <a:effectRef idx="2">
+            <a:schemeClr val="accent1"/>
+          </a:effectRef>
+          <a:fontRef idx="minor">
+            <a:schemeClr val="lt1"/>
+          </a:fontRef>
+        </p:style>
+        <p:txBody>
+          <a:bodyPr rtlCol="0" anchor="ctr"/>
+          <a:lstStyle/>
+          <a:p>
+            <a:pPr algn="ctr"/>
+          </a:p>
+        </p:txBody>
+      </p:sp>
+      <p:sp>
+        <p:nvSpPr>
+          <p:cNvPr id="44" name="Rounded Rectangle 43"/>
+          <p:cNvSpPr/>
+          <p:nvPr/>
+        </p:nvSpPr>
+        <p:spPr>
+          <a:xfrm>
+            <a:off x="475488" y="5477256"/>
+            <a:ext cx="54864" cy="941831"/>
+          </a:xfrm>
+          <a:prstGeom prst="roundRect">
+            <a:avLst>
+              <a:gd name="adj" fmla="val 50000"/>
+            </a:avLst>
+          </a:prstGeom>
+          <a:solidFill>
+            <a:srgbClr val="C9A227"/>
+          </a:solidFill>
+          <a:ln>
+            <a:noFill/>
+          </a:ln>
+          <a:effectLst/>
+        </p:spPr>
+        <p:style>
+          <a:lnRef idx="1">
+            <a:schemeClr val="accent1"/>
+          </a:lnRef>
+          <a:fillRef idx="3">
+            <a:schemeClr val="accent1"/>
+          </a:fillRef>
+          <a:effectRef idx="2">
+            <a:schemeClr val="accent1"/>
+          </a:effectRef>
+          <a:fontRef idx="minor">
+            <a:schemeClr val="lt1"/>
+          </a:fontRef>
+        </p:style>
+        <p:txBody>
+          <a:bodyPr rtlCol="0" anchor="ctr"/>
+          <a:lstStyle/>
+          <a:p>
+            <a:pPr algn="ctr"/>
+          </a:p>
+        </p:txBody>
+      </p:sp>
+      <p:sp>
+        <p:nvSpPr>
+          <p:cNvPr id="45" name="TextBox 44"/>
+          <p:cNvSpPr txBox="1"/>
+          <p:nvPr/>
+        </p:nvSpPr>
+        <p:spPr>
+          <a:xfrm>
+            <a:off x="676656" y="5550408"/>
+            <a:ext cx="10908792" cy="795527"/>
+          </a:xfrm>
+          <a:prstGeom prst="rect">
+            <a:avLst/>
+          </a:prstGeom>
+          <a:noFill/>
+        </p:spPr>
+        <p:txBody>
+          <a:bodyPr wrap="square" anchor="t" lIns="0" rIns="0" tIns="0" bIns="0">
+            <a:spAutoFit/>
+          </a:bodyPr>
+          <a:lstStyle/>
+          <a:p>
+            <a:pPr algn="l">
+              <a:lnSpc>
+                <a:spcPct val="124000"/>
+              </a:lnSpc>
+            </a:pPr>
+            <a:r>
+              <a:rPr sz="850" b="0">
+                <a:solidFill>
+                  <a:srgbClr val="1B2B28"/>
+                </a:solidFill>
+              </a:rPr>
+              <a:t>出处：工程化项目/p12_proj_template/output/report.txt 第 37 节「工单验收四档对照」——本机 2026-10-28 05:06 实跑落盘，上表数字逐字摘录、未改写。</a:t>
+            </a:r>
+          </a:p>
+          <a:p>
+            <a:pPr algn="l">
+              <a:lnSpc>
+                <a:spcPct val="124000"/>
+              </a:lnSpc>
+            </a:pPr>
+            <a:r>
+              <a:rPr sz="850" b="0">
+                <a:solidFill>
+                  <a:srgbClr val="1B2B28"/>
+                </a:solidFill>
+              </a:rPr>
+              <a:t>复现：cd 工程化项目/p12_proj_template &amp;&amp; python run.py &amp;&amp; python -m pytest -q -o addopts=''</a:t>
+            </a:r>
+          </a:p>
+          <a:p>
+            <a:pPr algn="l">
+              <a:lnSpc>
+                <a:spcPct val="124000"/>
+              </a:lnSpc>
+            </a:pPr>
+            <a:r>
+              <a:rPr sz="850" b="0">
+                <a:solidFill>
+                  <a:srgbClr val="1B2B28"/>
+                </a:solidFill>
+              </a:rPr>
+              <a:t>口径：表中「判定」沿用报告原词——绿=达标/通过，黄=仅本节取证项通过（未取证子项在报告里逐条点名），红=未达标。</a:t>
             </a:r>
           </a:p>
         </p:txBody>
@@ -6729,20 +8278,22 @@
       <p:grpSpPr/>
       <p:sp>
         <p:nvSpPr>
-          <p:cNvPr id="2" name="Rectangle 1"/>
+          <p:cNvPr id="2" name="Rounded Rectangle 1"/>
           <p:cNvSpPr/>
           <p:nvPr/>
         </p:nvSpPr>
         <p:spPr>
           <a:xfrm>
             <a:off x="0" y="0"/>
-            <a:ext cx="12192000" cy="1150000"/>
-          </a:xfrm>
-          <a:prstGeom prst="rect">
-            <a:avLst/>
+            <a:ext cx="12191695" cy="64008"/>
+          </a:xfrm>
+          <a:prstGeom prst="roundRect">
+            <a:avLst>
+              <a:gd name="adj" fmla="val 50000"/>
+            </a:avLst>
           </a:prstGeom>
           <a:solidFill>
-            <a:srgbClr val="010328"/>
+            <a:srgbClr val="0B5E54"/>
           </a:solidFill>
           <a:ln>
             <a:noFill/>
@@ -6773,20 +8324,60 @@
       </p:sp>
       <p:sp>
         <p:nvSpPr>
-          <p:cNvPr id="3" name="Rectangle 2"/>
+          <p:cNvPr id="3" name="TextBox 2"/>
+          <p:cNvSpPr txBox="1"/>
+          <p:nvPr/>
+        </p:nvSpPr>
+        <p:spPr>
+          <a:xfrm>
+            <a:off x="475488" y="146304"/>
+            <a:ext cx="8229600" cy="292608"/>
+          </a:xfrm>
+          <a:prstGeom prst="rect">
+            <a:avLst/>
+          </a:prstGeom>
+          <a:noFill/>
+        </p:spPr>
+        <p:txBody>
+          <a:bodyPr wrap="square" anchor="t" lIns="0" rIns="0" tIns="0" bIns="0">
+            <a:spAutoFit/>
+          </a:bodyPr>
+          <a:lstStyle/>
+          <a:p>
+            <a:pPr algn="l">
+              <a:lnSpc>
+                <a:spcPct val="114000"/>
+              </a:lnSpc>
+            </a:pPr>
+            <a:r>
+              <a:rPr sz="1100" b="1">
+                <a:solidFill>
+                  <a:srgbClr val="0B5E54"/>
+                </a:solidFill>
+              </a:rPr>
+              <a:t>工单实战 · 运行留证</a:t>
+            </a:r>
+          </a:p>
+        </p:txBody>
+      </p:sp>
+      <p:sp>
+        <p:nvSpPr>
+          <p:cNvPr id="4" name="Rounded Rectangle 3"/>
           <p:cNvSpPr/>
           <p:nvPr/>
         </p:nvSpPr>
         <p:spPr>
           <a:xfrm>
-            <a:off x="0" y="1150000"/>
-            <a:ext cx="2600000" cy="70000"/>
-          </a:xfrm>
-          <a:prstGeom prst="rect">
-            <a:avLst/>
+            <a:off x="475488" y="475488"/>
+            <a:ext cx="2027872" cy="310896"/>
+          </a:xfrm>
+          <a:prstGeom prst="roundRect">
+            <a:avLst>
+              <a:gd name="adj" fmla="val 50000"/>
+            </a:avLst>
           </a:prstGeom>
           <a:solidFill>
-            <a:srgbClr val="F5670F"/>
+            <a:srgbClr val="C9A227"/>
           </a:solidFill>
           <a:ln>
             <a:noFill/>
@@ -6817,14 +8408,14 @@
       </p:sp>
       <p:sp>
         <p:nvSpPr>
-          <p:cNvPr id="4" name="TextBox 3"/>
+          <p:cNvPr id="5" name="TextBox 4"/>
           <p:cNvSpPr txBox="1"/>
           <p:nvPr/>
         </p:nvSpPr>
         <p:spPr>
           <a:xfrm>
-            <a:off x="700000" y="300000"/>
-            <a:ext cx="10792000" cy="700000"/>
+            <a:off x="475488" y="475488"/>
+            <a:ext cx="2027872" cy="310896"/>
           </a:xfrm>
           <a:prstGeom prst="rect">
             <a:avLst/>
@@ -6832,39 +8423,86 @@
           <a:noFill/>
         </p:spPr>
         <p:txBody>
-          <a:bodyPr wrap="square" anchor="t">
+          <a:bodyPr wrap="square" anchor="ctr" lIns="0" rIns="0" tIns="0" bIns="0">
             <a:spAutoFit/>
           </a:bodyPr>
           <a:lstStyle/>
           <a:p>
-            <a:r>
-              <a:rPr sz="2000"/>
-              <a:t>P2.2 特征工厂完成态 · 完成后长这样（真实运行·参考实现）</a:t>
-            </a:r>
-          </a:p>
-        </p:txBody>
-      </p:sp>
-      <p:sp>
-        <p:nvSpPr>
-          <p:cNvPr id="5" name="Rectangle 4"/>
+            <a:pPr algn="ctr">
+              <a:lnSpc>
+                <a:spcPct val="114000"/>
+              </a:lnSpc>
+            </a:pPr>
+            <a:r>
+              <a:rPr sz="1050" b="1">
+                <a:solidFill>
+                  <a:srgbClr val="FFFFFF"/>
+                </a:solidFill>
+              </a:rPr>
+              <a:t>SCREENSHOT · 终端逐字截图</a:t>
+            </a:r>
+          </a:p>
+        </p:txBody>
+      </p:sp>
+      <p:sp>
+        <p:nvSpPr>
+          <p:cNvPr id="6" name="TextBox 5"/>
+          <p:cNvSpPr txBox="1"/>
+          <p:nvPr/>
+        </p:nvSpPr>
+        <p:spPr>
+          <a:xfrm>
+            <a:off x="475488" y="859536"/>
+            <a:ext cx="11237976" cy="502920"/>
+          </a:xfrm>
+          <a:prstGeom prst="rect">
+            <a:avLst/>
+          </a:prstGeom>
+          <a:noFill/>
+        </p:spPr>
+        <p:txBody>
+          <a:bodyPr wrap="square" anchor="t" lIns="0" rIns="0" tIns="0" bIns="0">
+            <a:spAutoFit/>
+          </a:bodyPr>
+          <a:lstStyle/>
+          <a:p>
+            <a:pPr algn="l">
+              <a:lnSpc>
+                <a:spcPct val="114000"/>
+              </a:lnSpc>
+            </a:pPr>
+            <a:r>
+              <a:rPr sz="2200" b="1">
+                <a:solidFill>
+                  <a:srgbClr val="1B2B28"/>
+                </a:solidFill>
+              </a:rPr>
+              <a:t>P1.2 工单验收四档对照 · 四档逐字输出截图</a:t>
+            </a:r>
+          </a:p>
+        </p:txBody>
+      </p:sp>
+      <p:sp>
+        <p:nvSpPr>
+          <p:cNvPr id="7" name="Rounded Rectangle 6"/>
           <p:cNvSpPr/>
           <p:nvPr/>
         </p:nvSpPr>
         <p:spPr>
           <a:xfrm>
-            <a:off x="700000" y="1900000"/>
-            <a:ext cx="4600000" cy="1600000"/>
-          </a:xfrm>
-          <a:prstGeom prst="rect">
-            <a:avLst/>
+            <a:off x="475488" y="1389888"/>
+            <a:ext cx="1234440" cy="27432"/>
+          </a:xfrm>
+          <a:prstGeom prst="roundRect">
+            <a:avLst>
+              <a:gd name="adj" fmla="val 50000"/>
+            </a:avLst>
           </a:prstGeom>
           <a:solidFill>
-            <a:srgbClr val="F3F6FD"/>
+            <a:srgbClr val="C9A227"/>
           </a:solidFill>
           <a:ln>
-            <a:solidFill>
-              <a:srgbClr val="C9D4EE"/>
-            </a:solidFill>
+            <a:noFill/>
           </a:ln>
           <a:effectLst/>
         </p:spPr>
@@ -6892,49 +8530,25 @@
       </p:sp>
       <p:sp>
         <p:nvSpPr>
-          <p:cNvPr id="6" name="TextBox 5"/>
-          <p:cNvSpPr txBox="1"/>
-          <p:nvPr/>
-        </p:nvSpPr>
-        <p:spPr>
-          <a:xfrm>
-            <a:off x="700000" y="2520000"/>
-            <a:ext cx="4600000" cy="500000"/>
-          </a:xfrm>
-          <a:prstGeom prst="rect">
-            <a:avLst/>
-          </a:prstGeom>
-          <a:noFill/>
-        </p:spPr>
-        <p:txBody>
-          <a:bodyPr wrap="square" anchor="t">
-            <a:spAutoFit/>
-          </a:bodyPr>
-          <a:lstStyle/>
-          <a:p/>
-        </p:txBody>
-      </p:sp>
-      <p:sp>
-        <p:nvSpPr>
-          <p:cNvPr id="7" name="Rectangle 6"/>
+          <p:cNvPr id="8" name="Rounded Rectangle 7"/>
           <p:cNvSpPr/>
           <p:nvPr/>
         </p:nvSpPr>
         <p:spPr>
           <a:xfrm>
-            <a:off x="700000" y="3700000"/>
-            <a:ext cx="4600000" cy="1600000"/>
-          </a:xfrm>
-          <a:prstGeom prst="rect">
-            <a:avLst/>
+            <a:off x="475488" y="6419088"/>
+            <a:ext cx="11237976" cy="10972"/>
+          </a:xfrm>
+          <a:prstGeom prst="roundRect">
+            <a:avLst>
+              <a:gd name="adj" fmla="val 50000"/>
+            </a:avLst>
           </a:prstGeom>
           <a:solidFill>
-            <a:srgbClr val="F3F6FD"/>
+            <a:srgbClr val="E4F1EE"/>
           </a:solidFill>
           <a:ln>
-            <a:solidFill>
-              <a:srgbClr val="C9D4EE"/>
-            </a:solidFill>
+            <a:noFill/>
           </a:ln>
           <a:effectLst/>
         </p:spPr>
@@ -6962,14 +8576,14 @@
       </p:sp>
       <p:sp>
         <p:nvSpPr>
-          <p:cNvPr id="8" name="TextBox 7"/>
+          <p:cNvPr id="9" name="TextBox 8"/>
           <p:cNvSpPr txBox="1"/>
           <p:nvPr/>
         </p:nvSpPr>
         <p:spPr>
           <a:xfrm>
-            <a:off x="700000" y="4320000"/>
-            <a:ext cx="4600000" cy="500000"/>
+            <a:off x="475488" y="6455664"/>
+            <a:ext cx="7315200" cy="292608"/>
           </a:xfrm>
           <a:prstGeom prst="rect">
             <a:avLst/>
@@ -6977,73 +8591,24 @@
           <a:noFill/>
         </p:spPr>
         <p:txBody>
-          <a:bodyPr wrap="square" anchor="ctr">
+          <a:bodyPr wrap="square" anchor="t" lIns="0" rIns="0" tIns="0" bIns="0">
             <a:spAutoFit/>
           </a:bodyPr>
           <a:lstStyle/>
           <a:p>
-            <a:pPr algn="ctr">
+            <a:pPr algn="l">
               <a:lnSpc>
-                <a:spcPct val="110000"/>
+                <a:spcPct val="114000"/>
               </a:lnSpc>
-              <a:spcAft>
-                <a:spcPts val="600"/>
-              </a:spcAft>
             </a:pPr>
             <a:r>
-              <a:rPr sz="1100" b="0">
+              <a:rPr sz="900" b="0">
                 <a:solidFill>
-                  <a:srgbClr val="1B2B28"/>
+                  <a:srgbClr val="5C6E6A"/>
                 </a:solidFill>
               </a:rPr>
-              <a:t>3. 箱线图已产出</a:t>
-            </a:r>
-          </a:p>
-        </p:txBody>
-      </p:sp>
-      <p:sp>
-        <p:nvSpPr>
-          <p:cNvPr id="9" name="Rectangle 8"/>
-          <p:cNvSpPr/>
-          <p:nvPr/>
-        </p:nvSpPr>
-        <p:spPr>
-          <a:xfrm>
-            <a:off x="5560000" y="1900000"/>
-            <a:ext cx="4600000" cy="1600000"/>
-          </a:xfrm>
-          <a:prstGeom prst="rect">
-            <a:avLst/>
-          </a:prstGeom>
-          <a:solidFill>
-            <a:srgbClr val="F3F6FD"/>
-          </a:solidFill>
-          <a:ln>
-            <a:solidFill>
-              <a:srgbClr val="C9D4EE"/>
-            </a:solidFill>
-          </a:ln>
-          <a:effectLst/>
-        </p:spPr>
-        <p:style>
-          <a:lnRef idx="1">
-            <a:schemeClr val="accent1"/>
-          </a:lnRef>
-          <a:fillRef idx="3">
-            <a:schemeClr val="accent1"/>
-          </a:fillRef>
-          <a:effectRef idx="2">
-            <a:schemeClr val="accent1"/>
-          </a:effectRef>
-          <a:fontRef idx="minor">
-            <a:schemeClr val="lt1"/>
-          </a:fontRef>
-        </p:style>
-        <p:txBody>
-          <a:bodyPr rtlCol="0" anchor="ctr"/>
-          <a:lstStyle/>
-          <a:p>
-            <a:pPr algn="ctr"/>
+              <a:t>两江智造集团 · Python程序设计（项目实战）</a:t>
+            </a:r>
           </a:p>
         </p:txBody>
       </p:sp>
@@ -7055,8 +8620,8 @@
         </p:nvSpPr>
         <p:spPr>
           <a:xfrm>
-            <a:off x="5560000" y="2520000"/>
-            <a:ext cx="4600000" cy="500000"/>
+            <a:off x="10597896" y="6537960"/>
+            <a:ext cx="996696" cy="301752"/>
           </a:xfrm>
           <a:prstGeom prst="rect">
             <a:avLst/>
@@ -7064,213 +8629,37 @@
           <a:noFill/>
         </p:spPr>
         <p:txBody>
-          <a:bodyPr wrap="square" anchor="ctr">
+          <a:bodyPr wrap="square" anchor="t" lIns="0" rIns="0" tIns="0" bIns="0">
             <a:spAutoFit/>
           </a:bodyPr>
           <a:lstStyle/>
           <a:p>
-            <a:pPr algn="ctr">
+            <a:pPr algn="r">
               <a:lnSpc>
-                <a:spcPct val="110000"/>
+                <a:spcPct val="114000"/>
               </a:lnSpc>
-              <a:spcAft>
-                <a:spcPts val="600"/>
-              </a:spcAft>
-            </a:pPr>
-            <a:r>
-              <a:rPr sz="1100" b="0">
-                <a:solidFill>
-                  <a:srgbClr val="1B2B28"/>
-                </a:solidFill>
-              </a:rPr>
-              <a:t>2. 计算耗时 &lt; 100ms（向量化）</a:t>
-            </a:r>
-          </a:p>
-        </p:txBody>
-      </p:sp>
-      <p:sp>
-        <p:nvSpPr>
-          <p:cNvPr id="11" name="Rectangle 10"/>
-          <p:cNvSpPr/>
-          <p:nvPr/>
-        </p:nvSpPr>
-        <p:spPr>
-          <a:xfrm>
-            <a:off x="5560000" y="3700000"/>
-            <a:ext cx="4600000" cy="1600000"/>
-          </a:xfrm>
-          <a:prstGeom prst="rect">
-            <a:avLst/>
-          </a:prstGeom>
-          <a:solidFill>
-            <a:srgbClr val="F3F6FD"/>
-          </a:solidFill>
-          <a:ln>
-            <a:solidFill>
-              <a:srgbClr val="C9D4EE"/>
-            </a:solidFill>
-          </a:ln>
-          <a:effectLst/>
-        </p:spPr>
-        <p:style>
-          <a:lnRef idx="1">
-            <a:schemeClr val="accent1"/>
-          </a:lnRef>
-          <a:fillRef idx="3">
-            <a:schemeClr val="accent1"/>
-          </a:fillRef>
-          <a:effectRef idx="2">
-            <a:schemeClr val="accent1"/>
-          </a:effectRef>
-          <a:fontRef idx="minor">
-            <a:schemeClr val="lt1"/>
-          </a:fontRef>
-        </p:style>
-        <p:txBody>
-          <a:bodyPr rtlCol="0" anchor="ctr"/>
-          <a:lstStyle/>
-          <a:p>
-            <a:pPr algn="ctr"/>
-          </a:p>
-        </p:txBody>
-      </p:sp>
-      <p:sp>
-        <p:nvSpPr>
-          <p:cNvPr id="12" name="TextBox 11"/>
-          <p:cNvSpPr txBox="1"/>
-          <p:nvPr/>
-        </p:nvSpPr>
-        <p:spPr>
-          <a:xfrm>
-            <a:off x="5560000" y="4320000"/>
-            <a:ext cx="4600000" cy="500000"/>
-          </a:xfrm>
-          <a:prstGeom prst="rect">
-            <a:avLst/>
-          </a:prstGeom>
-          <a:noFill/>
-        </p:spPr>
-        <p:txBody>
-          <a:bodyPr wrap="square" anchor="ctr">
-            <a:spAutoFit/>
-          </a:bodyPr>
-          <a:lstStyle/>
-          <a:p>
-            <a:pPr algn="ctr">
-              <a:lnSpc>
-                <a:spcPct val="110000"/>
-              </a:lnSpc>
-              <a:spcAft>
-                <a:spcPts val="600"/>
-              </a:spcAft>
-            </a:pPr>
-            <a:r>
-              <a:rPr sz="1100" b="0">
-                <a:solidFill>
-                  <a:srgbClr val="1B2B28"/>
-                </a:solidFill>
-              </a:rPr>
-              <a:t>4. 特征字典五列齐全</a:t>
-            </a:r>
-          </a:p>
-        </p:txBody>
-      </p:sp>
-      <p:sp>
-        <p:nvSpPr>
-          <p:cNvPr id="13" name="Rectangle 12"/>
-          <p:cNvSpPr/>
-          <p:nvPr/>
-        </p:nvSpPr>
-        <p:spPr>
-          <a:xfrm>
-            <a:off x="500000" y="6500000"/>
-            <a:ext cx="11100000" cy="20000"/>
-          </a:xfrm>
-          <a:prstGeom prst="rect">
-            <a:avLst/>
-          </a:prstGeom>
-          <a:solidFill>
-            <a:srgbClr val="C9D4EE"/>
-          </a:solidFill>
-          <a:ln>
-            <a:noFill/>
-          </a:ln>
-          <a:effectLst/>
-        </p:spPr>
-        <p:style>
-          <a:lnRef idx="1">
-            <a:schemeClr val="accent1"/>
-          </a:lnRef>
-          <a:fillRef idx="3">
-            <a:schemeClr val="accent1"/>
-          </a:fillRef>
-          <a:effectRef idx="2">
-            <a:schemeClr val="accent1"/>
-          </a:effectRef>
-          <a:fontRef idx="minor">
-            <a:schemeClr val="lt1"/>
-          </a:fontRef>
-        </p:style>
-        <p:txBody>
-          <a:bodyPr rtlCol="0" anchor="ctr"/>
-          <a:lstStyle/>
-          <a:p>
-            <a:pPr algn="ctr"/>
-          </a:p>
-        </p:txBody>
-      </p:sp>
-      <p:sp>
-        <p:nvSpPr>
-          <p:cNvPr id="14" name="TextBox 13"/>
-          <p:cNvSpPr txBox="1"/>
-          <p:nvPr/>
-        </p:nvSpPr>
-        <p:spPr>
-          <a:xfrm>
-            <a:off x="500000" y="6540000"/>
-            <a:ext cx="7000000" cy="300000"/>
-          </a:xfrm>
-          <a:prstGeom prst="rect">
-            <a:avLst/>
-          </a:prstGeom>
-          <a:noFill/>
-        </p:spPr>
-        <p:txBody>
-          <a:bodyPr wrap="square" anchor="t">
-            <a:spAutoFit/>
-          </a:bodyPr>
-          <a:lstStyle/>
-          <a:p>
-            <a:pPr algn="l">
-              <a:lnSpc>
-                <a:spcPct val="110000"/>
-              </a:lnSpc>
-              <a:spcAft>
-                <a:spcPts val="600"/>
-              </a:spcAft>
             </a:pPr>
             <a:r>
               <a:rPr sz="1000" b="0">
                 <a:solidFill>
                   <a:srgbClr val="8A97B5"/>
                 </a:solidFill>
-                <a:latin typeface="微软雅黑"/>
               </a:rPr>
-              <a:t>两江智造集团 · Python程序设计（项目实战）</a:t>
-            </a:r>
-          </a:p>
-        </p:txBody>
-      </p:sp>
-      <p:sp>
-        <p:nvSpPr>
-          <p:cNvPr id="15" name="TextBox 14"/>
+              <a:t>5 / 10</a:t>
+            </a:r>
+          </a:p>
+        </p:txBody>
+      </p:sp>
+      <p:sp>
+        <p:nvSpPr>
+          <p:cNvPr id="11" name="TextBox 10"/>
           <p:cNvSpPr txBox="1"/>
           <p:nvPr/>
         </p:nvSpPr>
         <p:spPr>
           <a:xfrm>
-            <a:off x="10600000" y="6540000"/>
-            <a:ext cx="1000000" cy="300000"/>
+            <a:off x="475488" y="1517904"/>
+            <a:ext cx="11237976" cy="237744"/>
           </a:xfrm>
           <a:prstGeom prst="rect">
             <a:avLst/>
@@ -7278,55 +8667,89 @@
           <a:noFill/>
         </p:spPr>
         <p:txBody>
-          <a:bodyPr wrap="square" anchor="t">
+          <a:bodyPr wrap="square" anchor="t" lIns="0" rIns="0" tIns="0" bIns="0">
             <a:spAutoFit/>
           </a:bodyPr>
           <a:lstStyle/>
           <a:p>
-            <a:pPr algn="r">
+            <a:pPr algn="l">
               <a:lnSpc>
-                <a:spcPct val="110000"/>
+                <a:spcPct val="114000"/>
               </a:lnSpc>
-              <a:spcAft>
-                <a:spcPts val="600"/>
-              </a:spcAft>
             </a:pPr>
             <a:r>
               <a:rPr sz="1000" b="0">
                 <a:solidFill>
-                  <a:srgbClr val="8A97B5"/>
+                  <a:srgbClr val="5C6E6A"/>
                 </a:solidFill>
-                <a:latin typeface="微软雅黑"/>
               </a:rPr>
-              <a:t>8 / 10</a:t>
+              <a:t>终端窗口截图：由 report.txt 本节逐字渲染，未手工改写</a:t>
             </a:r>
           </a:p>
         </p:txBody>
       </p:sp>
       <p:pic>
         <p:nvPicPr>
-          <p:cNvPr id="16" name="Picture 15" descr="shot_w22.png"/>
+          <p:cNvPr id="12" name="Picture 11" descr="p12_proj_template_workorder.png"/>
           <p:cNvPicPr>
             <a:picLocks noChangeAspect="1"/>
           </p:cNvPicPr>
           <p:nvPr/>
         </p:nvPicPr>
         <p:blipFill>
-          <a:blip r:embed="rId5"/>
+          <a:blip r:embed="rId2"/>
           <a:stretch>
             <a:fillRect/>
           </a:stretch>
         </p:blipFill>
         <p:spPr>
           <a:xfrm>
-            <a:off x="1499205" y="1900000"/>
-            <a:ext cx="3001589" cy="1600000"/>
+            <a:off x="475488" y="1823437"/>
+            <a:ext cx="11237976" cy="3787198"/>
           </a:xfrm>
           <a:prstGeom prst="rect">
             <a:avLst/>
           </a:prstGeom>
         </p:spPr>
       </p:pic>
+      <p:sp>
+        <p:nvSpPr>
+          <p:cNvPr id="13" name="TextBox 12"/>
+          <p:cNvSpPr txBox="1"/>
+          <p:nvPr/>
+        </p:nvSpPr>
+        <p:spPr>
+          <a:xfrm>
+            <a:off x="475488" y="5647210"/>
+            <a:ext cx="11237976" cy="256032"/>
+          </a:xfrm>
+          <a:prstGeom prst="rect">
+            <a:avLst/>
+          </a:prstGeom>
+          <a:noFill/>
+        </p:spPr>
+        <p:txBody>
+          <a:bodyPr wrap="square" anchor="t" lIns="0" rIns="0" tIns="0" bIns="0">
+            <a:spAutoFit/>
+          </a:bodyPr>
+          <a:lstStyle/>
+          <a:p>
+            <a:pPr algn="l">
+              <a:lnSpc>
+                <a:spcPct val="114000"/>
+              </a:lnSpc>
+            </a:pPr>
+            <a:r>
+              <a:rPr sz="850" b="0">
+                <a:solidFill>
+                  <a:srgbClr val="5C6E6A"/>
+                </a:solidFill>
+              </a:rPr>
+              <a:t>▲ p12_proj_template：工单验收四档对照 第 37 行起的四档逐字原文（绿=达标/通过，黄=仅本节取证项，橙=未实测项）</a:t>
+            </a:r>
+          </a:p>
+        </p:txBody>
+      </p:sp>
     </p:spTree>
   </p:cSld>
   <p:clrMapOvr>
@@ -7347,20 +8770,22 @@
       <p:grpSpPr/>
       <p:sp>
         <p:nvSpPr>
-          <p:cNvPr id="2" name="Rectangle 1"/>
+          <p:cNvPr id="2" name="Rounded Rectangle 1"/>
           <p:cNvSpPr/>
           <p:nvPr/>
         </p:nvSpPr>
         <p:spPr>
           <a:xfrm>
             <a:off x="0" y="0"/>
-            <a:ext cx="12192000" cy="6858000"/>
-          </a:xfrm>
-          <a:prstGeom prst="rect">
-            <a:avLst/>
+            <a:ext cx="12191695" cy="64008"/>
+          </a:xfrm>
+          <a:prstGeom prst="roundRect">
+            <a:avLst>
+              <a:gd name="adj" fmla="val 50000"/>
+            </a:avLst>
           </a:prstGeom>
           <a:solidFill>
-            <a:srgbClr val="010328"/>
+            <a:srgbClr val="0B5E54"/>
           </a:solidFill>
           <a:ln>
             <a:noFill/>
@@ -7391,20 +8816,60 @@
       </p:sp>
       <p:sp>
         <p:nvSpPr>
-          <p:cNvPr id="3" name="Rectangle 2"/>
+          <p:cNvPr id="3" name="TextBox 2"/>
+          <p:cNvSpPr txBox="1"/>
+          <p:nvPr/>
+        </p:nvSpPr>
+        <p:spPr>
+          <a:xfrm>
+            <a:off x="475488" y="146304"/>
+            <a:ext cx="8229600" cy="292608"/>
+          </a:xfrm>
+          <a:prstGeom prst="rect">
+            <a:avLst/>
+          </a:prstGeom>
+          <a:noFill/>
+        </p:spPr>
+        <p:txBody>
+          <a:bodyPr wrap="square" anchor="t" lIns="0" rIns="0" tIns="0" bIns="0">
+            <a:spAutoFit/>
+          </a:bodyPr>
+          <a:lstStyle/>
+          <a:p>
+            <a:pPr algn="l">
+              <a:lnSpc>
+                <a:spcPct val="114000"/>
+              </a:lnSpc>
+            </a:pPr>
+            <a:r>
+              <a:rPr sz="1100" b="1">
+                <a:solidFill>
+                  <a:srgbClr val="0B5E54"/>
+                </a:solidFill>
+              </a:rPr>
+              <a:t>工单实战 · 运行留证</a:t>
+            </a:r>
+          </a:p>
+        </p:txBody>
+      </p:sp>
+      <p:sp>
+        <p:nvSpPr>
+          <p:cNvPr id="4" name="Rounded Rectangle 3"/>
           <p:cNvSpPr/>
           <p:nvPr/>
         </p:nvSpPr>
         <p:spPr>
           <a:xfrm>
-            <a:off x="0" y="2880360"/>
-            <a:ext cx="12192000" cy="50000"/>
-          </a:xfrm>
-          <a:prstGeom prst="rect">
-            <a:avLst/>
+            <a:off x="475488" y="475488"/>
+            <a:ext cx="2027872" cy="310896"/>
+          </a:xfrm>
+          <a:prstGeom prst="roundRect">
+            <a:avLst>
+              <a:gd name="adj" fmla="val 50000"/>
+            </a:avLst>
           </a:prstGeom>
           <a:solidFill>
-            <a:srgbClr val="F5670F"/>
+            <a:srgbClr val="C9A227"/>
           </a:solidFill>
           <a:ln>
             <a:noFill/>
@@ -7435,14 +8900,14 @@
       </p:sp>
       <p:sp>
         <p:nvSpPr>
-          <p:cNvPr id="4" name="TextBox 3"/>
+          <p:cNvPr id="5" name="TextBox 4"/>
           <p:cNvSpPr txBox="1"/>
           <p:nvPr/>
         </p:nvSpPr>
         <p:spPr>
           <a:xfrm>
-            <a:off x="0" y="1645920"/>
-            <a:ext cx="12192000" cy="1500000"/>
+            <a:off x="475488" y="475488"/>
+            <a:ext cx="2027872" cy="310896"/>
           </a:xfrm>
           <a:prstGeom prst="rect">
             <a:avLst/>
@@ -7450,41 +8915,37 @@
           <a:noFill/>
         </p:spPr>
         <p:txBody>
-          <a:bodyPr wrap="square" anchor="t">
+          <a:bodyPr wrap="square" anchor="ctr" lIns="0" rIns="0" tIns="0" bIns="0">
             <a:spAutoFit/>
           </a:bodyPr>
           <a:lstStyle/>
           <a:p>
             <a:pPr algn="ctr">
               <a:lnSpc>
-                <a:spcPct val="110000"/>
+                <a:spcPct val="114000"/>
               </a:lnSpc>
-              <a:spcAft>
-                <a:spcPts val="600"/>
-              </a:spcAft>
             </a:pPr>
             <a:r>
-              <a:rPr sz="5400" b="1">
+              <a:rPr sz="1050" b="1">
                 <a:solidFill>
                   <a:srgbClr val="FFFFFF"/>
                 </a:solidFill>
-                <a:latin typeface="微软雅黑"/>
               </a:rPr>
-              <a:t>THANKS</a:t>
-            </a:r>
-          </a:p>
-        </p:txBody>
-      </p:sp>
-      <p:sp>
-        <p:nvSpPr>
-          <p:cNvPr id="5" name="TextBox 4"/>
+              <a:t>SCREENSHOT · 终端逐字截图</a:t>
+            </a:r>
+          </a:p>
+        </p:txBody>
+      </p:sp>
+      <p:sp>
+        <p:nvSpPr>
+          <p:cNvPr id="6" name="TextBox 5"/>
           <p:cNvSpPr txBox="1"/>
           <p:nvPr/>
         </p:nvSpPr>
         <p:spPr>
           <a:xfrm>
-            <a:off x="0" y="3429000"/>
-            <a:ext cx="12192000" cy="800000"/>
+            <a:off x="475488" y="859536"/>
+            <a:ext cx="11237976" cy="502920"/>
           </a:xfrm>
           <a:prstGeom prst="rect">
             <a:avLst/>
@@ -7492,89 +8953,45 @@
           <a:noFill/>
         </p:spPr>
         <p:txBody>
-          <a:bodyPr wrap="square" anchor="t">
+          <a:bodyPr wrap="square" anchor="t" lIns="0" rIns="0" tIns="0" bIns="0">
             <a:spAutoFit/>
           </a:bodyPr>
           <a:lstStyle/>
           <a:p>
-            <a:pPr algn="ctr">
+            <a:pPr algn="l">
               <a:lnSpc>
-                <a:spcPct val="110000"/>
+                <a:spcPct val="114000"/>
               </a:lnSpc>
-              <a:spcAft>
-                <a:spcPts val="600"/>
-              </a:spcAft>
             </a:pPr>
             <a:r>
               <a:rPr sz="2200" b="1">
                 <a:solidFill>
-                  <a:srgbClr val="F5670F"/>
+                  <a:srgbClr val="1B2B28"/>
                 </a:solidFill>
-                <a:latin typeface="微软雅黑"/>
               </a:rPr>
-              <a:t>感谢聆听 · 动手实践出真知</a:t>
-            </a:r>
-          </a:p>
-        </p:txBody>
-      </p:sp>
-      <p:sp>
-        <p:nvSpPr>
-          <p:cNvPr id="6" name="TextBox 5"/>
-          <p:cNvSpPr txBox="1"/>
-          <p:nvPr/>
-        </p:nvSpPr>
-        <p:spPr>
-          <a:xfrm>
-            <a:off x="0" y="4526280"/>
-            <a:ext cx="12192000" cy="600000"/>
-          </a:xfrm>
-          <a:prstGeom prst="rect">
-            <a:avLst/>
-          </a:prstGeom>
-          <a:noFill/>
-        </p:spPr>
-        <p:txBody>
-          <a:bodyPr wrap="square" anchor="t">
-            <a:spAutoFit/>
-          </a:bodyPr>
-          <a:lstStyle/>
-          <a:p>
-            <a:pPr algn="ctr">
-              <a:lnSpc>
-                <a:spcPct val="110000"/>
-              </a:lnSpc>
-              <a:spcAft>
-                <a:spcPts val="600"/>
-              </a:spcAft>
-            </a:pPr>
-            <a:r>
-              <a:rPr sz="1400" b="0">
-                <a:solidFill>
-                  <a:srgbClr val="BBC6E6"/>
-                </a:solidFill>
-                <a:latin typeface="微软雅黑"/>
-              </a:rPr>
-              <a:t>以生为本   |   做中学 · 学中做</a:t>
-            </a:r>
-          </a:p>
-        </p:txBody>
-      </p:sp>
-      <p:sp>
-        <p:nvSpPr>
-          <p:cNvPr id="7" name="Rectangle 6"/>
+              <a:t>P1.2 · 另一套阶梯逐字输出＋pytest 全量实跑</a:t>
+            </a:r>
+          </a:p>
+        </p:txBody>
+      </p:sp>
+      <p:sp>
+        <p:nvSpPr>
+          <p:cNvPr id="7" name="Rounded Rectangle 6"/>
           <p:cNvSpPr/>
           <p:nvPr/>
         </p:nvSpPr>
         <p:spPr>
           <a:xfrm>
-            <a:off x="500000" y="6500000"/>
-            <a:ext cx="11100000" cy="20000"/>
-          </a:xfrm>
-          <a:prstGeom prst="rect">
-            <a:avLst/>
+            <a:off x="475488" y="1389888"/>
+            <a:ext cx="1234440" cy="27432"/>
+          </a:xfrm>
+          <a:prstGeom prst="roundRect">
+            <a:avLst>
+              <a:gd name="adj" fmla="val 50000"/>
+            </a:avLst>
           </a:prstGeom>
           <a:solidFill>
-            <a:srgbClr val="C9D4EE"/>
+            <a:srgbClr val="C9A227"/>
           </a:solidFill>
           <a:ln>
             <a:noFill/>
@@ -7605,14 +9022,60 @@
       </p:sp>
       <p:sp>
         <p:nvSpPr>
-          <p:cNvPr id="8" name="TextBox 7"/>
+          <p:cNvPr id="8" name="Rounded Rectangle 7"/>
+          <p:cNvSpPr/>
+          <p:nvPr/>
+        </p:nvSpPr>
+        <p:spPr>
+          <a:xfrm>
+            <a:off x="475488" y="6419088"/>
+            <a:ext cx="11237976" cy="10972"/>
+          </a:xfrm>
+          <a:prstGeom prst="roundRect">
+            <a:avLst>
+              <a:gd name="adj" fmla="val 50000"/>
+            </a:avLst>
+          </a:prstGeom>
+          <a:solidFill>
+            <a:srgbClr val="E4F1EE"/>
+          </a:solidFill>
+          <a:ln>
+            <a:noFill/>
+          </a:ln>
+          <a:effectLst/>
+        </p:spPr>
+        <p:style>
+          <a:lnRef idx="1">
+            <a:schemeClr val="accent1"/>
+          </a:lnRef>
+          <a:fillRef idx="3">
+            <a:schemeClr val="accent1"/>
+          </a:fillRef>
+          <a:effectRef idx="2">
+            <a:schemeClr val="accent1"/>
+          </a:effectRef>
+          <a:fontRef idx="minor">
+            <a:schemeClr val="lt1"/>
+          </a:fontRef>
+        </p:style>
+        <p:txBody>
+          <a:bodyPr rtlCol="0" anchor="ctr"/>
+          <a:lstStyle/>
+          <a:p>
+            <a:pPr algn="ctr"/>
+          </a:p>
+        </p:txBody>
+      </p:sp>
+      <p:sp>
+        <p:nvSpPr>
+          <p:cNvPr id="9" name="TextBox 8"/>
           <p:cNvSpPr txBox="1"/>
           <p:nvPr/>
         </p:nvSpPr>
         <p:spPr>
           <a:xfrm>
-            <a:off x="500000" y="6540000"/>
-            <a:ext cx="7000000" cy="300000"/>
+            <a:off x="475488" y="6455664"/>
+            <a:ext cx="7315200" cy="292608"/>
           </a:xfrm>
           <a:prstGeom prst="rect">
             <a:avLst/>
@@ -7620,41 +9083,75 @@
           <a:noFill/>
         </p:spPr>
         <p:txBody>
-          <a:bodyPr wrap="square" anchor="t">
+          <a:bodyPr wrap="square" anchor="t" lIns="0" rIns="0" tIns="0" bIns="0">
             <a:spAutoFit/>
           </a:bodyPr>
           <a:lstStyle/>
           <a:p>
             <a:pPr algn="l">
               <a:lnSpc>
-                <a:spcPct val="110000"/>
+                <a:spcPct val="114000"/>
               </a:lnSpc>
-              <a:spcAft>
-                <a:spcPts val="600"/>
-              </a:spcAft>
+            </a:pPr>
+            <a:r>
+              <a:rPr sz="900" b="0">
+                <a:solidFill>
+                  <a:srgbClr val="5C6E6A"/>
+                </a:solidFill>
+              </a:rPr>
+              <a:t>两江智造集团 · Python程序设计（项目实战）</a:t>
+            </a:r>
+          </a:p>
+        </p:txBody>
+      </p:sp>
+      <p:sp>
+        <p:nvSpPr>
+          <p:cNvPr id="10" name="TextBox 9"/>
+          <p:cNvSpPr txBox="1"/>
+          <p:nvPr/>
+        </p:nvSpPr>
+        <p:spPr>
+          <a:xfrm>
+            <a:off x="10597896" y="6537960"/>
+            <a:ext cx="996696" cy="301752"/>
+          </a:xfrm>
+          <a:prstGeom prst="rect">
+            <a:avLst/>
+          </a:prstGeom>
+          <a:noFill/>
+        </p:spPr>
+        <p:txBody>
+          <a:bodyPr wrap="square" anchor="t" lIns="0" rIns="0" tIns="0" bIns="0">
+            <a:spAutoFit/>
+          </a:bodyPr>
+          <a:lstStyle/>
+          <a:p>
+            <a:pPr algn="r">
+              <a:lnSpc>
+                <a:spcPct val="114000"/>
+              </a:lnSpc>
             </a:pPr>
             <a:r>
               <a:rPr sz="1000" b="0">
                 <a:solidFill>
                   <a:srgbClr val="8A97B5"/>
                 </a:solidFill>
-                <a:latin typeface="微软雅黑"/>
               </a:rPr>
-              <a:t>两江智造集团 · Python程序设计（项目实战）</a:t>
-            </a:r>
-          </a:p>
-        </p:txBody>
-      </p:sp>
-      <p:sp>
-        <p:nvSpPr>
-          <p:cNvPr id="9" name="TextBox 8"/>
+              <a:t>6 / 10</a:t>
+            </a:r>
+          </a:p>
+        </p:txBody>
+      </p:sp>
+      <p:sp>
+        <p:nvSpPr>
+          <p:cNvPr id="11" name="TextBox 10"/>
           <p:cNvSpPr txBox="1"/>
           <p:nvPr/>
         </p:nvSpPr>
         <p:spPr>
           <a:xfrm>
-            <a:off x="10600000" y="6540000"/>
-            <a:ext cx="1000000" cy="300000"/>
+            <a:off x="475488" y="1517904"/>
+            <a:ext cx="11237976" cy="237744"/>
           </a:xfrm>
           <a:prstGeom prst="rect">
             <a:avLst/>
@@ -7662,27 +9159,147 @@
           <a:noFill/>
         </p:spPr>
         <p:txBody>
-          <a:bodyPr wrap="square" anchor="ctr">
+          <a:bodyPr wrap="square" anchor="t" lIns="0" rIns="0" tIns="0" bIns="0">
             <a:spAutoFit/>
           </a:bodyPr>
           <a:lstStyle/>
           <a:p>
-            <a:pPr algn="r">
+            <a:pPr algn="l">
               <a:lnSpc>
-                <a:spcPct val="110000"/>
+                <a:spcPct val="114000"/>
               </a:lnSpc>
-              <a:spcAft>
-                <a:spcPts val="600"/>
-              </a:spcAft>
             </a:pPr>
             <a:r>
               <a:rPr sz="1000" b="0">
                 <a:solidFill>
-                  <a:srgbClr val="8A97B5"/>
+                  <a:srgbClr val="5C6E6A"/>
                 </a:solidFill>
-                <a:latin typeface="微软雅黑"/>
               </a:rPr>
-              <a:t>9 / 10</a:t>
+              <a:t>上：p12_proj_template 分层达标逐字输出（见上一页）｜下：pytest 全量实跑（退出码 0，全绿）</a:t>
+            </a:r>
+          </a:p>
+        </p:txBody>
+      </p:sp>
+      <p:pic>
+        <p:nvPicPr>
+          <p:cNvPr id="12" name="Picture 11" descr="p12_proj_template_classroom.png"/>
+          <p:cNvPicPr>
+            <a:picLocks noChangeAspect="1"/>
+          </p:cNvPicPr>
+          <p:nvPr/>
+        </p:nvPicPr>
+        <p:blipFill>
+          <a:blip r:embed="rId2"/>
+          <a:stretch>
+            <a:fillRect/>
+          </a:stretch>
+        </p:blipFill>
+        <p:spPr>
+          <a:xfrm>
+            <a:off x="2197198" y="1792224"/>
+            <a:ext cx="7794555" cy="2314983"/>
+          </a:xfrm>
+          <a:prstGeom prst="rect">
+            <a:avLst/>
+          </a:prstGeom>
+        </p:spPr>
+      </p:pic>
+      <p:sp>
+        <p:nvSpPr>
+          <p:cNvPr id="13" name="TextBox 12"/>
+          <p:cNvSpPr txBox="1"/>
+          <p:nvPr/>
+        </p:nvSpPr>
+        <p:spPr>
+          <a:xfrm>
+            <a:off x="475488" y="4143782"/>
+            <a:ext cx="11237976" cy="256032"/>
+          </a:xfrm>
+          <a:prstGeom prst="rect">
+            <a:avLst/>
+          </a:prstGeom>
+          <a:noFill/>
+        </p:spPr>
+        <p:txBody>
+          <a:bodyPr wrap="square" anchor="t" lIns="0" rIns="0" tIns="0" bIns="0">
+            <a:spAutoFit/>
+          </a:bodyPr>
+          <a:lstStyle/>
+          <a:p>
+            <a:pPr algn="l">
+              <a:lnSpc>
+                <a:spcPct val="114000"/>
+              </a:lnSpc>
+            </a:pPr>
+            <a:r>
+              <a:rPr sz="850" b="0">
+                <a:solidFill>
+                  <a:srgbClr val="5C6E6A"/>
+                </a:solidFill>
+              </a:rPr>
+              <a:t>▲ 分层达标（第 49 行起）：四档逐字原文，未改写</a:t>
+            </a:r>
+          </a:p>
+        </p:txBody>
+      </p:sp>
+      <p:pic>
+        <p:nvPicPr>
+          <p:cNvPr id="14" name="Picture 13" descr="p12_proj_template_pytest.png"/>
+          <p:cNvPicPr>
+            <a:picLocks noChangeAspect="1"/>
+          </p:cNvPicPr>
+          <p:nvPr/>
+        </p:nvPicPr>
+        <p:blipFill>
+          <a:blip r:embed="rId3"/>
+          <a:stretch>
+            <a:fillRect/>
+          </a:stretch>
+        </p:blipFill>
+        <p:spPr>
+          <a:xfrm>
+            <a:off x="2197198" y="4418102"/>
+            <a:ext cx="7794555" cy="1223745"/>
+          </a:xfrm>
+          <a:prstGeom prst="rect">
+            <a:avLst/>
+          </a:prstGeom>
+        </p:spPr>
+      </p:pic>
+      <p:sp>
+        <p:nvSpPr>
+          <p:cNvPr id="15" name="TextBox 14"/>
+          <p:cNvSpPr txBox="1"/>
+          <p:nvPr/>
+        </p:nvSpPr>
+        <p:spPr>
+          <a:xfrm>
+            <a:off x="475488" y="5678424"/>
+            <a:ext cx="11237976" cy="256032"/>
+          </a:xfrm>
+          <a:prstGeom prst="rect">
+            <a:avLst/>
+          </a:prstGeom>
+          <a:noFill/>
+        </p:spPr>
+        <p:txBody>
+          <a:bodyPr wrap="square" anchor="t" lIns="0" rIns="0" tIns="0" bIns="0">
+            <a:spAutoFit/>
+          </a:bodyPr>
+          <a:lstStyle/>
+          <a:p>
+            <a:pPr algn="l">
+              <a:lnSpc>
+                <a:spcPct val="114000"/>
+              </a:lnSpc>
+            </a:pPr>
+            <a:r>
+              <a:rPr sz="850" b="0">
+                <a:solidFill>
+                  <a:srgbClr val="5C6E6A"/>
+                </a:solidFill>
+              </a:rPr>
+              <a:t>▲ pytest：81 passed in 1.30s（本机实跑，非示例）</a:t>
             </a:r>
           </a:p>
         </p:txBody>
@@ -7830,7 +9447,7 @@
                 </a:solidFill>
                 <a:latin typeface="微软雅黑"/>
               </a:rPr>
-              <a:t>下次课预告（第3周）</a:t>
+              <a:t>总结评价与课后任务</a:t>
             </a:r>
           </a:p>
         </p:txBody>
@@ -7843,8 +9460,8 @@
         </p:nvSpPr>
         <p:spPr>
           <a:xfrm>
-            <a:off x="760000" y="1900000"/>
-            <a:ext cx="10900000" cy="1600000"/>
+            <a:off x="800000" y="1950000"/>
+            <a:ext cx="10600000" cy="1500000"/>
           </a:xfrm>
           <a:prstGeom prst="rect">
             <a:avLst/>
@@ -7881,58 +9498,14 @@
       </p:sp>
       <p:sp>
         <p:nvSpPr>
-          <p:cNvPr id="6" name="Rectangle 5"/>
-          <p:cNvSpPr/>
-          <p:nvPr/>
-        </p:nvSpPr>
-        <p:spPr>
-          <a:xfrm>
-            <a:off x="760000" y="1900000"/>
-            <a:ext cx="150000" cy="1600000"/>
-          </a:xfrm>
-          <a:prstGeom prst="rect">
-            <a:avLst/>
-          </a:prstGeom>
-          <a:solidFill>
-            <a:srgbClr val="F5670F"/>
-          </a:solidFill>
-          <a:ln>
-            <a:noFill/>
-          </a:ln>
-          <a:effectLst/>
-        </p:spPr>
-        <p:style>
-          <a:lnRef idx="1">
-            <a:schemeClr val="accent1"/>
-          </a:lnRef>
-          <a:fillRef idx="3">
-            <a:schemeClr val="accent1"/>
-          </a:fillRef>
-          <a:effectRef idx="2">
-            <a:schemeClr val="accent1"/>
-          </a:effectRef>
-          <a:fontRef idx="minor">
-            <a:schemeClr val="lt1"/>
-          </a:fontRef>
-        </p:style>
-        <p:txBody>
-          <a:bodyPr rtlCol="0" anchor="ctr"/>
-          <a:lstStyle/>
-          <a:p>
-            <a:pPr algn="ctr"/>
-          </a:p>
-        </p:txBody>
-      </p:sp>
-      <p:sp>
-        <p:nvSpPr>
-          <p:cNvPr id="7" name="TextBox 6"/>
+          <p:cNvPr id="6" name="TextBox 5"/>
           <p:cNvSpPr txBox="1"/>
           <p:nvPr/>
         </p:nvSpPr>
         <p:spPr>
           <a:xfrm>
-            <a:off x="1020000" y="2050000"/>
-            <a:ext cx="10500000" cy="1400000"/>
+            <a:off x="1000000" y="2050000"/>
+            <a:ext cx="10300000" cy="1400000"/>
           </a:xfrm>
           <a:prstGeom prst="rect">
             <a:avLst/>
@@ -7954,13 +9527,13 @@
               </a:spcAft>
             </a:pPr>
             <a:r>
-              <a:rPr sz="1700" b="1">
+              <a:rPr sz="1500" b="1">
                 <a:solidFill>
-                  <a:srgbClr val="010328"/>
+                  <a:srgbClr val="0545E8"/>
                 </a:solidFill>
                 <a:latin typeface="微软雅黑"/>
               </a:rPr>
-              <a:t>主题: 七步管道构建与质量自测——应用：见工单start</a:t>
+              <a:t>评价（10分钟）：</a:t>
             </a:r>
           </a:p>
           <a:p>
@@ -7973,13 +9546,64 @@
               </a:spcAft>
             </a:pPr>
             <a:r>
-              <a:rPr sz="1300" b="0">
+              <a:rPr sz="1400" b="0">
                 <a:solidFill>
-                  <a:srgbClr val="44546A"/>
+                  <a:srgbClr val="010328"/>
                 </a:solidFill>
                 <a:latin typeface="微软雅黑"/>
               </a:rPr>
-              <a:t>预习快问: dropna/fillna/interpolate各适用什么场景？</a:t>
+              <a:t>按D/C/B/A量表当堂评分；工单24小时内反馈评语与改进建议。</a:t>
+            </a:r>
+          </a:p>
+        </p:txBody>
+      </p:sp>
+      <p:sp>
+        <p:nvSpPr>
+          <p:cNvPr id="7" name="TextBox 6"/>
+          <p:cNvSpPr txBox="1"/>
+          <p:nvPr/>
+        </p:nvSpPr>
+        <p:spPr>
+          <a:xfrm>
+            <a:off x="850000" y="3700000"/>
+            <a:ext cx="10600000" cy="700000"/>
+          </a:xfrm>
+          <a:prstGeom prst="rect">
+            <a:avLst/>
+          </a:prstGeom>
+          <a:noFill/>
+        </p:spPr>
+        <p:txBody>
+          <a:bodyPr wrap="square" anchor="t">
+            <a:spAutoFit/>
+          </a:bodyPr>
+          <a:lstStyle/>
+          <a:p>
+            <a:pPr algn="l">
+              <a:lnSpc>
+                <a:spcPct val="120000"/>
+              </a:lnSpc>
+              <a:spcAft>
+                <a:spcPts val="600"/>
+              </a:spcAft>
+            </a:pPr>
+            <a:r>
+              <a:rPr sz="1400" b="1">
+                <a:solidFill>
+                  <a:srgbClr val="F5670F"/>
+                </a:solidFill>
+                <a:latin typeface="微软雅黑"/>
+              </a:rPr>
+              <a:t>1. </a:t>
+            </a:r>
+            <a:r>
+              <a:rPr sz="1400" b="0">
+                <a:solidFill>
+                  <a:srgbClr val="010328"/>
+                </a:solidFill>
+                <a:latin typeface="微软雅黑"/>
+              </a:rPr>
+              <a:t>1. 完成工单P1.2《标准Python工程模板》：及格标准环境可用+仓库初始化+结构完整；优秀标准依赖可还原+CI配置+检查工具集成；</a:t>
             </a:r>
           </a:p>
         </p:txBody>
@@ -7992,8 +9616,110 @@
         </p:nvSpPr>
         <p:spPr>
           <a:xfrm>
-            <a:off x="760000" y="3900000"/>
-            <a:ext cx="10900000" cy="900000"/>
+            <a:off x="850000" y="4420000"/>
+            <a:ext cx="10600000" cy="700000"/>
+          </a:xfrm>
+          <a:prstGeom prst="rect">
+            <a:avLst/>
+          </a:prstGeom>
+          <a:noFill/>
+        </p:spPr>
+        <p:txBody>
+          <a:bodyPr wrap="square" anchor="t">
+            <a:spAutoFit/>
+          </a:bodyPr>
+          <a:lstStyle/>
+          <a:p>
+            <a:pPr algn="l">
+              <a:lnSpc>
+                <a:spcPct val="120000"/>
+              </a:lnSpc>
+              <a:spcAft>
+                <a:spcPts val="600"/>
+              </a:spcAft>
+            </a:pPr>
+            <a:r>
+              <a:rPr sz="1400" b="1">
+                <a:solidFill>
+                  <a:srgbClr val="F5670F"/>
+                </a:solidFill>
+                <a:latin typeface="微软雅黑"/>
+              </a:rPr>
+              <a:t>2. </a:t>
+            </a:r>
+            <a:r>
+              <a:rPr sz="1400" b="0">
+                <a:solidFill>
+                  <a:srgbClr val="010328"/>
+                </a:solidFill>
+                <a:latin typeface="微软雅黑"/>
+              </a:rPr>
+              <a:t>2. 用模板重构P1.1练习代码并提交规范commit；</a:t>
+            </a:r>
+          </a:p>
+        </p:txBody>
+      </p:sp>
+      <p:sp>
+        <p:nvSpPr>
+          <p:cNvPr id="9" name="TextBox 8"/>
+          <p:cNvSpPr txBox="1"/>
+          <p:nvPr/>
+        </p:nvSpPr>
+        <p:spPr>
+          <a:xfrm>
+            <a:off x="850000" y="5140000"/>
+            <a:ext cx="10600000" cy="700000"/>
+          </a:xfrm>
+          <a:prstGeom prst="rect">
+            <a:avLst/>
+          </a:prstGeom>
+          <a:noFill/>
+        </p:spPr>
+        <p:txBody>
+          <a:bodyPr wrap="square" anchor="t">
+            <a:spAutoFit/>
+          </a:bodyPr>
+          <a:lstStyle/>
+          <a:p>
+            <a:pPr algn="l">
+              <a:lnSpc>
+                <a:spcPct val="120000"/>
+              </a:lnSpc>
+              <a:spcAft>
+                <a:spcPts val="600"/>
+              </a:spcAft>
+            </a:pPr>
+            <a:r>
+              <a:rPr sz="1400" b="1">
+                <a:solidFill>
+                  <a:srgbClr val="F5670F"/>
+                </a:solidFill>
+                <a:latin typeface="微软雅黑"/>
+              </a:rPr>
+              <a:t>3. </a:t>
+            </a:r>
+            <a:r>
+              <a:rPr sz="1400" b="0">
+                <a:solidFill>
+                  <a:srgbClr val="010328"/>
+                </a:solidFill>
+                <a:latin typeface="微软雅黑"/>
+              </a:rPr>
+              <a:t>3. 预习Pandas的Series与DataFrame概念。</a:t>
+            </a:r>
+          </a:p>
+        </p:txBody>
+      </p:sp>
+      <p:sp>
+        <p:nvSpPr>
+          <p:cNvPr id="10" name="TextBox 9"/>
+          <p:cNvSpPr txBox="1"/>
+          <p:nvPr/>
+        </p:nvSpPr>
+        <p:spPr>
+          <a:xfrm>
+            <a:off x="850000" y="5960000"/>
+            <a:ext cx="10600000" cy="500000"/>
           </a:xfrm>
           <a:prstGeom prst="rect">
             <a:avLst/>
@@ -8015,15 +9741,91 @@
               </a:spcAft>
             </a:pPr>
             <a:r>
-              <a:rPr sz="1400" b="1">
+              <a:rPr sz="1300" b="1">
                 <a:solidFill>
-                  <a:srgbClr val="0545E8"/>
+                  <a:srgbClr val="0475B6"/>
                 </a:solidFill>
                 <a:latin typeface="微软雅黑"/>
               </a:rPr>
-              <a:t>课前完成：导学单 + 预习自测 + starter环境自检</a:t>
-            </a:r>
-          </a:p>
+              <a:t>下次课预告：</a:t>
+            </a:r>
+            <a:r>
+              <a:rPr sz="1300" b="0">
+                <a:solidFill>
+                  <a:srgbClr val="44546A"/>
+                </a:solidFill>
+                <a:latin typeface="微软雅黑"/>
+              </a:rPr>
+              <a:t>见下次课工单任务书</a:t>
+            </a:r>
+          </a:p>
+        </p:txBody>
+      </p:sp>
+      <p:sp>
+        <p:nvSpPr>
+          <p:cNvPr id="11" name="Rectangle 10"/>
+          <p:cNvSpPr/>
+          <p:nvPr/>
+        </p:nvSpPr>
+        <p:spPr>
+          <a:xfrm>
+            <a:off x="500000" y="6500000"/>
+            <a:ext cx="11100000" cy="20000"/>
+          </a:xfrm>
+          <a:prstGeom prst="rect">
+            <a:avLst/>
+          </a:prstGeom>
+          <a:solidFill>
+            <a:srgbClr val="C9D4EE"/>
+          </a:solidFill>
+          <a:ln>
+            <a:noFill/>
+          </a:ln>
+          <a:effectLst/>
+        </p:spPr>
+        <p:style>
+          <a:lnRef idx="1">
+            <a:schemeClr val="accent1"/>
+          </a:lnRef>
+          <a:fillRef idx="3">
+            <a:schemeClr val="accent1"/>
+          </a:fillRef>
+          <a:effectRef idx="2">
+            <a:schemeClr val="accent1"/>
+          </a:effectRef>
+          <a:fontRef idx="minor">
+            <a:schemeClr val="lt1"/>
+          </a:fontRef>
+        </p:style>
+        <p:txBody>
+          <a:bodyPr rtlCol="0" anchor="ctr"/>
+          <a:lstStyle/>
+          <a:p>
+            <a:pPr algn="ctr"/>
+          </a:p>
+        </p:txBody>
+      </p:sp>
+      <p:sp>
+        <p:nvSpPr>
+          <p:cNvPr id="12" name="TextBox 11"/>
+          <p:cNvSpPr txBox="1"/>
+          <p:nvPr/>
+        </p:nvSpPr>
+        <p:spPr>
+          <a:xfrm>
+            <a:off x="500000" y="6540000"/>
+            <a:ext cx="7000000" cy="300000"/>
+          </a:xfrm>
+          <a:prstGeom prst="rect">
+            <a:avLst/>
+          </a:prstGeom>
+          <a:noFill/>
+        </p:spPr>
+        <p:txBody>
+          <a:bodyPr wrap="square" anchor="t">
+            <a:spAutoFit/>
+          </a:bodyPr>
+          <a:lstStyle/>
           <a:p>
             <a:pPr algn="l">
               <a:lnSpc>
@@ -8034,13 +9836,55 @@
               </a:spcAft>
             </a:pPr>
             <a:r>
-              <a:rPr sz="1250" b="0">
+              <a:rPr sz="1000" b="0">
                 <a:solidFill>
-                  <a:srgbClr val="44546A"/>
+                  <a:srgbClr val="8A97B5"/>
                 </a:solidFill>
                 <a:latin typeface="微软雅黑"/>
               </a:rPr>
-              <a:t>带着问题来上课——Predict先于Run</a:t>
+              <a:t>两江智造集团 · Python程序设计（项目实战）</a:t>
+            </a:r>
+          </a:p>
+        </p:txBody>
+      </p:sp>
+      <p:sp>
+        <p:nvSpPr>
+          <p:cNvPr id="13" name="TextBox 12"/>
+          <p:cNvSpPr txBox="1"/>
+          <p:nvPr/>
+        </p:nvSpPr>
+        <p:spPr>
+          <a:xfrm>
+            <a:off x="10600000" y="6540000"/>
+            <a:ext cx="1000000" cy="300000"/>
+          </a:xfrm>
+          <a:prstGeom prst="rect">
+            <a:avLst/>
+          </a:prstGeom>
+          <a:noFill/>
+        </p:spPr>
+        <p:txBody>
+          <a:bodyPr wrap="square" anchor="t">
+            <a:spAutoFit/>
+          </a:bodyPr>
+          <a:lstStyle/>
+          <a:p>
+            <a:pPr algn="r">
+              <a:lnSpc>
+                <a:spcPct val="110000"/>
+              </a:lnSpc>
+              <a:spcAft>
+                <a:spcPts val="600"/>
+              </a:spcAft>
+            </a:pPr>
+            <a:r>
+              <a:rPr sz="1000" b="0">
+                <a:solidFill>
+                  <a:srgbClr val="8A97B5"/>
+                </a:solidFill>
+                <a:latin typeface="微软雅黑"/>
+              </a:rPr>
+              <a:t>7 / 10</a:t>
             </a:r>
           </a:p>
         </p:txBody>
@@ -8065,22 +9909,20 @@
       <p:grpSpPr/>
       <p:sp>
         <p:nvSpPr>
-          <p:cNvPr id="2" name="Rounded Rectangle 1"/>
+          <p:cNvPr id="2" name="Rectangle 1"/>
           <p:cNvSpPr/>
           <p:nvPr/>
         </p:nvSpPr>
         <p:spPr>
           <a:xfrm>
             <a:off x="0" y="0"/>
-            <a:ext cx="12191695" cy="64008"/>
-          </a:xfrm>
-          <a:prstGeom prst="roundRect">
-            <a:avLst>
-              <a:gd name="adj" fmla="val 50000"/>
-            </a:avLst>
+            <a:ext cx="12192000" cy="1150000"/>
+          </a:xfrm>
+          <a:prstGeom prst="rect">
+            <a:avLst/>
           </a:prstGeom>
           <a:solidFill>
-            <a:srgbClr val="0B5E54"/>
+            <a:srgbClr val="010328"/>
           </a:solidFill>
           <a:ln>
             <a:noFill/>
@@ -8111,60 +9953,20 @@
       </p:sp>
       <p:sp>
         <p:nvSpPr>
-          <p:cNvPr id="3" name="TextBox 2"/>
-          <p:cNvSpPr txBox="1"/>
-          <p:nvPr/>
-        </p:nvSpPr>
-        <p:spPr>
-          <a:xfrm>
-            <a:off x="475488" y="146304"/>
-            <a:ext cx="8229600" cy="292608"/>
-          </a:xfrm>
-          <a:prstGeom prst="rect">
-            <a:avLst/>
-          </a:prstGeom>
-          <a:noFill/>
-        </p:spPr>
-        <p:txBody>
-          <a:bodyPr wrap="square" anchor="t" lIns="0" rIns="0" tIns="0" bIns="0">
-            <a:spAutoFit/>
-          </a:bodyPr>
-          <a:lstStyle/>
-          <a:p>
-            <a:pPr algn="l">
-              <a:lnSpc>
-                <a:spcPct val="114000"/>
-              </a:lnSpc>
-            </a:pPr>
-            <a:r>
-              <a:rPr sz="1100" b="1">
-                <a:solidFill>
-                  <a:srgbClr val="0B5E54"/>
-                </a:solidFill>
-              </a:rPr>
-              <a:t>工单实战 · 本次实跑结果</a:t>
-            </a:r>
-          </a:p>
-        </p:txBody>
-      </p:sp>
-      <p:sp>
-        <p:nvSpPr>
-          <p:cNvPr id="4" name="Rounded Rectangle 3"/>
+          <p:cNvPr id="3" name="Rectangle 2"/>
           <p:cNvSpPr/>
           <p:nvPr/>
         </p:nvSpPr>
         <p:spPr>
           <a:xfrm>
-            <a:off x="475488" y="475488"/>
-            <a:ext cx="1881187" cy="310896"/>
-          </a:xfrm>
-          <a:prstGeom prst="roundRect">
-            <a:avLst>
-              <a:gd name="adj" fmla="val 50000"/>
-            </a:avLst>
+            <a:off x="0" y="1150000"/>
+            <a:ext cx="2600000" cy="70000"/>
+          </a:xfrm>
+          <a:prstGeom prst="rect">
+            <a:avLst/>
           </a:prstGeom>
           <a:solidFill>
-            <a:srgbClr val="C9A227"/>
+            <a:srgbClr val="F5670F"/>
           </a:solidFill>
           <a:ln>
             <a:noFill/>
@@ -8195,14 +9997,14 @@
       </p:sp>
       <p:sp>
         <p:nvSpPr>
-          <p:cNvPr id="5" name="TextBox 4"/>
+          <p:cNvPr id="4" name="TextBox 3"/>
           <p:cNvSpPr txBox="1"/>
           <p:nvPr/>
         </p:nvSpPr>
         <p:spPr>
           <a:xfrm>
-            <a:off x="475488" y="475488"/>
-            <a:ext cx="1881187" cy="310896"/>
+            <a:off x="700000" y="300000"/>
+            <a:ext cx="10792000" cy="700000"/>
           </a:xfrm>
           <a:prstGeom prst="rect">
             <a:avLst/>
@@ -8210,83 +10012,365 @@
           <a:noFill/>
         </p:spPr>
         <p:txBody>
-          <a:bodyPr wrap="square" anchor="ctr" lIns="0" rIns="0" tIns="0" bIns="0">
+          <a:bodyPr wrap="square" anchor="t">
             <a:spAutoFit/>
           </a:bodyPr>
           <a:lstStyle/>
           <a:p>
+            <a:r>
+              <a:rPr sz="2000"/>
+              <a:t>P2.2 特征工厂完成态 · 完成后长这样（真实运行·参考实现）</a:t>
+            </a:r>
+          </a:p>
+        </p:txBody>
+      </p:sp>
+      <p:sp>
+        <p:nvSpPr>
+          <p:cNvPr id="5" name="Rectangle 4"/>
+          <p:cNvSpPr/>
+          <p:nvPr/>
+        </p:nvSpPr>
+        <p:spPr>
+          <a:xfrm>
+            <a:off x="700000" y="1900000"/>
+            <a:ext cx="4600000" cy="1600000"/>
+          </a:xfrm>
+          <a:prstGeom prst="rect">
+            <a:avLst/>
+          </a:prstGeom>
+          <a:solidFill>
+            <a:srgbClr val="F3F6FD"/>
+          </a:solidFill>
+          <a:ln>
+            <a:solidFill>
+              <a:srgbClr val="C9D4EE"/>
+            </a:solidFill>
+          </a:ln>
+          <a:effectLst/>
+        </p:spPr>
+        <p:style>
+          <a:lnRef idx="1">
+            <a:schemeClr val="accent1"/>
+          </a:lnRef>
+          <a:fillRef idx="3">
+            <a:schemeClr val="accent1"/>
+          </a:fillRef>
+          <a:effectRef idx="2">
+            <a:schemeClr val="accent1"/>
+          </a:effectRef>
+          <a:fontRef idx="minor">
+            <a:schemeClr val="lt1"/>
+          </a:fontRef>
+        </p:style>
+        <p:txBody>
+          <a:bodyPr rtlCol="0" anchor="ctr"/>
+          <a:lstStyle/>
+          <a:p>
+            <a:pPr algn="ctr"/>
+          </a:p>
+        </p:txBody>
+      </p:sp>
+      <p:sp>
+        <p:nvSpPr>
+          <p:cNvPr id="6" name="TextBox 5"/>
+          <p:cNvSpPr txBox="1"/>
+          <p:nvPr/>
+        </p:nvSpPr>
+        <p:spPr>
+          <a:xfrm>
+            <a:off x="700000" y="2520000"/>
+            <a:ext cx="4600000" cy="500000"/>
+          </a:xfrm>
+          <a:prstGeom prst="rect">
+            <a:avLst/>
+          </a:prstGeom>
+          <a:noFill/>
+        </p:spPr>
+        <p:txBody>
+          <a:bodyPr wrap="square" anchor="t">
+            <a:spAutoFit/>
+          </a:bodyPr>
+          <a:lstStyle/>
+          <a:p/>
+        </p:txBody>
+      </p:sp>
+      <p:sp>
+        <p:nvSpPr>
+          <p:cNvPr id="7" name="Rectangle 6"/>
+          <p:cNvSpPr/>
+          <p:nvPr/>
+        </p:nvSpPr>
+        <p:spPr>
+          <a:xfrm>
+            <a:off x="700000" y="3700000"/>
+            <a:ext cx="4600000" cy="1600000"/>
+          </a:xfrm>
+          <a:prstGeom prst="rect">
+            <a:avLst/>
+          </a:prstGeom>
+          <a:solidFill>
+            <a:srgbClr val="F3F6FD"/>
+          </a:solidFill>
+          <a:ln>
+            <a:solidFill>
+              <a:srgbClr val="C9D4EE"/>
+            </a:solidFill>
+          </a:ln>
+          <a:effectLst/>
+        </p:spPr>
+        <p:style>
+          <a:lnRef idx="1">
+            <a:schemeClr val="accent1"/>
+          </a:lnRef>
+          <a:fillRef idx="3">
+            <a:schemeClr val="accent1"/>
+          </a:fillRef>
+          <a:effectRef idx="2">
+            <a:schemeClr val="accent1"/>
+          </a:effectRef>
+          <a:fontRef idx="minor">
+            <a:schemeClr val="lt1"/>
+          </a:fontRef>
+        </p:style>
+        <p:txBody>
+          <a:bodyPr rtlCol="0" anchor="ctr"/>
+          <a:lstStyle/>
+          <a:p>
+            <a:pPr algn="ctr"/>
+          </a:p>
+        </p:txBody>
+      </p:sp>
+      <p:sp>
+        <p:nvSpPr>
+          <p:cNvPr id="8" name="TextBox 7"/>
+          <p:cNvSpPr txBox="1"/>
+          <p:nvPr/>
+        </p:nvSpPr>
+        <p:spPr>
+          <a:xfrm>
+            <a:off x="700000" y="4320000"/>
+            <a:ext cx="4600000" cy="500000"/>
+          </a:xfrm>
+          <a:prstGeom prst="rect">
+            <a:avLst/>
+          </a:prstGeom>
+          <a:noFill/>
+        </p:spPr>
+        <p:txBody>
+          <a:bodyPr wrap="square" anchor="ctr">
+            <a:spAutoFit/>
+          </a:bodyPr>
+          <a:lstStyle/>
+          <a:p>
             <a:pPr algn="ctr">
               <a:lnSpc>
-                <a:spcPct val="114000"/>
+                <a:spcPct val="110000"/>
               </a:lnSpc>
+              <a:spcAft>
+                <a:spcPts val="600"/>
+              </a:spcAft>
             </a:pPr>
             <a:r>
-              <a:rPr sz="1050" b="1">
-                <a:solidFill>
-                  <a:srgbClr val="FFFFFF"/>
-                </a:solidFill>
-              </a:rPr>
-              <a:t>REAL RUN · 四档逐字实测</a:t>
-            </a:r>
-          </a:p>
-        </p:txBody>
-      </p:sp>
-      <p:sp>
-        <p:nvSpPr>
-          <p:cNvPr id="6" name="TextBox 5"/>
-          <p:cNvSpPr txBox="1"/>
-          <p:nvPr/>
-        </p:nvSpPr>
-        <p:spPr>
-          <a:xfrm>
-            <a:off x="475488" y="859536"/>
-            <a:ext cx="11237976" cy="502920"/>
-          </a:xfrm>
-          <a:prstGeom prst="rect">
-            <a:avLst/>
-          </a:prstGeom>
-          <a:noFill/>
-        </p:spPr>
-        <p:txBody>
-          <a:bodyPr wrap="square" anchor="t" lIns="0" rIns="0" tIns="0" bIns="0">
-            <a:spAutoFit/>
-          </a:bodyPr>
-          <a:lstStyle/>
-          <a:p>
-            <a:pPr algn="l">
-              <a:lnSpc>
-                <a:spcPct val="114000"/>
-              </a:lnSpc>
-            </a:pPr>
-            <a:r>
-              <a:rPr sz="2200" b="1">
+              <a:rPr sz="1100" b="0">
                 <a:solidFill>
                   <a:srgbClr val="1B2B28"/>
                 </a:solidFill>
               </a:rPr>
-              <a:t>P1.2 p12_proj_template：本次 D/C/B/A 四档实测</a:t>
-            </a:r>
-          </a:p>
-        </p:txBody>
-      </p:sp>
-      <p:sp>
-        <p:nvSpPr>
-          <p:cNvPr id="7" name="Rounded Rectangle 6"/>
+              <a:t>3. 箱线图已产出</a:t>
+            </a:r>
+          </a:p>
+        </p:txBody>
+      </p:sp>
+      <p:sp>
+        <p:nvSpPr>
+          <p:cNvPr id="9" name="Rectangle 8"/>
           <p:cNvSpPr/>
           <p:nvPr/>
         </p:nvSpPr>
         <p:spPr>
           <a:xfrm>
-            <a:off x="475488" y="1389888"/>
-            <a:ext cx="1234440" cy="27432"/>
-          </a:xfrm>
-          <a:prstGeom prst="roundRect">
-            <a:avLst>
-              <a:gd name="adj" fmla="val 50000"/>
-            </a:avLst>
+            <a:off x="5560000" y="1900000"/>
+            <a:ext cx="4600000" cy="1600000"/>
+          </a:xfrm>
+          <a:prstGeom prst="rect">
+            <a:avLst/>
           </a:prstGeom>
           <a:solidFill>
-            <a:srgbClr val="C9A227"/>
+            <a:srgbClr val="F3F6FD"/>
+          </a:solidFill>
+          <a:ln>
+            <a:solidFill>
+              <a:srgbClr val="C9D4EE"/>
+            </a:solidFill>
+          </a:ln>
+          <a:effectLst/>
+        </p:spPr>
+        <p:style>
+          <a:lnRef idx="1">
+            <a:schemeClr val="accent1"/>
+          </a:lnRef>
+          <a:fillRef idx="3">
+            <a:schemeClr val="accent1"/>
+          </a:fillRef>
+          <a:effectRef idx="2">
+            <a:schemeClr val="accent1"/>
+          </a:effectRef>
+          <a:fontRef idx="minor">
+            <a:schemeClr val="lt1"/>
+          </a:fontRef>
+        </p:style>
+        <p:txBody>
+          <a:bodyPr rtlCol="0" anchor="ctr"/>
+          <a:lstStyle/>
+          <a:p>
+            <a:pPr algn="ctr"/>
+          </a:p>
+        </p:txBody>
+      </p:sp>
+      <p:sp>
+        <p:nvSpPr>
+          <p:cNvPr id="10" name="TextBox 9"/>
+          <p:cNvSpPr txBox="1"/>
+          <p:nvPr/>
+        </p:nvSpPr>
+        <p:spPr>
+          <a:xfrm>
+            <a:off x="5560000" y="2520000"/>
+            <a:ext cx="4600000" cy="500000"/>
+          </a:xfrm>
+          <a:prstGeom prst="rect">
+            <a:avLst/>
+          </a:prstGeom>
+          <a:noFill/>
+        </p:spPr>
+        <p:txBody>
+          <a:bodyPr wrap="square" anchor="ctr">
+            <a:spAutoFit/>
+          </a:bodyPr>
+          <a:lstStyle/>
+          <a:p>
+            <a:pPr algn="ctr">
+              <a:lnSpc>
+                <a:spcPct val="110000"/>
+              </a:lnSpc>
+              <a:spcAft>
+                <a:spcPts val="600"/>
+              </a:spcAft>
+            </a:pPr>
+            <a:r>
+              <a:rPr sz="1100" b="0">
+                <a:solidFill>
+                  <a:srgbClr val="1B2B28"/>
+                </a:solidFill>
+              </a:rPr>
+              <a:t>2. 计算耗时 &lt; 100ms（向量化）</a:t>
+            </a:r>
+          </a:p>
+        </p:txBody>
+      </p:sp>
+      <p:sp>
+        <p:nvSpPr>
+          <p:cNvPr id="11" name="Rectangle 10"/>
+          <p:cNvSpPr/>
+          <p:nvPr/>
+        </p:nvSpPr>
+        <p:spPr>
+          <a:xfrm>
+            <a:off x="5560000" y="3700000"/>
+            <a:ext cx="4600000" cy="1600000"/>
+          </a:xfrm>
+          <a:prstGeom prst="rect">
+            <a:avLst/>
+          </a:prstGeom>
+          <a:solidFill>
+            <a:srgbClr val="F3F6FD"/>
+          </a:solidFill>
+          <a:ln>
+            <a:solidFill>
+              <a:srgbClr val="C9D4EE"/>
+            </a:solidFill>
+          </a:ln>
+          <a:effectLst/>
+        </p:spPr>
+        <p:style>
+          <a:lnRef idx="1">
+            <a:schemeClr val="accent1"/>
+          </a:lnRef>
+          <a:fillRef idx="3">
+            <a:schemeClr val="accent1"/>
+          </a:fillRef>
+          <a:effectRef idx="2">
+            <a:schemeClr val="accent1"/>
+          </a:effectRef>
+          <a:fontRef idx="minor">
+            <a:schemeClr val="lt1"/>
+          </a:fontRef>
+        </p:style>
+        <p:txBody>
+          <a:bodyPr rtlCol="0" anchor="ctr"/>
+          <a:lstStyle/>
+          <a:p>
+            <a:pPr algn="ctr"/>
+          </a:p>
+        </p:txBody>
+      </p:sp>
+      <p:sp>
+        <p:nvSpPr>
+          <p:cNvPr id="12" name="TextBox 11"/>
+          <p:cNvSpPr txBox="1"/>
+          <p:nvPr/>
+        </p:nvSpPr>
+        <p:spPr>
+          <a:xfrm>
+            <a:off x="5560000" y="4320000"/>
+            <a:ext cx="4600000" cy="500000"/>
+          </a:xfrm>
+          <a:prstGeom prst="rect">
+            <a:avLst/>
+          </a:prstGeom>
+          <a:noFill/>
+        </p:spPr>
+        <p:txBody>
+          <a:bodyPr wrap="square" anchor="ctr">
+            <a:spAutoFit/>
+          </a:bodyPr>
+          <a:lstStyle/>
+          <a:p>
+            <a:pPr algn="ctr">
+              <a:lnSpc>
+                <a:spcPct val="110000"/>
+              </a:lnSpc>
+              <a:spcAft>
+                <a:spcPts val="600"/>
+              </a:spcAft>
+            </a:pPr>
+            <a:r>
+              <a:rPr sz="1100" b="0">
+                <a:solidFill>
+                  <a:srgbClr val="1B2B28"/>
+                </a:solidFill>
+              </a:rPr>
+              <a:t>4. 特征字典五列齐全</a:t>
+            </a:r>
+          </a:p>
+        </p:txBody>
+      </p:sp>
+      <p:sp>
+        <p:nvSpPr>
+          <p:cNvPr id="13" name="Rectangle 12"/>
+          <p:cNvSpPr/>
+          <p:nvPr/>
+        </p:nvSpPr>
+        <p:spPr>
+          <a:xfrm>
+            <a:off x="500000" y="6500000"/>
+            <a:ext cx="11100000" cy="20000"/>
+          </a:xfrm>
+          <a:prstGeom prst="rect">
+            <a:avLst/>
+          </a:prstGeom>
+          <a:solidFill>
+            <a:srgbClr val="C9D4EE"/>
           </a:solidFill>
           <a:ln>
             <a:noFill/>
@@ -8317,60 +10401,14 @@
       </p:sp>
       <p:sp>
         <p:nvSpPr>
-          <p:cNvPr id="8" name="Rounded Rectangle 7"/>
-          <p:cNvSpPr/>
-          <p:nvPr/>
-        </p:nvSpPr>
-        <p:spPr>
-          <a:xfrm>
-            <a:off x="475488" y="6419088"/>
-            <a:ext cx="11237976" cy="10972"/>
-          </a:xfrm>
-          <a:prstGeom prst="roundRect">
-            <a:avLst>
-              <a:gd name="adj" fmla="val 50000"/>
-            </a:avLst>
-          </a:prstGeom>
-          <a:solidFill>
-            <a:srgbClr val="E4F1EE"/>
-          </a:solidFill>
-          <a:ln>
-            <a:noFill/>
-          </a:ln>
-          <a:effectLst/>
-        </p:spPr>
-        <p:style>
-          <a:lnRef idx="1">
-            <a:schemeClr val="accent1"/>
-          </a:lnRef>
-          <a:fillRef idx="3">
-            <a:schemeClr val="accent1"/>
-          </a:fillRef>
-          <a:effectRef idx="2">
-            <a:schemeClr val="accent1"/>
-          </a:effectRef>
-          <a:fontRef idx="minor">
-            <a:schemeClr val="lt1"/>
-          </a:fontRef>
-        </p:style>
-        <p:txBody>
-          <a:bodyPr rtlCol="0" anchor="ctr"/>
-          <a:lstStyle/>
-          <a:p>
-            <a:pPr algn="ctr"/>
-          </a:p>
-        </p:txBody>
-      </p:sp>
-      <p:sp>
-        <p:nvSpPr>
-          <p:cNvPr id="9" name="TextBox 8"/>
+          <p:cNvPr id="14" name="TextBox 13"/>
           <p:cNvSpPr txBox="1"/>
           <p:nvPr/>
         </p:nvSpPr>
         <p:spPr>
           <a:xfrm>
-            <a:off x="475488" y="6455664"/>
-            <a:ext cx="7315200" cy="292608"/>
+            <a:off x="500000" y="6540000"/>
+            <a:ext cx="7000000" cy="300000"/>
           </a:xfrm>
           <a:prstGeom prst="rect">
             <a:avLst/>
@@ -8378,215 +10416,41 @@
           <a:noFill/>
         </p:spPr>
         <p:txBody>
-          <a:bodyPr wrap="square" anchor="t" lIns="0" rIns="0" tIns="0" bIns="0">
+          <a:bodyPr wrap="square" anchor="t">
             <a:spAutoFit/>
           </a:bodyPr>
           <a:lstStyle/>
           <a:p>
             <a:pPr algn="l">
               <a:lnSpc>
-                <a:spcPct val="114000"/>
+                <a:spcPct val="110000"/>
               </a:lnSpc>
-            </a:pPr>
-            <a:r>
-              <a:rPr sz="900" b="0">
-                <a:solidFill>
-                  <a:srgbClr val="5C6E6A"/>
-                </a:solidFill>
-              </a:rPr>
-              <a:t>两江智造集团 · Python程序设计（项目实战）</a:t>
-            </a:r>
-          </a:p>
-        </p:txBody>
-      </p:sp>
-      <p:sp>
-        <p:nvSpPr>
-          <p:cNvPr id="10" name="TextBox 9"/>
-          <p:cNvSpPr txBox="1"/>
-          <p:nvPr/>
-        </p:nvSpPr>
-        <p:spPr>
-          <a:xfrm>
-            <a:off x="10597896" y="6537960"/>
-            <a:ext cx="996696" cy="301752"/>
-          </a:xfrm>
-          <a:prstGeom prst="rect">
-            <a:avLst/>
-          </a:prstGeom>
-          <a:noFill/>
-        </p:spPr>
-        <p:txBody>
-          <a:bodyPr wrap="square" anchor="t" lIns="0" rIns="0" tIns="0" bIns="0">
-            <a:spAutoFit/>
-          </a:bodyPr>
-          <a:lstStyle/>
-          <a:p>
-            <a:pPr algn="r">
-              <a:lnSpc>
-                <a:spcPct val="114000"/>
-              </a:lnSpc>
+              <a:spcAft>
+                <a:spcPts val="600"/>
+              </a:spcAft>
             </a:pPr>
             <a:r>
               <a:rPr sz="1000" b="0">
                 <a:solidFill>
                   <a:srgbClr val="8A97B5"/>
                 </a:solidFill>
+                <a:latin typeface="微软雅黑"/>
               </a:rPr>
-              <a:t>4 / 10</a:t>
-            </a:r>
-          </a:p>
-        </p:txBody>
-      </p:sp>
-      <p:sp>
-        <p:nvSpPr>
-          <p:cNvPr id="11" name="Rounded Rectangle 10"/>
-          <p:cNvSpPr/>
-          <p:nvPr/>
-        </p:nvSpPr>
-        <p:spPr>
-          <a:xfrm>
-            <a:off x="475488" y="1554480"/>
-            <a:ext cx="11237976" cy="1030522"/>
-          </a:xfrm>
-          <a:prstGeom prst="roundRect">
-            <a:avLst>
-              <a:gd name="adj" fmla="val 6000"/>
-            </a:avLst>
-          </a:prstGeom>
-          <a:solidFill>
-            <a:srgbClr val="FFFFFF"/>
-          </a:solidFill>
-          <a:ln w="9525">
-            <a:solidFill>
-              <a:srgbClr val="E4F1EE"/>
-            </a:solidFill>
-          </a:ln>
-          <a:effectLst/>
-        </p:spPr>
-        <p:style>
-          <a:lnRef idx="1">
-            <a:schemeClr val="accent1"/>
-          </a:lnRef>
-          <a:fillRef idx="3">
-            <a:schemeClr val="accent1"/>
-          </a:fillRef>
-          <a:effectRef idx="2">
-            <a:schemeClr val="accent1"/>
-          </a:effectRef>
-          <a:fontRef idx="minor">
-            <a:schemeClr val="lt1"/>
-          </a:fontRef>
-        </p:style>
-        <p:txBody>
-          <a:bodyPr rtlCol="0" anchor="ctr"/>
-          <a:lstStyle/>
-          <a:p>
-            <a:pPr algn="ctr"/>
-          </a:p>
-        </p:txBody>
-      </p:sp>
-      <p:sp>
-        <p:nvSpPr>
-          <p:cNvPr id="12" name="Rounded Rectangle 11"/>
-          <p:cNvSpPr/>
-          <p:nvPr/>
-        </p:nvSpPr>
-        <p:spPr>
-          <a:xfrm>
-            <a:off x="475488" y="1554480"/>
-            <a:ext cx="54864" cy="1030522"/>
-          </a:xfrm>
-          <a:prstGeom prst="roundRect">
-            <a:avLst>
-              <a:gd name="adj" fmla="val 50000"/>
-            </a:avLst>
-          </a:prstGeom>
-          <a:solidFill>
-            <a:srgbClr val="5C6E6A"/>
-          </a:solidFill>
-          <a:ln>
-            <a:noFill/>
-          </a:ln>
-          <a:effectLst/>
-        </p:spPr>
-        <p:style>
-          <a:lnRef idx="1">
-            <a:schemeClr val="accent1"/>
-          </a:lnRef>
-          <a:fillRef idx="3">
-            <a:schemeClr val="accent1"/>
-          </a:fillRef>
-          <a:effectRef idx="2">
-            <a:schemeClr val="accent1"/>
-          </a:effectRef>
-          <a:fontRef idx="minor">
-            <a:schemeClr val="lt1"/>
-          </a:fontRef>
-        </p:style>
-        <p:txBody>
-          <a:bodyPr rtlCol="0" anchor="ctr"/>
-          <a:lstStyle/>
-          <a:p>
-            <a:pPr algn="ctr"/>
-          </a:p>
-        </p:txBody>
-      </p:sp>
-      <p:sp>
-        <p:nvSpPr>
-          <p:cNvPr id="13" name="Rounded Rectangle 12"/>
-          <p:cNvSpPr/>
-          <p:nvPr/>
-        </p:nvSpPr>
-        <p:spPr>
-          <a:xfrm>
-            <a:off x="621792" y="1636776"/>
-            <a:ext cx="237744" cy="237744"/>
-          </a:xfrm>
-          <a:prstGeom prst="roundRect">
-            <a:avLst>
-              <a:gd name="adj" fmla="val 28000"/>
-            </a:avLst>
-          </a:prstGeom>
-          <a:solidFill>
-            <a:srgbClr val="5C6E6A"/>
-          </a:solidFill>
-          <a:ln>
-            <a:noFill/>
-          </a:ln>
-          <a:effectLst/>
-        </p:spPr>
-        <p:style>
-          <a:lnRef idx="1">
-            <a:schemeClr val="accent1"/>
-          </a:lnRef>
-          <a:fillRef idx="3">
-            <a:schemeClr val="accent1"/>
-          </a:fillRef>
-          <a:effectRef idx="2">
-            <a:schemeClr val="accent1"/>
-          </a:effectRef>
-          <a:fontRef idx="minor">
-            <a:schemeClr val="lt1"/>
-          </a:fontRef>
-        </p:style>
-        <p:txBody>
-          <a:bodyPr rtlCol="0" anchor="ctr"/>
-          <a:lstStyle/>
-          <a:p>
-            <a:pPr algn="ctr"/>
-          </a:p>
-        </p:txBody>
-      </p:sp>
-      <p:sp>
-        <p:nvSpPr>
-          <p:cNvPr id="14" name="TextBox 13"/>
+              <a:t>两江智造集团 · Python程序设计（项目实战）</a:t>
+            </a:r>
+          </a:p>
+        </p:txBody>
+      </p:sp>
+      <p:sp>
+        <p:nvSpPr>
+          <p:cNvPr id="15" name="TextBox 14"/>
           <p:cNvSpPr txBox="1"/>
           <p:nvPr/>
         </p:nvSpPr>
         <p:spPr>
           <a:xfrm>
-            <a:off x="621792" y="1636776"/>
-            <a:ext cx="237744" cy="237744"/>
+            <a:off x="10600000" y="6540000"/>
+            <a:ext cx="1000000" cy="300000"/>
           </a:xfrm>
           <a:prstGeom prst="rect">
             <a:avLst/>
@@ -8594,1425 +10458,55 @@
           <a:noFill/>
         </p:spPr>
         <p:txBody>
-          <a:bodyPr wrap="square" anchor="ctr" lIns="0" rIns="0" tIns="0" bIns="0">
+          <a:bodyPr wrap="square" anchor="t">
             <a:spAutoFit/>
           </a:bodyPr>
           <a:lstStyle/>
           <a:p>
-            <a:pPr algn="ctr">
+            <a:pPr algn="r">
               <a:lnSpc>
-                <a:spcPct val="114000"/>
+                <a:spcPct val="110000"/>
               </a:lnSpc>
+              <a:spcAft>
+                <a:spcPts val="600"/>
+              </a:spcAft>
             </a:pPr>
             <a:r>
-              <a:rPr sz="1000" b="1">
+              <a:rPr sz="1000" b="0">
                 <a:solidFill>
-                  <a:srgbClr val="FFFFFF"/>
+                  <a:srgbClr val="8A97B5"/>
                 </a:solidFill>
+                <a:latin typeface="微软雅黑"/>
               </a:rPr>
-              <a:t>D</a:t>
-            </a:r>
-          </a:p>
-        </p:txBody>
-      </p:sp>
-      <p:sp>
-        <p:nvSpPr>
-          <p:cNvPr id="15" name="TextBox 14"/>
-          <p:cNvSpPr txBox="1"/>
-          <p:nvPr/>
-        </p:nvSpPr>
-        <p:spPr>
-          <a:xfrm>
-            <a:off x="932688" y="1618488"/>
-            <a:ext cx="8778240" cy="274320"/>
-          </a:xfrm>
-          <a:prstGeom prst="rect">
-            <a:avLst/>
-          </a:prstGeom>
-          <a:noFill/>
-        </p:spPr>
-        <p:txBody>
-          <a:bodyPr wrap="square" anchor="ctr" lIns="0" rIns="0" tIns="0" bIns="0">
-            <a:spAutoFit/>
-          </a:bodyPr>
-          <a:lstStyle/>
-          <a:p>
-            <a:pPr algn="l">
-              <a:lnSpc>
-                <a:spcPct val="114000"/>
-              </a:lnSpc>
-            </a:pPr>
-            <a:r>
-              <a:rPr sz="1050" b="1">
-                <a:solidFill>
-                  <a:srgbClr val="1B2B28"/>
-                </a:solidFill>
-              </a:rPr>
-              <a:t>及格</a:t>
-            </a:r>
-            <a:r>
-              <a:rPr sz="850" b="0">
-                <a:solidFill>
-                  <a:srgbClr val="5C6E6A"/>
-                </a:solidFill>
-              </a:rPr>
-              <a:t>   验收口径：</a:t>
-            </a:r>
-            <a:r>
-              <a:rPr sz="850" b="0">
-                <a:solidFill>
-                  <a:srgbClr val="5C6E6A"/>
-                </a:solidFill>
-              </a:rPr>
-              <a:t>conda环境激活可用+仓库初始化+结构完整+README</a:t>
-            </a:r>
-          </a:p>
-        </p:txBody>
-      </p:sp>
-      <p:sp>
-        <p:nvSpPr>
-          <p:cNvPr id="16" name="Rounded Rectangle 15"/>
-          <p:cNvSpPr/>
-          <p:nvPr/>
-        </p:nvSpPr>
-        <p:spPr>
-          <a:xfrm>
-            <a:off x="10532681" y="1645920"/>
-            <a:ext cx="1052766" cy="237744"/>
-          </a:xfrm>
-          <a:prstGeom prst="roundRect">
-            <a:avLst>
-              <a:gd name="adj" fmla="val 50000"/>
-            </a:avLst>
-          </a:prstGeom>
-          <a:solidFill>
-            <a:srgbClr val="C9A227"/>
-          </a:solidFill>
-          <a:ln>
-            <a:noFill/>
-          </a:ln>
-          <a:effectLst/>
-        </p:spPr>
-        <p:style>
-          <a:lnRef idx="1">
-            <a:schemeClr val="accent1"/>
-          </a:lnRef>
-          <a:fillRef idx="3">
-            <a:schemeClr val="accent1"/>
-          </a:fillRef>
-          <a:effectRef idx="2">
-            <a:schemeClr val="accent1"/>
-          </a:effectRef>
-          <a:fontRef idx="minor">
-            <a:schemeClr val="lt1"/>
-          </a:fontRef>
-        </p:style>
-        <p:txBody>
-          <a:bodyPr rtlCol="0" anchor="ctr"/>
-          <a:lstStyle/>
-          <a:p>
-            <a:pPr algn="ctr"/>
-          </a:p>
-        </p:txBody>
-      </p:sp>
-      <p:sp>
-        <p:nvSpPr>
-          <p:cNvPr id="17" name="TextBox 16"/>
-          <p:cNvSpPr txBox="1"/>
-          <p:nvPr/>
-        </p:nvSpPr>
-        <p:spPr>
-          <a:xfrm>
-            <a:off x="10532681" y="1645920"/>
-            <a:ext cx="1052766" cy="237744"/>
-          </a:xfrm>
-          <a:prstGeom prst="rect">
-            <a:avLst/>
-          </a:prstGeom>
-          <a:noFill/>
-        </p:spPr>
-        <p:txBody>
-          <a:bodyPr wrap="square" anchor="ctr" lIns="0" rIns="0" tIns="0" bIns="0">
-            <a:spAutoFit/>
-          </a:bodyPr>
-          <a:lstStyle/>
-          <a:p>
-            <a:pPr algn="ctr">
-              <a:lnSpc>
-                <a:spcPct val="114000"/>
-              </a:lnSpc>
-            </a:pPr>
-            <a:r>
-              <a:rPr sz="850" b="1">
-                <a:solidFill>
-                  <a:srgbClr val="FFFFFF"/>
-                </a:solidFill>
-              </a:rPr>
-              <a:t>本节取证项 通过</a:t>
-            </a:r>
-          </a:p>
-        </p:txBody>
-      </p:sp>
-      <p:sp>
-        <p:nvSpPr>
-          <p:cNvPr id="18" name="TextBox 17"/>
-          <p:cNvSpPr txBox="1"/>
-          <p:nvPr/>
-        </p:nvSpPr>
-        <p:spPr>
-          <a:xfrm>
-            <a:off x="932688" y="1901952"/>
-            <a:ext cx="10671047" cy="628186"/>
-          </a:xfrm>
-          <a:prstGeom prst="rect">
-            <a:avLst/>
-          </a:prstGeom>
-          <a:noFill/>
-        </p:spPr>
-        <p:txBody>
-          <a:bodyPr wrap="square" anchor="t" lIns="0" rIns="0" tIns="0" bIns="0">
-            <a:spAutoFit/>
-          </a:bodyPr>
-          <a:lstStyle/>
-          <a:p>
-            <a:pPr algn="l">
-              <a:lnSpc>
-                <a:spcPct val="114000"/>
-              </a:lnSpc>
-            </a:pPr>
-            <a:r>
-              <a:rPr sz="950" b="0">
-                <a:solidFill>
-                  <a:srgbClr val="1B2B28"/>
-                </a:solidFill>
-              </a:rPr>
-              <a:t>结构完整=是（四目录 4/4、模板缺失 0、空目录 0、.pyc 0）｜README.md 已落盘 889 字节且首行为一级标题=是｜仓库初始化三连（git init / git add . / git commit -m）=是｜venv 激活命令写在 setup_venv.sh=是｜本流水线解释器位于 conda 环境目录=是</a:t>
-            </a:r>
-          </a:p>
-        </p:txBody>
-      </p:sp>
-      <p:sp>
-        <p:nvSpPr>
-          <p:cNvPr id="19" name="Rounded Rectangle 18"/>
-          <p:cNvSpPr/>
-          <p:nvPr/>
-        </p:nvSpPr>
-        <p:spPr>
-          <a:xfrm>
-            <a:off x="475488" y="2649010"/>
-            <a:ext cx="11237976" cy="1030522"/>
-          </a:xfrm>
-          <a:prstGeom prst="roundRect">
-            <a:avLst>
-              <a:gd name="adj" fmla="val 6000"/>
-            </a:avLst>
-          </a:prstGeom>
-          <a:solidFill>
-            <a:srgbClr val="FFFFFF"/>
-          </a:solidFill>
-          <a:ln w="9525">
-            <a:solidFill>
-              <a:srgbClr val="E4F1EE"/>
-            </a:solidFill>
-          </a:ln>
-          <a:effectLst/>
-        </p:spPr>
-        <p:style>
-          <a:lnRef idx="1">
-            <a:schemeClr val="accent1"/>
-          </a:lnRef>
-          <a:fillRef idx="3">
-            <a:schemeClr val="accent1"/>
-          </a:fillRef>
-          <a:effectRef idx="2">
-            <a:schemeClr val="accent1"/>
-          </a:effectRef>
-          <a:fontRef idx="minor">
-            <a:schemeClr val="lt1"/>
-          </a:fontRef>
-        </p:style>
-        <p:txBody>
-          <a:bodyPr rtlCol="0" anchor="ctr"/>
-          <a:lstStyle/>
-          <a:p>
-            <a:pPr algn="ctr"/>
-          </a:p>
-        </p:txBody>
-      </p:sp>
-      <p:sp>
-        <p:nvSpPr>
-          <p:cNvPr id="20" name="Rounded Rectangle 19"/>
-          <p:cNvSpPr/>
-          <p:nvPr/>
-        </p:nvSpPr>
-        <p:spPr>
-          <a:xfrm>
-            <a:off x="475488" y="2649010"/>
-            <a:ext cx="54864" cy="1030522"/>
-          </a:xfrm>
-          <a:prstGeom prst="roundRect">
-            <a:avLst>
-              <a:gd name="adj" fmla="val 50000"/>
-            </a:avLst>
-          </a:prstGeom>
-          <a:solidFill>
-            <a:srgbClr val="157A6D"/>
-          </a:solidFill>
-          <a:ln>
-            <a:noFill/>
-          </a:ln>
-          <a:effectLst/>
-        </p:spPr>
-        <p:style>
-          <a:lnRef idx="1">
-            <a:schemeClr val="accent1"/>
-          </a:lnRef>
-          <a:fillRef idx="3">
-            <a:schemeClr val="accent1"/>
-          </a:fillRef>
-          <a:effectRef idx="2">
-            <a:schemeClr val="accent1"/>
-          </a:effectRef>
-          <a:fontRef idx="minor">
-            <a:schemeClr val="lt1"/>
-          </a:fontRef>
-        </p:style>
-        <p:txBody>
-          <a:bodyPr rtlCol="0" anchor="ctr"/>
-          <a:lstStyle/>
-          <a:p>
-            <a:pPr algn="ctr"/>
-          </a:p>
-        </p:txBody>
-      </p:sp>
-      <p:sp>
-        <p:nvSpPr>
-          <p:cNvPr id="21" name="Rounded Rectangle 20"/>
-          <p:cNvSpPr/>
-          <p:nvPr/>
-        </p:nvSpPr>
-        <p:spPr>
-          <a:xfrm>
-            <a:off x="621792" y="2731306"/>
-            <a:ext cx="237744" cy="237744"/>
-          </a:xfrm>
-          <a:prstGeom prst="roundRect">
-            <a:avLst>
-              <a:gd name="adj" fmla="val 28000"/>
-            </a:avLst>
-          </a:prstGeom>
-          <a:solidFill>
-            <a:srgbClr val="157A6D"/>
-          </a:solidFill>
-          <a:ln>
-            <a:noFill/>
-          </a:ln>
-          <a:effectLst/>
-        </p:spPr>
-        <p:style>
-          <a:lnRef idx="1">
-            <a:schemeClr val="accent1"/>
-          </a:lnRef>
-          <a:fillRef idx="3">
-            <a:schemeClr val="accent1"/>
-          </a:fillRef>
-          <a:effectRef idx="2">
-            <a:schemeClr val="accent1"/>
-          </a:effectRef>
-          <a:fontRef idx="minor">
-            <a:schemeClr val="lt1"/>
-          </a:fontRef>
-        </p:style>
-        <p:txBody>
-          <a:bodyPr rtlCol="0" anchor="ctr"/>
-          <a:lstStyle/>
-          <a:p>
-            <a:pPr algn="ctr"/>
-          </a:p>
-        </p:txBody>
-      </p:sp>
-      <p:sp>
-        <p:nvSpPr>
-          <p:cNvPr id="22" name="TextBox 21"/>
-          <p:cNvSpPr txBox="1"/>
-          <p:nvPr/>
-        </p:nvSpPr>
-        <p:spPr>
-          <a:xfrm>
-            <a:off x="621792" y="2731306"/>
-            <a:ext cx="237744" cy="237744"/>
-          </a:xfrm>
-          <a:prstGeom prst="rect">
-            <a:avLst/>
-          </a:prstGeom>
-          <a:noFill/>
-        </p:spPr>
-        <p:txBody>
-          <a:bodyPr wrap="square" anchor="ctr" lIns="0" rIns="0" tIns="0" bIns="0">
-            <a:spAutoFit/>
-          </a:bodyPr>
-          <a:lstStyle/>
-          <a:p>
-            <a:pPr algn="ctr">
-              <a:lnSpc>
-                <a:spcPct val="114000"/>
-              </a:lnSpc>
-            </a:pPr>
-            <a:r>
-              <a:rPr sz="1000" b="1">
-                <a:solidFill>
-                  <a:srgbClr val="FFFFFF"/>
-                </a:solidFill>
-              </a:rPr>
-              <a:t>C</a:t>
-            </a:r>
-          </a:p>
-        </p:txBody>
-      </p:sp>
-      <p:sp>
-        <p:nvSpPr>
-          <p:cNvPr id="23" name="TextBox 22"/>
-          <p:cNvSpPr txBox="1"/>
-          <p:nvPr/>
-        </p:nvSpPr>
-        <p:spPr>
-          <a:xfrm>
-            <a:off x="932688" y="2713018"/>
-            <a:ext cx="8778240" cy="274320"/>
-          </a:xfrm>
-          <a:prstGeom prst="rect">
-            <a:avLst/>
-          </a:prstGeom>
-          <a:noFill/>
-        </p:spPr>
-        <p:txBody>
-          <a:bodyPr wrap="square" anchor="ctr" lIns="0" rIns="0" tIns="0" bIns="0">
-            <a:spAutoFit/>
-          </a:bodyPr>
-          <a:lstStyle/>
-          <a:p>
-            <a:pPr algn="l">
-              <a:lnSpc>
-                <a:spcPct val="114000"/>
-              </a:lnSpc>
-            </a:pPr>
-            <a:r>
-              <a:rPr sz="1050" b="1">
-                <a:solidFill>
-                  <a:srgbClr val="1B2B28"/>
-                </a:solidFill>
-              </a:rPr>
-              <a:t>良好</a:t>
-            </a:r>
-            <a:r>
-              <a:rPr sz="850" b="0">
-                <a:solidFill>
-                  <a:srgbClr val="5C6E6A"/>
-                </a:solidFill>
-              </a:rPr>
-              <a:t>   验收口径：</a:t>
-            </a:r>
-            <a:r>
-              <a:rPr sz="850" b="0">
-                <a:solidFill>
-                  <a:srgbClr val="5C6E6A"/>
-                </a:solidFill>
-              </a:rPr>
-              <a:t>检查工具配置生效；pytest通过</a:t>
-            </a:r>
-          </a:p>
-        </p:txBody>
-      </p:sp>
-      <p:sp>
-        <p:nvSpPr>
-          <p:cNvPr id="24" name="Rounded Rectangle 23"/>
-          <p:cNvSpPr/>
-          <p:nvPr/>
-        </p:nvSpPr>
-        <p:spPr>
-          <a:xfrm>
-            <a:off x="10532681" y="2740450"/>
-            <a:ext cx="1052766" cy="237744"/>
-          </a:xfrm>
-          <a:prstGeom prst="roundRect">
-            <a:avLst>
-              <a:gd name="adj" fmla="val 50000"/>
-            </a:avLst>
-          </a:prstGeom>
-          <a:solidFill>
-            <a:srgbClr val="C9A227"/>
-          </a:solidFill>
-          <a:ln>
-            <a:noFill/>
-          </a:ln>
-          <a:effectLst/>
-        </p:spPr>
-        <p:style>
-          <a:lnRef idx="1">
-            <a:schemeClr val="accent1"/>
-          </a:lnRef>
-          <a:fillRef idx="3">
-            <a:schemeClr val="accent1"/>
-          </a:fillRef>
-          <a:effectRef idx="2">
-            <a:schemeClr val="accent1"/>
-          </a:effectRef>
-          <a:fontRef idx="minor">
-            <a:schemeClr val="lt1"/>
-          </a:fontRef>
-        </p:style>
-        <p:txBody>
-          <a:bodyPr rtlCol="0" anchor="ctr"/>
-          <a:lstStyle/>
-          <a:p>
-            <a:pPr algn="ctr"/>
-          </a:p>
-        </p:txBody>
-      </p:sp>
-      <p:sp>
-        <p:nvSpPr>
-          <p:cNvPr id="25" name="TextBox 24"/>
-          <p:cNvSpPr txBox="1"/>
-          <p:nvPr/>
-        </p:nvSpPr>
-        <p:spPr>
-          <a:xfrm>
-            <a:off x="10532681" y="2740450"/>
-            <a:ext cx="1052766" cy="237744"/>
-          </a:xfrm>
-          <a:prstGeom prst="rect">
-            <a:avLst/>
-          </a:prstGeom>
-          <a:noFill/>
-        </p:spPr>
-        <p:txBody>
-          <a:bodyPr wrap="square" anchor="ctr" lIns="0" rIns="0" tIns="0" bIns="0">
-            <a:spAutoFit/>
-          </a:bodyPr>
-          <a:lstStyle/>
-          <a:p>
-            <a:pPr algn="ctr">
-              <a:lnSpc>
-                <a:spcPct val="114000"/>
-              </a:lnSpc>
-            </a:pPr>
-            <a:r>
-              <a:rPr sz="850" b="1">
-                <a:solidFill>
-                  <a:srgbClr val="FFFFFF"/>
-                </a:solidFill>
-              </a:rPr>
-              <a:t>本节取证项 通过</a:t>
-            </a:r>
-          </a:p>
-        </p:txBody>
-      </p:sp>
-      <p:sp>
-        <p:nvSpPr>
-          <p:cNvPr id="26" name="TextBox 25"/>
-          <p:cNvSpPr txBox="1"/>
-          <p:nvPr/>
-        </p:nvSpPr>
-        <p:spPr>
-          <a:xfrm>
-            <a:off x="932688" y="2996482"/>
-            <a:ext cx="10671047" cy="628186"/>
-          </a:xfrm>
-          <a:prstGeom prst="rect">
-            <a:avLst/>
-          </a:prstGeom>
-          <a:noFill/>
-        </p:spPr>
-        <p:txBody>
-          <a:bodyPr wrap="square" anchor="t" lIns="0" rIns="0" tIns="0" bIns="0">
-            <a:spAutoFit/>
-          </a:bodyPr>
-          <a:lstStyle/>
-          <a:p>
-            <a:pPr algn="l">
-              <a:lnSpc>
-                <a:spcPct val="114000"/>
-              </a:lnSpc>
-            </a:pPr>
-            <a:r>
-              <a:rPr sz="950" b="0">
-                <a:solidFill>
-                  <a:srgbClr val="1B2B28"/>
-                </a:solidFill>
-              </a:rPr>
-              <a:t>检查工具配置：2 个钩子全部带 entry（2/2，black, flake8）｜配置要求的工具缺口 0 个｜pytest 配置 testpaths 已声明=是｜生成骨架真实加载：入口 main() 返回 0、自带 test_ 函数 3 个通过 3 个失败 0 个｜--fail-under 评分 entry 已声明=否</a:t>
-            </a:r>
-          </a:p>
-        </p:txBody>
-      </p:sp>
-      <p:sp>
-        <p:nvSpPr>
-          <p:cNvPr id="27" name="Rounded Rectangle 26"/>
-          <p:cNvSpPr/>
-          <p:nvPr/>
-        </p:nvSpPr>
-        <p:spPr>
-          <a:xfrm>
-            <a:off x="475488" y="3743541"/>
-            <a:ext cx="11237976" cy="802849"/>
-          </a:xfrm>
-          <a:prstGeom prst="roundRect">
-            <a:avLst>
-              <a:gd name="adj" fmla="val 6000"/>
-            </a:avLst>
-          </a:prstGeom>
-          <a:solidFill>
-            <a:srgbClr val="FFFFFF"/>
-          </a:solidFill>
-          <a:ln w="9525">
-            <a:solidFill>
-              <a:srgbClr val="E4F1EE"/>
-            </a:solidFill>
-          </a:ln>
-          <a:effectLst/>
-        </p:spPr>
-        <p:style>
-          <a:lnRef idx="1">
-            <a:schemeClr val="accent1"/>
-          </a:lnRef>
-          <a:fillRef idx="3">
-            <a:schemeClr val="accent1"/>
-          </a:fillRef>
-          <a:effectRef idx="2">
-            <a:schemeClr val="accent1"/>
-          </a:effectRef>
-          <a:fontRef idx="minor">
-            <a:schemeClr val="lt1"/>
-          </a:fontRef>
-        </p:style>
-        <p:txBody>
-          <a:bodyPr rtlCol="0" anchor="ctr"/>
-          <a:lstStyle/>
-          <a:p>
-            <a:pPr algn="ctr"/>
-          </a:p>
-        </p:txBody>
-      </p:sp>
-      <p:sp>
-        <p:nvSpPr>
-          <p:cNvPr id="28" name="Rounded Rectangle 27"/>
-          <p:cNvSpPr/>
-          <p:nvPr/>
-        </p:nvSpPr>
-        <p:spPr>
-          <a:xfrm>
-            <a:off x="475488" y="3743541"/>
-            <a:ext cx="54864" cy="802849"/>
-          </a:xfrm>
-          <a:prstGeom prst="roundRect">
-            <a:avLst>
-              <a:gd name="adj" fmla="val 50000"/>
-            </a:avLst>
-          </a:prstGeom>
-          <a:solidFill>
-            <a:srgbClr val="0B5E54"/>
-          </a:solidFill>
-          <a:ln>
-            <a:noFill/>
-          </a:ln>
-          <a:effectLst/>
-        </p:spPr>
-        <p:style>
-          <a:lnRef idx="1">
-            <a:schemeClr val="accent1"/>
-          </a:lnRef>
-          <a:fillRef idx="3">
-            <a:schemeClr val="accent1"/>
-          </a:fillRef>
-          <a:effectRef idx="2">
-            <a:schemeClr val="accent1"/>
-          </a:effectRef>
-          <a:fontRef idx="minor">
-            <a:schemeClr val="lt1"/>
-          </a:fontRef>
-        </p:style>
-        <p:txBody>
-          <a:bodyPr rtlCol="0" anchor="ctr"/>
-          <a:lstStyle/>
-          <a:p>
-            <a:pPr algn="ctr"/>
-          </a:p>
-        </p:txBody>
-      </p:sp>
-      <p:sp>
-        <p:nvSpPr>
-          <p:cNvPr id="29" name="Rounded Rectangle 28"/>
-          <p:cNvSpPr/>
-          <p:nvPr/>
-        </p:nvSpPr>
-        <p:spPr>
-          <a:xfrm>
-            <a:off x="621792" y="3825837"/>
-            <a:ext cx="237744" cy="237744"/>
-          </a:xfrm>
-          <a:prstGeom prst="roundRect">
-            <a:avLst>
-              <a:gd name="adj" fmla="val 28000"/>
-            </a:avLst>
-          </a:prstGeom>
-          <a:solidFill>
-            <a:srgbClr val="0B5E54"/>
-          </a:solidFill>
-          <a:ln>
-            <a:noFill/>
-          </a:ln>
-          <a:effectLst/>
-        </p:spPr>
-        <p:style>
-          <a:lnRef idx="1">
-            <a:schemeClr val="accent1"/>
-          </a:lnRef>
-          <a:fillRef idx="3">
-            <a:schemeClr val="accent1"/>
-          </a:fillRef>
-          <a:effectRef idx="2">
-            <a:schemeClr val="accent1"/>
-          </a:effectRef>
-          <a:fontRef idx="minor">
-            <a:schemeClr val="lt1"/>
-          </a:fontRef>
-        </p:style>
-        <p:txBody>
-          <a:bodyPr rtlCol="0" anchor="ctr"/>
-          <a:lstStyle/>
-          <a:p>
-            <a:pPr algn="ctr"/>
-          </a:p>
-        </p:txBody>
-      </p:sp>
-      <p:sp>
-        <p:nvSpPr>
-          <p:cNvPr id="30" name="TextBox 29"/>
-          <p:cNvSpPr txBox="1"/>
-          <p:nvPr/>
-        </p:nvSpPr>
-        <p:spPr>
-          <a:xfrm>
-            <a:off x="621792" y="3825837"/>
-            <a:ext cx="237744" cy="237744"/>
-          </a:xfrm>
-          <a:prstGeom prst="rect">
-            <a:avLst/>
-          </a:prstGeom>
-          <a:noFill/>
-        </p:spPr>
-        <p:txBody>
-          <a:bodyPr wrap="square" anchor="ctr" lIns="0" rIns="0" tIns="0" bIns="0">
-            <a:spAutoFit/>
-          </a:bodyPr>
-          <a:lstStyle/>
-          <a:p>
-            <a:pPr algn="ctr">
-              <a:lnSpc>
-                <a:spcPct val="114000"/>
-              </a:lnSpc>
-            </a:pPr>
-            <a:r>
-              <a:rPr sz="1000" b="1">
-                <a:solidFill>
-                  <a:srgbClr val="FFFFFF"/>
-                </a:solidFill>
-              </a:rPr>
-              <a:t>B</a:t>
-            </a:r>
-          </a:p>
-        </p:txBody>
-      </p:sp>
-      <p:sp>
-        <p:nvSpPr>
-          <p:cNvPr id="31" name="TextBox 30"/>
-          <p:cNvSpPr txBox="1"/>
-          <p:nvPr/>
-        </p:nvSpPr>
-        <p:spPr>
-          <a:xfrm>
-            <a:off x="932688" y="3807549"/>
-            <a:ext cx="8778240" cy="274320"/>
-          </a:xfrm>
-          <a:prstGeom prst="rect">
-            <a:avLst/>
-          </a:prstGeom>
-          <a:noFill/>
-        </p:spPr>
-        <p:txBody>
-          <a:bodyPr wrap="square" anchor="ctr" lIns="0" rIns="0" tIns="0" bIns="0">
-            <a:spAutoFit/>
-          </a:bodyPr>
-          <a:lstStyle/>
-          <a:p>
-            <a:pPr algn="l">
-              <a:lnSpc>
-                <a:spcPct val="114000"/>
-              </a:lnSpc>
-            </a:pPr>
-            <a:r>
-              <a:rPr sz="1050" b="1">
-                <a:solidFill>
-                  <a:srgbClr val="1B2B28"/>
-                </a:solidFill>
-              </a:rPr>
-              <a:t>优秀</a:t>
-            </a:r>
-            <a:r>
-              <a:rPr sz="850" b="0">
-                <a:solidFill>
-                  <a:srgbClr val="5C6E6A"/>
-                </a:solidFill>
-              </a:rPr>
-              <a:t>   验收口径：</a:t>
-            </a:r>
-            <a:r>
-              <a:rPr sz="850" b="0">
-                <a:solidFill>
-                  <a:srgbClr val="5C6E6A"/>
-                </a:solidFill>
-              </a:rPr>
-              <a:t>依赖可还原（requirements完整）；dev分支规范合并</a:t>
-            </a:r>
-          </a:p>
-        </p:txBody>
-      </p:sp>
-      <p:sp>
-        <p:nvSpPr>
-          <p:cNvPr id="32" name="Rounded Rectangle 31"/>
-          <p:cNvSpPr/>
-          <p:nvPr/>
-        </p:nvSpPr>
-        <p:spPr>
-          <a:xfrm>
-            <a:off x="10532681" y="3834981"/>
-            <a:ext cx="1052766" cy="237744"/>
-          </a:xfrm>
-          <a:prstGeom prst="roundRect">
-            <a:avLst>
-              <a:gd name="adj" fmla="val 50000"/>
-            </a:avLst>
-          </a:prstGeom>
-          <a:solidFill>
-            <a:srgbClr val="C9A227"/>
-          </a:solidFill>
-          <a:ln>
-            <a:noFill/>
-          </a:ln>
-          <a:effectLst/>
-        </p:spPr>
-        <p:style>
-          <a:lnRef idx="1">
-            <a:schemeClr val="accent1"/>
-          </a:lnRef>
-          <a:fillRef idx="3">
-            <a:schemeClr val="accent1"/>
-          </a:fillRef>
-          <a:effectRef idx="2">
-            <a:schemeClr val="accent1"/>
-          </a:effectRef>
-          <a:fontRef idx="minor">
-            <a:schemeClr val="lt1"/>
-          </a:fontRef>
-        </p:style>
-        <p:txBody>
-          <a:bodyPr rtlCol="0" anchor="ctr"/>
-          <a:lstStyle/>
-          <a:p>
-            <a:pPr algn="ctr"/>
-          </a:p>
-        </p:txBody>
-      </p:sp>
-      <p:sp>
-        <p:nvSpPr>
-          <p:cNvPr id="33" name="TextBox 32"/>
-          <p:cNvSpPr txBox="1"/>
-          <p:nvPr/>
-        </p:nvSpPr>
-        <p:spPr>
-          <a:xfrm>
-            <a:off x="10532681" y="3834981"/>
-            <a:ext cx="1052766" cy="237744"/>
-          </a:xfrm>
-          <a:prstGeom prst="rect">
-            <a:avLst/>
-          </a:prstGeom>
-          <a:noFill/>
-        </p:spPr>
-        <p:txBody>
-          <a:bodyPr wrap="square" anchor="ctr" lIns="0" rIns="0" tIns="0" bIns="0">
-            <a:spAutoFit/>
-          </a:bodyPr>
-          <a:lstStyle/>
-          <a:p>
-            <a:pPr algn="ctr">
-              <a:lnSpc>
-                <a:spcPct val="114000"/>
-              </a:lnSpc>
-            </a:pPr>
-            <a:r>
-              <a:rPr sz="850" b="1">
-                <a:solidFill>
-                  <a:srgbClr val="FFFFFF"/>
-                </a:solidFill>
-              </a:rPr>
-              <a:t>本节取证项 通过</a:t>
-            </a:r>
-          </a:p>
-        </p:txBody>
-      </p:sp>
-      <p:sp>
-        <p:nvSpPr>
-          <p:cNvPr id="34" name="TextBox 33"/>
-          <p:cNvSpPr txBox="1"/>
-          <p:nvPr/>
-        </p:nvSpPr>
-        <p:spPr>
-          <a:xfrm>
-            <a:off x="932688" y="4091013"/>
-            <a:ext cx="10671047" cy="400513"/>
-          </a:xfrm>
-          <a:prstGeom prst="rect">
-            <a:avLst/>
-          </a:prstGeom>
-          <a:noFill/>
-        </p:spPr>
-        <p:txBody>
-          <a:bodyPr wrap="square" anchor="t" lIns="0" rIns="0" tIns="0" bIns="0">
-            <a:spAutoFit/>
-          </a:bodyPr>
-          <a:lstStyle/>
-          <a:p>
-            <a:pPr algn="l">
-              <a:lnSpc>
-                <a:spcPct val="114000"/>
-              </a:lnSpc>
-            </a:pPr>
-            <a:r>
-              <a:rPr sz="950" b="0">
-                <a:solidFill>
-                  <a:srgbClr val="1B2B28"/>
-                </a:solidFill>
-              </a:rPr>
-              <a:t>运行依赖 2/2 条钉下限｜开发依赖 4/4 条钉下限｜-r 引用 requirements.txt=是｜与运行依赖重名的开发项 0 个（无）｜git branch dev=是、git checkout dev=是、--no-ff 合并=是</a:t>
-            </a:r>
-          </a:p>
-        </p:txBody>
-      </p:sp>
-      <p:sp>
-        <p:nvSpPr>
-          <p:cNvPr id="35" name="Rounded Rectangle 34"/>
-          <p:cNvSpPr/>
-          <p:nvPr/>
-        </p:nvSpPr>
-        <p:spPr>
-          <a:xfrm>
-            <a:off x="475488" y="4610398"/>
-            <a:ext cx="11237976" cy="802849"/>
-          </a:xfrm>
-          <a:prstGeom prst="roundRect">
-            <a:avLst>
-              <a:gd name="adj" fmla="val 6000"/>
-            </a:avLst>
-          </a:prstGeom>
-          <a:solidFill>
-            <a:srgbClr val="FFFFFF"/>
-          </a:solidFill>
-          <a:ln w="9525">
-            <a:solidFill>
-              <a:srgbClr val="E4F1EE"/>
-            </a:solidFill>
-          </a:ln>
-          <a:effectLst/>
-        </p:spPr>
-        <p:style>
-          <a:lnRef idx="1">
-            <a:schemeClr val="accent1"/>
-          </a:lnRef>
-          <a:fillRef idx="3">
-            <a:schemeClr val="accent1"/>
-          </a:fillRef>
-          <a:effectRef idx="2">
-            <a:schemeClr val="accent1"/>
-          </a:effectRef>
-          <a:fontRef idx="minor">
-            <a:schemeClr val="lt1"/>
-          </a:fontRef>
-        </p:style>
-        <p:txBody>
-          <a:bodyPr rtlCol="0" anchor="ctr"/>
-          <a:lstStyle/>
-          <a:p>
-            <a:pPr algn="ctr"/>
-          </a:p>
-        </p:txBody>
-      </p:sp>
-      <p:sp>
-        <p:nvSpPr>
-          <p:cNvPr id="36" name="Rounded Rectangle 35"/>
-          <p:cNvSpPr/>
-          <p:nvPr/>
-        </p:nvSpPr>
-        <p:spPr>
-          <a:xfrm>
-            <a:off x="475488" y="4610398"/>
-            <a:ext cx="54864" cy="802849"/>
-          </a:xfrm>
-          <a:prstGeom prst="roundRect">
-            <a:avLst>
-              <a:gd name="adj" fmla="val 50000"/>
-            </a:avLst>
-          </a:prstGeom>
-          <a:solidFill>
-            <a:srgbClr val="C9A227"/>
-          </a:solidFill>
-          <a:ln>
-            <a:noFill/>
-          </a:ln>
-          <a:effectLst/>
-        </p:spPr>
-        <p:style>
-          <a:lnRef idx="1">
-            <a:schemeClr val="accent1"/>
-          </a:lnRef>
-          <a:fillRef idx="3">
-            <a:schemeClr val="accent1"/>
-          </a:fillRef>
-          <a:effectRef idx="2">
-            <a:schemeClr val="accent1"/>
-          </a:effectRef>
-          <a:fontRef idx="minor">
-            <a:schemeClr val="lt1"/>
-          </a:fontRef>
-        </p:style>
-        <p:txBody>
-          <a:bodyPr rtlCol="0" anchor="ctr"/>
-          <a:lstStyle/>
-          <a:p>
-            <a:pPr algn="ctr"/>
-          </a:p>
-        </p:txBody>
-      </p:sp>
-      <p:sp>
-        <p:nvSpPr>
-          <p:cNvPr id="37" name="Rounded Rectangle 36"/>
-          <p:cNvSpPr/>
-          <p:nvPr/>
-        </p:nvSpPr>
-        <p:spPr>
-          <a:xfrm>
-            <a:off x="621792" y="4692694"/>
-            <a:ext cx="237744" cy="237744"/>
-          </a:xfrm>
-          <a:prstGeom prst="roundRect">
-            <a:avLst>
-              <a:gd name="adj" fmla="val 28000"/>
-            </a:avLst>
-          </a:prstGeom>
-          <a:solidFill>
-            <a:srgbClr val="C9A227"/>
-          </a:solidFill>
-          <a:ln>
-            <a:noFill/>
-          </a:ln>
-          <a:effectLst/>
-        </p:spPr>
-        <p:style>
-          <a:lnRef idx="1">
-            <a:schemeClr val="accent1"/>
-          </a:lnRef>
-          <a:fillRef idx="3">
-            <a:schemeClr val="accent1"/>
-          </a:fillRef>
-          <a:effectRef idx="2">
-            <a:schemeClr val="accent1"/>
-          </a:effectRef>
-          <a:fontRef idx="minor">
-            <a:schemeClr val="lt1"/>
-          </a:fontRef>
-        </p:style>
-        <p:txBody>
-          <a:bodyPr rtlCol="0" anchor="ctr"/>
-          <a:lstStyle/>
-          <a:p>
-            <a:pPr algn="ctr"/>
-          </a:p>
-        </p:txBody>
-      </p:sp>
-      <p:sp>
-        <p:nvSpPr>
-          <p:cNvPr id="38" name="TextBox 37"/>
-          <p:cNvSpPr txBox="1"/>
-          <p:nvPr/>
-        </p:nvSpPr>
-        <p:spPr>
-          <a:xfrm>
-            <a:off x="621792" y="4692694"/>
-            <a:ext cx="237744" cy="237744"/>
-          </a:xfrm>
-          <a:prstGeom prst="rect">
-            <a:avLst/>
-          </a:prstGeom>
-          <a:noFill/>
-        </p:spPr>
-        <p:txBody>
-          <a:bodyPr wrap="square" anchor="ctr" lIns="0" rIns="0" tIns="0" bIns="0">
-            <a:spAutoFit/>
-          </a:bodyPr>
-          <a:lstStyle/>
-          <a:p>
-            <a:pPr algn="ctr">
-              <a:lnSpc>
-                <a:spcPct val="114000"/>
-              </a:lnSpc>
-            </a:pPr>
-            <a:r>
-              <a:rPr sz="1000" b="1">
-                <a:solidFill>
-                  <a:srgbClr val="FFFFFF"/>
-                </a:solidFill>
-              </a:rPr>
-              <a:t>A</a:t>
-            </a:r>
-          </a:p>
-        </p:txBody>
-      </p:sp>
-      <p:sp>
-        <p:nvSpPr>
-          <p:cNvPr id="39" name="TextBox 38"/>
-          <p:cNvSpPr txBox="1"/>
-          <p:nvPr/>
-        </p:nvSpPr>
-        <p:spPr>
-          <a:xfrm>
-            <a:off x="932688" y="4674406"/>
-            <a:ext cx="8778240" cy="274320"/>
-          </a:xfrm>
-          <a:prstGeom prst="rect">
-            <a:avLst/>
-          </a:prstGeom>
-          <a:noFill/>
-        </p:spPr>
-        <p:txBody>
-          <a:bodyPr wrap="square" anchor="ctr" lIns="0" rIns="0" tIns="0" bIns="0">
-            <a:spAutoFit/>
-          </a:bodyPr>
-          <a:lstStyle/>
-          <a:p>
-            <a:pPr algn="l">
-              <a:lnSpc>
-                <a:spcPct val="114000"/>
-              </a:lnSpc>
-            </a:pPr>
-            <a:r>
-              <a:rPr sz="1050" b="1">
-                <a:solidFill>
-                  <a:srgbClr val="1B2B28"/>
-                </a:solidFill>
-              </a:rPr>
-              <a:t>超优</a:t>
-            </a:r>
-            <a:r>
-              <a:rPr sz="850" b="0">
-                <a:solidFill>
-                  <a:srgbClr val="5C6E6A"/>
-                </a:solidFill>
-              </a:rPr>
-              <a:t>   验收口径：</a:t>
-            </a:r>
-            <a:r>
-              <a:rPr sz="850" b="0">
-                <a:solidFill>
-                  <a:srgbClr val="5C6E6A"/>
-                </a:solidFill>
-              </a:rPr>
-              <a:t>优秀+GitHub Actions CI或pre-commit钩子</a:t>
-            </a:r>
-          </a:p>
-        </p:txBody>
-      </p:sp>
-      <p:sp>
-        <p:nvSpPr>
-          <p:cNvPr id="40" name="Rounded Rectangle 39"/>
-          <p:cNvSpPr/>
-          <p:nvPr/>
-        </p:nvSpPr>
-        <p:spPr>
-          <a:xfrm>
-            <a:off x="10532681" y="4701838"/>
-            <a:ext cx="1052766" cy="237744"/>
-          </a:xfrm>
-          <a:prstGeom prst="roundRect">
-            <a:avLst>
-              <a:gd name="adj" fmla="val 50000"/>
-            </a:avLst>
-          </a:prstGeom>
-          <a:solidFill>
-            <a:srgbClr val="C9A227"/>
-          </a:solidFill>
-          <a:ln>
-            <a:noFill/>
-          </a:ln>
-          <a:effectLst/>
-        </p:spPr>
-        <p:style>
-          <a:lnRef idx="1">
-            <a:schemeClr val="accent1"/>
-          </a:lnRef>
-          <a:fillRef idx="3">
-            <a:schemeClr val="accent1"/>
-          </a:fillRef>
-          <a:effectRef idx="2">
-            <a:schemeClr val="accent1"/>
-          </a:effectRef>
-          <a:fontRef idx="minor">
-            <a:schemeClr val="lt1"/>
-          </a:fontRef>
-        </p:style>
-        <p:txBody>
-          <a:bodyPr rtlCol="0" anchor="ctr"/>
-          <a:lstStyle/>
-          <a:p>
-            <a:pPr algn="ctr"/>
-          </a:p>
-        </p:txBody>
-      </p:sp>
-      <p:sp>
-        <p:nvSpPr>
-          <p:cNvPr id="41" name="TextBox 40"/>
-          <p:cNvSpPr txBox="1"/>
-          <p:nvPr/>
-        </p:nvSpPr>
-        <p:spPr>
-          <a:xfrm>
-            <a:off x="10532681" y="4701838"/>
-            <a:ext cx="1052766" cy="237744"/>
-          </a:xfrm>
-          <a:prstGeom prst="rect">
-            <a:avLst/>
-          </a:prstGeom>
-          <a:noFill/>
-        </p:spPr>
-        <p:txBody>
-          <a:bodyPr wrap="square" anchor="ctr" lIns="0" rIns="0" tIns="0" bIns="0">
-            <a:spAutoFit/>
-          </a:bodyPr>
-          <a:lstStyle/>
-          <a:p>
-            <a:pPr algn="ctr">
-              <a:lnSpc>
-                <a:spcPct val="114000"/>
-              </a:lnSpc>
-            </a:pPr>
-            <a:r>
-              <a:rPr sz="850" b="1">
-                <a:solidFill>
-                  <a:srgbClr val="FFFFFF"/>
-                </a:solidFill>
-              </a:rPr>
-              <a:t>本节取证项 通过</a:t>
-            </a:r>
-          </a:p>
-        </p:txBody>
-      </p:sp>
-      <p:sp>
-        <p:nvSpPr>
-          <p:cNvPr id="42" name="TextBox 41"/>
-          <p:cNvSpPr txBox="1"/>
-          <p:nvPr/>
-        </p:nvSpPr>
-        <p:spPr>
-          <a:xfrm>
-            <a:off x="932688" y="4957870"/>
-            <a:ext cx="10671047" cy="400513"/>
-          </a:xfrm>
-          <a:prstGeom prst="rect">
-            <a:avLst/>
-          </a:prstGeom>
-          <a:noFill/>
-        </p:spPr>
-        <p:txBody>
-          <a:bodyPr wrap="square" anchor="t" lIns="0" rIns="0" tIns="0" bIns="0">
-            <a:spAutoFit/>
-          </a:bodyPr>
-          <a:lstStyle/>
-          <a:p>
-            <a:pPr algn="l">
-              <a:lnSpc>
-                <a:spcPct val="114000"/>
-              </a:lnSpc>
-            </a:pPr>
-            <a:r>
-              <a:rPr sz="950" b="0">
-                <a:solidFill>
-                  <a:srgbClr val="1B2B28"/>
-                </a:solidFill>
-              </a:rPr>
-              <a:t>pre-commit 钩子文件已产出=是（声明 2 个：black, flake8）｜.github/workflows 下 CI 文件 0 个｜工单优秀(B) 档前置=成立</a:t>
-            </a:r>
-          </a:p>
-        </p:txBody>
-      </p:sp>
-      <p:sp>
-        <p:nvSpPr>
-          <p:cNvPr id="43" name="Rounded Rectangle 42"/>
-          <p:cNvSpPr/>
-          <p:nvPr/>
-        </p:nvSpPr>
-        <p:spPr>
-          <a:xfrm>
-            <a:off x="475488" y="5477256"/>
-            <a:ext cx="11237976" cy="941831"/>
-          </a:xfrm>
-          <a:prstGeom prst="roundRect">
-            <a:avLst>
-              <a:gd name="adj" fmla="val 5000"/>
-            </a:avLst>
-          </a:prstGeom>
-          <a:solidFill>
-            <a:srgbClr val="E4F1EE"/>
-          </a:solidFill>
-          <a:ln>
-            <a:noFill/>
-          </a:ln>
-          <a:effectLst/>
-        </p:spPr>
-        <p:style>
-          <a:lnRef idx="1">
-            <a:schemeClr val="accent1"/>
-          </a:lnRef>
-          <a:fillRef idx="3">
-            <a:schemeClr val="accent1"/>
-          </a:fillRef>
-          <a:effectRef idx="2">
-            <a:schemeClr val="accent1"/>
-          </a:effectRef>
-          <a:fontRef idx="minor">
-            <a:schemeClr val="lt1"/>
-          </a:fontRef>
-        </p:style>
-        <p:txBody>
-          <a:bodyPr rtlCol="0" anchor="ctr"/>
-          <a:lstStyle/>
-          <a:p>
-            <a:pPr algn="ctr"/>
-          </a:p>
-        </p:txBody>
-      </p:sp>
-      <p:sp>
-        <p:nvSpPr>
-          <p:cNvPr id="44" name="Rounded Rectangle 43"/>
-          <p:cNvSpPr/>
-          <p:nvPr/>
-        </p:nvSpPr>
-        <p:spPr>
-          <a:xfrm>
-            <a:off x="475488" y="5477256"/>
-            <a:ext cx="54864" cy="941831"/>
-          </a:xfrm>
-          <a:prstGeom prst="roundRect">
-            <a:avLst>
-              <a:gd name="adj" fmla="val 50000"/>
-            </a:avLst>
-          </a:prstGeom>
-          <a:solidFill>
-            <a:srgbClr val="C9A227"/>
-          </a:solidFill>
-          <a:ln>
-            <a:noFill/>
-          </a:ln>
-          <a:effectLst/>
-        </p:spPr>
-        <p:style>
-          <a:lnRef idx="1">
-            <a:schemeClr val="accent1"/>
-          </a:lnRef>
-          <a:fillRef idx="3">
-            <a:schemeClr val="accent1"/>
-          </a:fillRef>
-          <a:effectRef idx="2">
-            <a:schemeClr val="accent1"/>
-          </a:effectRef>
-          <a:fontRef idx="minor">
-            <a:schemeClr val="lt1"/>
-          </a:fontRef>
-        </p:style>
-        <p:txBody>
-          <a:bodyPr rtlCol="0" anchor="ctr"/>
-          <a:lstStyle/>
-          <a:p>
-            <a:pPr algn="ctr"/>
-          </a:p>
-        </p:txBody>
-      </p:sp>
-      <p:sp>
-        <p:nvSpPr>
-          <p:cNvPr id="45" name="TextBox 44"/>
-          <p:cNvSpPr txBox="1"/>
-          <p:nvPr/>
-        </p:nvSpPr>
-        <p:spPr>
-          <a:xfrm>
-            <a:off x="676656" y="5550408"/>
-            <a:ext cx="10908792" cy="795527"/>
-          </a:xfrm>
-          <a:prstGeom prst="rect">
-            <a:avLst/>
-          </a:prstGeom>
-          <a:noFill/>
-        </p:spPr>
-        <p:txBody>
-          <a:bodyPr wrap="square" anchor="t" lIns="0" rIns="0" tIns="0" bIns="0">
-            <a:spAutoFit/>
-          </a:bodyPr>
-          <a:lstStyle/>
-          <a:p>
-            <a:pPr algn="l">
-              <a:lnSpc>
-                <a:spcPct val="124000"/>
-              </a:lnSpc>
-            </a:pPr>
-            <a:r>
-              <a:rPr sz="850" b="0">
-                <a:solidFill>
-                  <a:srgbClr val="1B2B28"/>
-                </a:solidFill>
-              </a:rPr>
-              <a:t>出处：工程化项目/p12_proj_template/output/report.txt 第 37 节「工单验收四档对照」——本机 2026-10-28 05:06 实跑落盘，上表数字逐字摘录、未改写。</a:t>
-            </a:r>
-          </a:p>
-          <a:p>
-            <a:pPr algn="l">
-              <a:lnSpc>
-                <a:spcPct val="124000"/>
-              </a:lnSpc>
-            </a:pPr>
-            <a:r>
-              <a:rPr sz="850" b="0">
-                <a:solidFill>
-                  <a:srgbClr val="1B2B28"/>
-                </a:solidFill>
-              </a:rPr>
-              <a:t>复现：cd 工程化项目/p12_proj_template &amp;&amp; python run.py &amp;&amp; python -m pytest -q -o addopts=''</a:t>
-            </a:r>
-          </a:p>
-          <a:p>
-            <a:pPr algn="l">
-              <a:lnSpc>
-                <a:spcPct val="124000"/>
-              </a:lnSpc>
-            </a:pPr>
-            <a:r>
-              <a:rPr sz="850" b="0">
-                <a:solidFill>
-                  <a:srgbClr val="1B2B28"/>
-                </a:solidFill>
-              </a:rPr>
-              <a:t>口径：表中「判定」沿用报告原词——绿=达标/通过，黄=仅本节取证项通过（未取证子项在报告里逐条点名），红=未达标。</a:t>
-            </a:r>
-          </a:p>
-        </p:txBody>
-      </p:sp>
+              <a:t>8 / 10</a:t>
+            </a:r>
+          </a:p>
+        </p:txBody>
+      </p:sp>
+      <p:pic>
+        <p:nvPicPr>
+          <p:cNvPr id="16" name="Picture 15" descr="shot_w22.png"/>
+          <p:cNvPicPr>
+            <a:picLocks noChangeAspect="1"/>
+          </p:cNvPicPr>
+          <p:nvPr/>
+        </p:nvPicPr>
+        <p:blipFill>
+          <a:blip r:embed="rId5"/>
+          <a:stretch>
+            <a:fillRect/>
+          </a:stretch>
+        </p:blipFill>
+        <p:spPr>
+          <a:xfrm>
+            <a:off x="1499205" y="1900000"/>
+            <a:ext cx="3001589" cy="1600000"/>
+          </a:xfrm>
+          <a:prstGeom prst="rect">
+            <a:avLst/>
+          </a:prstGeom>
+        </p:spPr>
+      </p:pic>
     </p:spTree>
   </p:cSld>
   <p:clrMapOvr>
@@ -10033,22 +10527,20 @@
       <p:grpSpPr/>
       <p:sp>
         <p:nvSpPr>
-          <p:cNvPr id="2" name="Rounded Rectangle 1"/>
+          <p:cNvPr id="2" name="Rectangle 1"/>
           <p:cNvSpPr/>
           <p:nvPr/>
         </p:nvSpPr>
         <p:spPr>
           <a:xfrm>
             <a:off x="0" y="0"/>
-            <a:ext cx="12191695" cy="64008"/>
-          </a:xfrm>
-          <a:prstGeom prst="roundRect">
-            <a:avLst>
-              <a:gd name="adj" fmla="val 50000"/>
-            </a:avLst>
+            <a:ext cx="12192000" cy="6858000"/>
+          </a:xfrm>
+          <a:prstGeom prst="rect">
+            <a:avLst/>
           </a:prstGeom>
           <a:solidFill>
-            <a:srgbClr val="0B5E54"/>
+            <a:srgbClr val="010328"/>
           </a:solidFill>
           <a:ln>
             <a:noFill/>
@@ -10079,60 +10571,20 @@
       </p:sp>
       <p:sp>
         <p:nvSpPr>
-          <p:cNvPr id="3" name="TextBox 2"/>
-          <p:cNvSpPr txBox="1"/>
-          <p:nvPr/>
-        </p:nvSpPr>
-        <p:spPr>
-          <a:xfrm>
-            <a:off x="475488" y="146304"/>
-            <a:ext cx="8229600" cy="292608"/>
-          </a:xfrm>
-          <a:prstGeom prst="rect">
-            <a:avLst/>
-          </a:prstGeom>
-          <a:noFill/>
-        </p:spPr>
-        <p:txBody>
-          <a:bodyPr wrap="square" anchor="t" lIns="0" rIns="0" tIns="0" bIns="0">
-            <a:spAutoFit/>
-          </a:bodyPr>
-          <a:lstStyle/>
-          <a:p>
-            <a:pPr algn="l">
-              <a:lnSpc>
-                <a:spcPct val="114000"/>
-              </a:lnSpc>
-            </a:pPr>
-            <a:r>
-              <a:rPr sz="1100" b="1">
-                <a:solidFill>
-                  <a:srgbClr val="0B5E54"/>
-                </a:solidFill>
-              </a:rPr>
-              <a:t>工单实战 · 运行留证</a:t>
-            </a:r>
-          </a:p>
-        </p:txBody>
-      </p:sp>
-      <p:sp>
-        <p:nvSpPr>
-          <p:cNvPr id="4" name="Rounded Rectangle 3"/>
+          <p:cNvPr id="3" name="Rectangle 2"/>
           <p:cNvSpPr/>
           <p:nvPr/>
         </p:nvSpPr>
         <p:spPr>
           <a:xfrm>
-            <a:off x="475488" y="475488"/>
-            <a:ext cx="2027872" cy="310896"/>
-          </a:xfrm>
-          <a:prstGeom prst="roundRect">
-            <a:avLst>
-              <a:gd name="adj" fmla="val 50000"/>
-            </a:avLst>
+            <a:off x="0" y="2880360"/>
+            <a:ext cx="12192000" cy="50000"/>
+          </a:xfrm>
+          <a:prstGeom prst="rect">
+            <a:avLst/>
           </a:prstGeom>
           <a:solidFill>
-            <a:srgbClr val="C9A227"/>
+            <a:srgbClr val="F5670F"/>
           </a:solidFill>
           <a:ln>
             <a:noFill/>
@@ -10163,14 +10615,14 @@
       </p:sp>
       <p:sp>
         <p:nvSpPr>
-          <p:cNvPr id="5" name="TextBox 4"/>
+          <p:cNvPr id="4" name="TextBox 3"/>
           <p:cNvSpPr txBox="1"/>
           <p:nvPr/>
         </p:nvSpPr>
         <p:spPr>
           <a:xfrm>
-            <a:off x="475488" y="475488"/>
-            <a:ext cx="2027872" cy="310896"/>
+            <a:off x="0" y="1645920"/>
+            <a:ext cx="12192000" cy="1500000"/>
           </a:xfrm>
           <a:prstGeom prst="rect">
             <a:avLst/>
@@ -10178,23 +10630,69 @@
           <a:noFill/>
         </p:spPr>
         <p:txBody>
-          <a:bodyPr wrap="square" anchor="ctr" lIns="0" rIns="0" tIns="0" bIns="0">
+          <a:bodyPr wrap="square" anchor="t">
             <a:spAutoFit/>
           </a:bodyPr>
           <a:lstStyle/>
           <a:p>
             <a:pPr algn="ctr">
               <a:lnSpc>
-                <a:spcPct val="114000"/>
+                <a:spcPct val="110000"/>
               </a:lnSpc>
+              <a:spcAft>
+                <a:spcPts val="600"/>
+              </a:spcAft>
             </a:pPr>
             <a:r>
-              <a:rPr sz="1050" b="1">
+              <a:rPr sz="5400" b="1">
                 <a:solidFill>
                   <a:srgbClr val="FFFFFF"/>
                 </a:solidFill>
+                <a:latin typeface="微软雅黑"/>
               </a:rPr>
-              <a:t>SCREENSHOT · 终端逐字截图</a:t>
+              <a:t>THANKS</a:t>
+            </a:r>
+          </a:p>
+        </p:txBody>
+      </p:sp>
+      <p:sp>
+        <p:nvSpPr>
+          <p:cNvPr id="5" name="TextBox 4"/>
+          <p:cNvSpPr txBox="1"/>
+          <p:nvPr/>
+        </p:nvSpPr>
+        <p:spPr>
+          <a:xfrm>
+            <a:off x="0" y="3429000"/>
+            <a:ext cx="12192000" cy="800000"/>
+          </a:xfrm>
+          <a:prstGeom prst="rect">
+            <a:avLst/>
+          </a:prstGeom>
+          <a:noFill/>
+        </p:spPr>
+        <p:txBody>
+          <a:bodyPr wrap="square" anchor="t">
+            <a:spAutoFit/>
+          </a:bodyPr>
+          <a:lstStyle/>
+          <a:p>
+            <a:pPr algn="ctr">
+              <a:lnSpc>
+                <a:spcPct val="110000"/>
+              </a:lnSpc>
+              <a:spcAft>
+                <a:spcPts val="600"/>
+              </a:spcAft>
+            </a:pPr>
+            <a:r>
+              <a:rPr sz="2200" b="1">
+                <a:solidFill>
+                  <a:srgbClr val="F5670F"/>
+                </a:solidFill>
+                <a:latin typeface="微软雅黑"/>
+              </a:rPr>
+              <a:t>感谢聆听 · 动手实践出真知</a:t>
             </a:r>
           </a:p>
         </p:txBody>
@@ -10207,8 +10705,8 @@
         </p:nvSpPr>
         <p:spPr>
           <a:xfrm>
-            <a:off x="475488" y="859536"/>
-            <a:ext cx="11237976" cy="502920"/>
+            <a:off x="0" y="4526280"/>
+            <a:ext cx="12192000" cy="600000"/>
           </a:xfrm>
           <a:prstGeom prst="rect">
             <a:avLst/>
@@ -10216,45 +10714,47 @@
           <a:noFill/>
         </p:spPr>
         <p:txBody>
-          <a:bodyPr wrap="square" anchor="t" lIns="0" rIns="0" tIns="0" bIns="0">
+          <a:bodyPr wrap="square" anchor="t">
             <a:spAutoFit/>
           </a:bodyPr>
           <a:lstStyle/>
           <a:p>
-            <a:pPr algn="l">
+            <a:pPr algn="ctr">
               <a:lnSpc>
-                <a:spcPct val="114000"/>
+                <a:spcPct val="110000"/>
               </a:lnSpc>
+              <a:spcAft>
+                <a:spcPts val="600"/>
+              </a:spcAft>
             </a:pPr>
             <a:r>
-              <a:rPr sz="2200" b="1">
+              <a:rPr sz="1400" b="0">
                 <a:solidFill>
-                  <a:srgbClr val="1B2B28"/>
+                  <a:srgbClr val="BBC6E6"/>
                 </a:solidFill>
+                <a:latin typeface="微软雅黑"/>
               </a:rPr>
-              <a:t>P1.2 工单验收四档对照 · 四档逐字输出截图</a:t>
-            </a:r>
-          </a:p>
-        </p:txBody>
-      </p:sp>
-      <p:sp>
-        <p:nvSpPr>
-          <p:cNvPr id="7" name="Rounded Rectangle 6"/>
+              <a:t>以生为本   |   做中学 · 学中做</a:t>
+            </a:r>
+          </a:p>
+        </p:txBody>
+      </p:sp>
+      <p:sp>
+        <p:nvSpPr>
+          <p:cNvPr id="7" name="Rectangle 6"/>
           <p:cNvSpPr/>
           <p:nvPr/>
         </p:nvSpPr>
         <p:spPr>
           <a:xfrm>
-            <a:off x="475488" y="1389888"/>
-            <a:ext cx="1234440" cy="27432"/>
-          </a:xfrm>
-          <a:prstGeom prst="roundRect">
-            <a:avLst>
-              <a:gd name="adj" fmla="val 50000"/>
-            </a:avLst>
+            <a:off x="500000" y="6500000"/>
+            <a:ext cx="11100000" cy="20000"/>
+          </a:xfrm>
+          <a:prstGeom prst="rect">
+            <a:avLst/>
           </a:prstGeom>
           <a:solidFill>
-            <a:srgbClr val="C9A227"/>
+            <a:srgbClr val="C9D4EE"/>
           </a:solidFill>
           <a:ln>
             <a:noFill/>
@@ -10285,60 +10785,14 @@
       </p:sp>
       <p:sp>
         <p:nvSpPr>
-          <p:cNvPr id="8" name="Rounded Rectangle 7"/>
-          <p:cNvSpPr/>
-          <p:nvPr/>
-        </p:nvSpPr>
-        <p:spPr>
-          <a:xfrm>
-            <a:off x="475488" y="6419088"/>
-            <a:ext cx="11237976" cy="10972"/>
-          </a:xfrm>
-          <a:prstGeom prst="roundRect">
-            <a:avLst>
-              <a:gd name="adj" fmla="val 50000"/>
-            </a:avLst>
-          </a:prstGeom>
-          <a:solidFill>
-            <a:srgbClr val="E4F1EE"/>
-          </a:solidFill>
-          <a:ln>
-            <a:noFill/>
-          </a:ln>
-          <a:effectLst/>
-        </p:spPr>
-        <p:style>
-          <a:lnRef idx="1">
-            <a:schemeClr val="accent1"/>
-          </a:lnRef>
-          <a:fillRef idx="3">
-            <a:schemeClr val="accent1"/>
-          </a:fillRef>
-          <a:effectRef idx="2">
-            <a:schemeClr val="accent1"/>
-          </a:effectRef>
-          <a:fontRef idx="minor">
-            <a:schemeClr val="lt1"/>
-          </a:fontRef>
-        </p:style>
-        <p:txBody>
-          <a:bodyPr rtlCol="0" anchor="ctr"/>
-          <a:lstStyle/>
-          <a:p>
-            <a:pPr algn="ctr"/>
-          </a:p>
-        </p:txBody>
-      </p:sp>
-      <p:sp>
-        <p:nvSpPr>
-          <p:cNvPr id="9" name="TextBox 8"/>
+          <p:cNvPr id="8" name="TextBox 7"/>
           <p:cNvSpPr txBox="1"/>
           <p:nvPr/>
         </p:nvSpPr>
         <p:spPr>
           <a:xfrm>
-            <a:off x="475488" y="6455664"/>
-            <a:ext cx="7315200" cy="292608"/>
+            <a:off x="500000" y="6540000"/>
+            <a:ext cx="7000000" cy="300000"/>
           </a:xfrm>
           <a:prstGeom prst="rect">
             <a:avLst/>
@@ -10346,75 +10800,41 @@
           <a:noFill/>
         </p:spPr>
         <p:txBody>
-          <a:bodyPr wrap="square" anchor="t" lIns="0" rIns="0" tIns="0" bIns="0">
+          <a:bodyPr wrap="square" anchor="t">
             <a:spAutoFit/>
           </a:bodyPr>
           <a:lstStyle/>
           <a:p>
             <a:pPr algn="l">
               <a:lnSpc>
-                <a:spcPct val="114000"/>
+                <a:spcPct val="110000"/>
               </a:lnSpc>
-            </a:pPr>
-            <a:r>
-              <a:rPr sz="900" b="0">
-                <a:solidFill>
-                  <a:srgbClr val="5C6E6A"/>
-                </a:solidFill>
-              </a:rPr>
-              <a:t>两江智造集团 · Python程序设计（项目实战）</a:t>
-            </a:r>
-          </a:p>
-        </p:txBody>
-      </p:sp>
-      <p:sp>
-        <p:nvSpPr>
-          <p:cNvPr id="10" name="TextBox 9"/>
-          <p:cNvSpPr txBox="1"/>
-          <p:nvPr/>
-        </p:nvSpPr>
-        <p:spPr>
-          <a:xfrm>
-            <a:off x="10597896" y="6537960"/>
-            <a:ext cx="996696" cy="301752"/>
-          </a:xfrm>
-          <a:prstGeom prst="rect">
-            <a:avLst/>
-          </a:prstGeom>
-          <a:noFill/>
-        </p:spPr>
-        <p:txBody>
-          <a:bodyPr wrap="square" anchor="t" lIns="0" rIns="0" tIns="0" bIns="0">
-            <a:spAutoFit/>
-          </a:bodyPr>
-          <a:lstStyle/>
-          <a:p>
-            <a:pPr algn="r">
-              <a:lnSpc>
-                <a:spcPct val="114000"/>
-              </a:lnSpc>
+              <a:spcAft>
+                <a:spcPts val="600"/>
+              </a:spcAft>
             </a:pPr>
             <a:r>
               <a:rPr sz="1000" b="0">
                 <a:solidFill>
                   <a:srgbClr val="8A97B5"/>
                 </a:solidFill>
+                <a:latin typeface="微软雅黑"/>
               </a:rPr>
-              <a:t>5 / 10</a:t>
-            </a:r>
-          </a:p>
-        </p:txBody>
-      </p:sp>
-      <p:sp>
-        <p:nvSpPr>
-          <p:cNvPr id="11" name="TextBox 10"/>
+              <a:t>两江智造集团 · Python程序设计（项目实战）</a:t>
+            </a:r>
+          </a:p>
+        </p:txBody>
+      </p:sp>
+      <p:sp>
+        <p:nvSpPr>
+          <p:cNvPr id="9" name="TextBox 8"/>
           <p:cNvSpPr txBox="1"/>
           <p:nvPr/>
         </p:nvSpPr>
         <p:spPr>
           <a:xfrm>
-            <a:off x="475488" y="1517904"/>
-            <a:ext cx="11237976" cy="237744"/>
+            <a:off x="10600000" y="6540000"/>
+            <a:ext cx="1000000" cy="300000"/>
           </a:xfrm>
           <a:prstGeom prst="rect">
             <a:avLst/>
@@ -10422,85 +10842,27 @@
           <a:noFill/>
         </p:spPr>
         <p:txBody>
-          <a:bodyPr wrap="square" anchor="t" lIns="0" rIns="0" tIns="0" bIns="0">
+          <a:bodyPr wrap="square" anchor="ctr">
             <a:spAutoFit/>
           </a:bodyPr>
           <a:lstStyle/>
           <a:p>
-            <a:pPr algn="l">
+            <a:pPr algn="r">
               <a:lnSpc>
-                <a:spcPct val="114000"/>
+                <a:spcPct val="110000"/>
               </a:lnSpc>
+              <a:spcAft>
+                <a:spcPts val="600"/>
+              </a:spcAft>
             </a:pPr>
             <a:r>
               <a:rPr sz="1000" b="0">
                 <a:solidFill>
-                  <a:srgbClr val="5C6E6A"/>
+                  <a:srgbClr val="8A97B5"/>
                 </a:solidFill>
+                <a:latin typeface="微软雅黑"/>
               </a:rPr>
-              <a:t>终端窗口截图：由 report.txt 本节逐字渲染，未手工改写</a:t>
-            </a:r>
-          </a:p>
-        </p:txBody>
-      </p:sp>
-      <p:pic>
-        <p:nvPicPr>
-          <p:cNvPr id="12" name="Picture 11" descr="p12_proj_template_workorder.png"/>
-          <p:cNvPicPr>
-            <a:picLocks noChangeAspect="1"/>
-          </p:cNvPicPr>
-          <p:nvPr/>
-        </p:nvPicPr>
-        <p:blipFill>
-          <a:blip r:embed="rId2"/>
-          <a:stretch>
-            <a:fillRect/>
-          </a:stretch>
-        </p:blipFill>
-        <p:spPr>
-          <a:xfrm>
-            <a:off x="475488" y="1823437"/>
-            <a:ext cx="11237976" cy="3787198"/>
-          </a:xfrm>
-          <a:prstGeom prst="rect">
-            <a:avLst/>
-          </a:prstGeom>
-        </p:spPr>
-      </p:pic>
-      <p:sp>
-        <p:nvSpPr>
-          <p:cNvPr id="13" name="TextBox 12"/>
-          <p:cNvSpPr txBox="1"/>
-          <p:nvPr/>
-        </p:nvSpPr>
-        <p:spPr>
-          <a:xfrm>
-            <a:off x="475488" y="5647210"/>
-            <a:ext cx="11237976" cy="256032"/>
-          </a:xfrm>
-          <a:prstGeom prst="rect">
-            <a:avLst/>
-          </a:prstGeom>
-          <a:noFill/>
-        </p:spPr>
-        <p:txBody>
-          <a:bodyPr wrap="square" anchor="t" lIns="0" rIns="0" tIns="0" bIns="0">
-            <a:spAutoFit/>
-          </a:bodyPr>
-          <a:lstStyle/>
-          <a:p>
-            <a:pPr algn="l">
-              <a:lnSpc>
-                <a:spcPct val="114000"/>
-              </a:lnSpc>
-            </a:pPr>
-            <a:r>
-              <a:rPr sz="850" b="0">
-                <a:solidFill>
-                  <a:srgbClr val="5C6E6A"/>
-                </a:solidFill>
-              </a:rPr>
-              <a:t>▲ p12_proj_template：工单验收四档对照 第 37 行起的四档逐字原文（绿=达标/通过，黄=仅本节取证项，橙=未实测项）</a:t>
+              <a:t>9 / 10</a:t>
             </a:r>
           </a:p>
         </p:txBody>
